--- a/material/[SeSAC_YDP_6] 25_React_Event_handling.pptx
+++ b/material/[SeSAC_YDP_6] 25_React_Event_handling.pptx
@@ -2,10 +2,10 @@
 <file path=ppt/presentation.xml><?xml version="1.0" encoding="utf-8"?>
 <p:presentation xmlns:a="http://schemas.openxmlformats.org/drawingml/2006/main" xmlns:r="http://schemas.openxmlformats.org/officeDocument/2006/relationships" xmlns:p="http://schemas.openxmlformats.org/presentationml/2006/main" saveSubsetFonts="1">
   <p:sldMasterIdLst>
-    <p:sldMasterId id="2147483673" r:id="rId1"/>
+    <p:sldMasterId id="2147483686" r:id="rId1"/>
   </p:sldMasterIdLst>
   <p:notesMasterIdLst>
-    <p:notesMasterId r:id="rId15"/>
+    <p:notesMasterId r:id="rId13"/>
   </p:notesMasterIdLst>
   <p:sldIdLst>
     <p:sldId id="256" r:id="rId2"/>
@@ -17,10 +17,8 @@
     <p:sldId id="261" r:id="rId8"/>
     <p:sldId id="262" r:id="rId9"/>
     <p:sldId id="263" r:id="rId10"/>
-    <p:sldId id="265" r:id="rId11"/>
-    <p:sldId id="266" r:id="rId12"/>
-    <p:sldId id="267" r:id="rId13"/>
-    <p:sldId id="268" r:id="rId14"/>
+    <p:sldId id="268" r:id="rId11"/>
+    <p:sldId id="269" r:id="rId12"/>
   </p:sldIdLst>
   <p:sldSz cx="12192000" cy="6858000"/>
   <p:notesSz cx="6858000" cy="9144000"/>
@@ -212,7 +210,7 @@
           <a:p>
             <a:fld id="{2EF3F159-7250-4DD4-91C2-13B35D56E1AF}" type="datetimeFigureOut">
               <a:rPr lang="ko-KR" altLang="en-US" smtClean="0"/>
-              <a:t>2023-09-27</a:t>
+              <a:t>2024-08-05</a:t>
             </a:fld>
             <a:endParaRPr lang="ko-KR" altLang="en-US"/>
           </a:p>
@@ -563,199 +561,6 @@
 </p:notes>
 </file>
 
-<file path=ppt/notesSlides/notesSlide10.xml><?xml version="1.0" encoding="utf-8"?>
-<p:notes xmlns:a="http://schemas.openxmlformats.org/drawingml/2006/main" xmlns:r="http://schemas.openxmlformats.org/officeDocument/2006/relationships" xmlns:p="http://schemas.openxmlformats.org/presentationml/2006/main">
-  <p:cSld>
-    <p:spTree>
-      <p:nvGrpSpPr>
-        <p:cNvPr id="1" name=""/>
-        <p:cNvGrpSpPr/>
-        <p:nvPr/>
-      </p:nvGrpSpPr>
-      <p:grpSpPr>
-        <a:xfrm>
-          <a:off x="0" y="0"/>
-          <a:ext cx="0" cy="0"/>
-          <a:chOff x="0" y="0"/>
-          <a:chExt cx="0" cy="0"/>
-        </a:xfrm>
-      </p:grpSpPr>
-      <p:sp>
-        <p:nvSpPr>
-          <p:cNvPr id="2" name="슬라이드 이미지 개체 틀 1"/>
-          <p:cNvSpPr>
-            <a:spLocks noGrp="1" noRot="1" noChangeAspect="1"/>
-          </p:cNvSpPr>
-          <p:nvPr>
-            <p:ph type="sldImg"/>
-          </p:nvPr>
-        </p:nvSpPr>
-        <p:spPr/>
-      </p:sp>
-      <p:sp>
-        <p:nvSpPr>
-          <p:cNvPr id="3" name="슬라이드 노트 개체 틀 2"/>
-          <p:cNvSpPr>
-            <a:spLocks noGrp="1"/>
-          </p:cNvSpPr>
-          <p:nvPr>
-            <p:ph type="body" idx="1"/>
-          </p:nvPr>
-        </p:nvSpPr>
-        <p:spPr/>
-        <p:txBody>
-          <a:bodyPr/>
-          <a:lstStyle/>
-          <a:p>
-            <a:r>
-              <a:rPr lang="en-US" altLang="ko-KR" dirty="0"/>
-              <a:t>04_eventhandling</a:t>
-            </a:r>
-          </a:p>
-          <a:p>
-            <a:r>
-              <a:rPr lang="ko-KR" altLang="en-US" dirty="0"/>
-              <a:t>힌트</a:t>
-            </a:r>
-            <a:r>
-              <a:rPr lang="en-US" altLang="ko-KR" dirty="0"/>
-              <a:t>: state </a:t>
-            </a:r>
-            <a:r>
-              <a:rPr lang="en-US" altLang="ko-KR" dirty="0" err="1"/>
-              <a:t>boolean</a:t>
-            </a:r>
-            <a:r>
-              <a:rPr lang="ko-KR" altLang="en-US" dirty="0"/>
-              <a:t> 가능</a:t>
-            </a:r>
-          </a:p>
-        </p:txBody>
-      </p:sp>
-      <p:sp>
-        <p:nvSpPr>
-          <p:cNvPr id="4" name="슬라이드 번호 개체 틀 3"/>
-          <p:cNvSpPr>
-            <a:spLocks noGrp="1"/>
-          </p:cNvSpPr>
-          <p:nvPr>
-            <p:ph type="sldNum" sz="quarter" idx="5"/>
-          </p:nvPr>
-        </p:nvSpPr>
-        <p:spPr/>
-        <p:txBody>
-          <a:bodyPr/>
-          <a:lstStyle/>
-          <a:p>
-            <a:fld id="{C09E5BFC-1559-42F1-8940-AB342D56BF02}" type="slidenum">
-              <a:rPr lang="ko-KR" altLang="en-US" smtClean="0"/>
-              <a:t>12</a:t>
-            </a:fld>
-            <a:endParaRPr lang="ko-KR" altLang="en-US"/>
-          </a:p>
-        </p:txBody>
-      </p:sp>
-    </p:spTree>
-    <p:extLst>
-      <p:ext uri="{BB962C8B-B14F-4D97-AF65-F5344CB8AC3E}">
-        <p14:creationId xmlns:p14="http://schemas.microsoft.com/office/powerpoint/2010/main" val="3145691915"/>
-      </p:ext>
-    </p:extLst>
-  </p:cSld>
-  <p:clrMapOvr>
-    <a:masterClrMapping/>
-  </p:clrMapOvr>
-</p:notes>
-</file>
-
-<file path=ppt/notesSlides/notesSlide11.xml><?xml version="1.0" encoding="utf-8"?>
-<p:notes xmlns:a="http://schemas.openxmlformats.org/drawingml/2006/main" xmlns:r="http://schemas.openxmlformats.org/officeDocument/2006/relationships" xmlns:p="http://schemas.openxmlformats.org/presentationml/2006/main">
-  <p:cSld>
-    <p:spTree>
-      <p:nvGrpSpPr>
-        <p:cNvPr id="1" name=""/>
-        <p:cNvGrpSpPr/>
-        <p:nvPr/>
-      </p:nvGrpSpPr>
-      <p:grpSpPr>
-        <a:xfrm>
-          <a:off x="0" y="0"/>
-          <a:ext cx="0" cy="0"/>
-          <a:chOff x="0" y="0"/>
-          <a:chExt cx="0" cy="0"/>
-        </a:xfrm>
-      </p:grpSpPr>
-      <p:sp>
-        <p:nvSpPr>
-          <p:cNvPr id="2" name="슬라이드 이미지 개체 틀 1"/>
-          <p:cNvSpPr>
-            <a:spLocks noGrp="1" noRot="1" noChangeAspect="1"/>
-          </p:cNvSpPr>
-          <p:nvPr>
-            <p:ph type="sldImg"/>
-          </p:nvPr>
-        </p:nvSpPr>
-        <p:spPr/>
-      </p:sp>
-      <p:sp>
-        <p:nvSpPr>
-          <p:cNvPr id="3" name="슬라이드 노트 개체 틀 2"/>
-          <p:cNvSpPr>
-            <a:spLocks noGrp="1"/>
-          </p:cNvSpPr>
-          <p:nvPr>
-            <p:ph type="body" idx="1"/>
-          </p:nvPr>
-        </p:nvSpPr>
-        <p:spPr/>
-        <p:txBody>
-          <a:bodyPr/>
-          <a:lstStyle/>
-          <a:p>
-            <a:r>
-              <a:rPr lang="en-US" altLang="ko-KR" dirty="0"/>
-              <a:t>04_eventhandling</a:t>
-            </a:r>
-            <a:endParaRPr lang="ko-KR" altLang="en-US" dirty="0"/>
-          </a:p>
-        </p:txBody>
-      </p:sp>
-      <p:sp>
-        <p:nvSpPr>
-          <p:cNvPr id="4" name="슬라이드 번호 개체 틀 3"/>
-          <p:cNvSpPr>
-            <a:spLocks noGrp="1"/>
-          </p:cNvSpPr>
-          <p:nvPr>
-            <p:ph type="sldNum" sz="quarter" idx="5"/>
-          </p:nvPr>
-        </p:nvSpPr>
-        <p:spPr/>
-        <p:txBody>
-          <a:bodyPr/>
-          <a:lstStyle/>
-          <a:p>
-            <a:fld id="{C09E5BFC-1559-42F1-8940-AB342D56BF02}" type="slidenum">
-              <a:rPr lang="ko-KR" altLang="en-US" smtClean="0"/>
-              <a:t>13</a:t>
-            </a:fld>
-            <a:endParaRPr lang="ko-KR" altLang="en-US"/>
-          </a:p>
-        </p:txBody>
-      </p:sp>
-    </p:spTree>
-    <p:extLst>
-      <p:ext uri="{BB962C8B-B14F-4D97-AF65-F5344CB8AC3E}">
-        <p14:creationId xmlns:p14="http://schemas.microsoft.com/office/powerpoint/2010/main" val="771570096"/>
-      </p:ext>
-    </p:extLst>
-  </p:cSld>
-  <p:clrMapOvr>
-    <a:masterClrMapping/>
-  </p:clrMapOvr>
-</p:notes>
-</file>
-
 <file path=ppt/notesSlides/notesSlide2.xml><?xml version="1.0" encoding="utf-8"?>
 <p:notes xmlns:a="http://schemas.openxmlformats.org/drawingml/2006/main" xmlns:r="http://schemas.openxmlformats.org/officeDocument/2006/relationships" xmlns:p="http://schemas.openxmlformats.org/presentationml/2006/main">
   <p:cSld>
@@ -799,6 +604,297 @@
         <p:txBody>
           <a:bodyPr/>
           <a:lstStyle/>
+          <a:p>
+            <a:r>
+              <a:rPr lang="en-US" altLang="ko-KR" sz="1200" b="0" kern="1200" dirty="0" smtClean="0">
+                <a:solidFill>
+                  <a:schemeClr val="tx1"/>
+                </a:solidFill>
+                <a:effectLst/>
+                <a:latin typeface="+mn-lt"/>
+                <a:ea typeface="+mn-ea"/>
+                <a:cs typeface="+mn-cs"/>
+              </a:rPr>
+              <a:t>- HTML : </a:t>
+            </a:r>
+            <a:r>
+              <a:rPr lang="en-US" altLang="ko-KR" sz="1200" b="0" kern="1200" dirty="0" err="1" smtClean="0">
+                <a:solidFill>
+                  <a:schemeClr val="tx1"/>
+                </a:solidFill>
+                <a:effectLst/>
+                <a:latin typeface="+mn-lt"/>
+                <a:ea typeface="+mn-ea"/>
+                <a:cs typeface="+mn-cs"/>
+              </a:rPr>
+              <a:t>onclick</a:t>
+            </a:r>
+            <a:r>
+              <a:rPr lang="en-US" altLang="ko-KR" sz="1200" b="0" kern="1200" dirty="0" smtClean="0">
+                <a:solidFill>
+                  <a:schemeClr val="tx1"/>
+                </a:solidFill>
+                <a:effectLst/>
+                <a:latin typeface="+mn-lt"/>
+                <a:ea typeface="+mn-ea"/>
+                <a:cs typeface="+mn-cs"/>
+              </a:rPr>
+              <a:t>="</a:t>
+            </a:r>
+            <a:r>
+              <a:rPr lang="en-US" altLang="ko-KR" sz="1200" b="0" kern="1200" dirty="0" err="1" smtClean="0">
+                <a:solidFill>
+                  <a:schemeClr val="tx1"/>
+                </a:solidFill>
+                <a:effectLst/>
+                <a:latin typeface="+mn-lt"/>
+                <a:ea typeface="+mn-ea"/>
+                <a:cs typeface="+mn-cs"/>
+              </a:rPr>
+              <a:t>onClickEvent</a:t>
+            </a:r>
+            <a:r>
+              <a:rPr lang="en-US" altLang="ko-KR" sz="1200" b="0" kern="1200" dirty="0" smtClean="0">
+                <a:solidFill>
+                  <a:schemeClr val="tx1"/>
+                </a:solidFill>
+                <a:effectLst/>
+                <a:latin typeface="+mn-lt"/>
+                <a:ea typeface="+mn-ea"/>
+                <a:cs typeface="+mn-cs"/>
+              </a:rPr>
+              <a:t>()" -&gt; </a:t>
+            </a:r>
+            <a:r>
+              <a:rPr lang="ko-KR" altLang="en-US" sz="1200" b="0" kern="1200" dirty="0" smtClean="0">
+                <a:solidFill>
+                  <a:schemeClr val="tx1"/>
+                </a:solidFill>
+                <a:effectLst/>
+                <a:latin typeface="+mn-lt"/>
+                <a:ea typeface="+mn-ea"/>
+                <a:cs typeface="+mn-cs"/>
+              </a:rPr>
+              <a:t>문자열 형식의 </a:t>
+            </a:r>
+            <a:r>
+              <a:rPr lang="ko-KR" altLang="en-US" sz="1200" b="0" kern="1200" dirty="0" err="1" smtClean="0">
+                <a:solidFill>
+                  <a:schemeClr val="tx1"/>
+                </a:solidFill>
+                <a:effectLst/>
+                <a:latin typeface="+mn-lt"/>
+                <a:ea typeface="+mn-ea"/>
+                <a:cs typeface="+mn-cs"/>
+              </a:rPr>
+              <a:t>호출문</a:t>
+            </a:r>
+            <a:r>
+              <a:rPr lang="ko-KR" altLang="en-US" sz="1200" b="0" kern="1200" dirty="0" smtClean="0">
+                <a:solidFill>
+                  <a:schemeClr val="tx1"/>
+                </a:solidFill>
+                <a:effectLst/>
+                <a:latin typeface="+mn-lt"/>
+                <a:ea typeface="+mn-ea"/>
+                <a:cs typeface="+mn-cs"/>
+              </a:rPr>
+              <a:t> 등록</a:t>
+            </a:r>
+          </a:p>
+          <a:p>
+            <a:r>
+              <a:rPr lang="en-US" altLang="ko-KR" sz="1200" b="0" kern="1200" dirty="0" smtClean="0">
+                <a:solidFill>
+                  <a:schemeClr val="tx1"/>
+                </a:solidFill>
+                <a:effectLst/>
+                <a:latin typeface="+mn-lt"/>
+                <a:ea typeface="+mn-ea"/>
+                <a:cs typeface="+mn-cs"/>
+              </a:rPr>
+              <a:t>- JS : </a:t>
+            </a:r>
+            <a:r>
+              <a:rPr lang="en-US" altLang="ko-KR" sz="1200" b="0" kern="1200" dirty="0" err="1" smtClean="0">
+                <a:solidFill>
+                  <a:schemeClr val="tx1"/>
+                </a:solidFill>
+                <a:effectLst/>
+                <a:latin typeface="+mn-lt"/>
+                <a:ea typeface="+mn-ea"/>
+                <a:cs typeface="+mn-cs"/>
+              </a:rPr>
+              <a:t>addEventListener</a:t>
+            </a:r>
+            <a:r>
+              <a:rPr lang="en-US" altLang="ko-KR" sz="1200" b="0" kern="1200" dirty="0" smtClean="0">
+                <a:solidFill>
+                  <a:schemeClr val="tx1"/>
+                </a:solidFill>
+                <a:effectLst/>
+                <a:latin typeface="+mn-lt"/>
+                <a:ea typeface="+mn-ea"/>
+                <a:cs typeface="+mn-cs"/>
+              </a:rPr>
+              <a:t>('click', </a:t>
+            </a:r>
+            <a:r>
+              <a:rPr lang="en-US" altLang="ko-KR" sz="1200" b="0" kern="1200" dirty="0" err="1" smtClean="0">
+                <a:solidFill>
+                  <a:schemeClr val="tx1"/>
+                </a:solidFill>
+                <a:effectLst/>
+                <a:latin typeface="+mn-lt"/>
+                <a:ea typeface="+mn-ea"/>
+                <a:cs typeface="+mn-cs"/>
+              </a:rPr>
+              <a:t>onClickEvent</a:t>
+            </a:r>
+            <a:r>
+              <a:rPr lang="en-US" altLang="ko-KR" sz="1200" b="0" kern="1200" dirty="0" smtClean="0">
+                <a:solidFill>
+                  <a:schemeClr val="tx1"/>
+                </a:solidFill>
+                <a:effectLst/>
+                <a:latin typeface="+mn-lt"/>
+                <a:ea typeface="+mn-ea"/>
+                <a:cs typeface="+mn-cs"/>
+              </a:rPr>
+              <a:t>) -&gt; </a:t>
+            </a:r>
+            <a:r>
+              <a:rPr lang="ko-KR" altLang="en-US" sz="1200" b="0" kern="1200" dirty="0" smtClean="0">
+                <a:solidFill>
+                  <a:schemeClr val="tx1"/>
+                </a:solidFill>
+                <a:effectLst/>
+                <a:latin typeface="+mn-lt"/>
+                <a:ea typeface="+mn-ea"/>
+                <a:cs typeface="+mn-cs"/>
+              </a:rPr>
+              <a:t>괄호를 없애 함수를 바로 실행하지 않고</a:t>
+            </a:r>
+            <a:r>
+              <a:rPr lang="en-US" altLang="ko-KR" sz="1200" b="0" kern="1200" dirty="0" smtClean="0">
+                <a:solidFill>
+                  <a:schemeClr val="tx1"/>
+                </a:solidFill>
+                <a:effectLst/>
+                <a:latin typeface="+mn-lt"/>
+                <a:ea typeface="+mn-ea"/>
+                <a:cs typeface="+mn-cs"/>
+              </a:rPr>
+              <a:t>, </a:t>
+            </a:r>
+            <a:r>
+              <a:rPr lang="ko-KR" altLang="en-US" sz="1200" b="0" kern="1200" dirty="0" smtClean="0">
+                <a:solidFill>
+                  <a:schemeClr val="tx1"/>
+                </a:solidFill>
+                <a:effectLst/>
+                <a:latin typeface="+mn-lt"/>
+                <a:ea typeface="+mn-ea"/>
+                <a:cs typeface="+mn-cs"/>
+              </a:rPr>
+              <a:t>클릭 발생 했을 때 함수가 호출되도록 함</a:t>
+            </a:r>
+            <a:r>
+              <a:rPr lang="en-US" altLang="ko-KR" sz="1200" b="0" kern="1200" dirty="0" smtClean="0">
+                <a:solidFill>
+                  <a:schemeClr val="tx1"/>
+                </a:solidFill>
+                <a:effectLst/>
+                <a:latin typeface="+mn-lt"/>
+                <a:ea typeface="+mn-ea"/>
+                <a:cs typeface="+mn-cs"/>
+              </a:rPr>
+              <a:t>.</a:t>
+            </a:r>
+            <a:endParaRPr lang="ko-KR" altLang="en-US" sz="1200" b="0" kern="1200" dirty="0" smtClean="0">
+              <a:solidFill>
+                <a:schemeClr val="tx1"/>
+              </a:solidFill>
+              <a:effectLst/>
+              <a:latin typeface="+mn-lt"/>
+              <a:ea typeface="+mn-ea"/>
+              <a:cs typeface="+mn-cs"/>
+            </a:endParaRPr>
+          </a:p>
+          <a:p>
+            <a:r>
+              <a:rPr lang="en-US" altLang="ko-KR" sz="1200" b="0" kern="1200" dirty="0" smtClean="0">
+                <a:solidFill>
+                  <a:schemeClr val="tx1"/>
+                </a:solidFill>
+                <a:effectLst/>
+                <a:latin typeface="+mn-lt"/>
+                <a:ea typeface="+mn-ea"/>
+                <a:cs typeface="+mn-cs"/>
+              </a:rPr>
+              <a:t>- React : </a:t>
+            </a:r>
+            <a:r>
+              <a:rPr lang="en-US" altLang="ko-KR" sz="1200" b="0" kern="1200" dirty="0" err="1" smtClean="0">
+                <a:solidFill>
+                  <a:schemeClr val="tx1"/>
+                </a:solidFill>
+                <a:effectLst/>
+                <a:latin typeface="+mn-lt"/>
+                <a:ea typeface="+mn-ea"/>
+                <a:cs typeface="+mn-cs"/>
+              </a:rPr>
+              <a:t>onClick</a:t>
+            </a:r>
+            <a:r>
+              <a:rPr lang="en-US" altLang="ko-KR" sz="1200" b="0" kern="1200" dirty="0" smtClean="0">
+                <a:solidFill>
+                  <a:schemeClr val="tx1"/>
+                </a:solidFill>
+                <a:effectLst/>
+                <a:latin typeface="+mn-lt"/>
+                <a:ea typeface="+mn-ea"/>
+                <a:cs typeface="+mn-cs"/>
+              </a:rPr>
+              <a:t>={</a:t>
+            </a:r>
+            <a:r>
+              <a:rPr lang="en-US" altLang="ko-KR" sz="1200" b="0" kern="1200" dirty="0" err="1" smtClean="0">
+                <a:solidFill>
+                  <a:schemeClr val="tx1"/>
+                </a:solidFill>
+                <a:effectLst/>
+                <a:latin typeface="+mn-lt"/>
+                <a:ea typeface="+mn-ea"/>
+                <a:cs typeface="+mn-cs"/>
+              </a:rPr>
+              <a:t>onClickEvent</a:t>
+            </a:r>
+            <a:r>
+              <a:rPr lang="en-US" altLang="ko-KR" sz="1200" b="0" kern="1200" dirty="0" smtClean="0">
+                <a:solidFill>
+                  <a:schemeClr val="tx1"/>
+                </a:solidFill>
+                <a:effectLst/>
+                <a:latin typeface="+mn-lt"/>
+                <a:ea typeface="+mn-ea"/>
+                <a:cs typeface="+mn-cs"/>
+              </a:rPr>
+              <a:t>} -&gt; JS</a:t>
+            </a:r>
+            <a:r>
+              <a:rPr lang="ko-KR" altLang="en-US" sz="1200" b="0" kern="1200" dirty="0" smtClean="0">
+                <a:solidFill>
+                  <a:schemeClr val="tx1"/>
+                </a:solidFill>
+                <a:effectLst/>
+                <a:latin typeface="+mn-lt"/>
+                <a:ea typeface="+mn-ea"/>
+                <a:cs typeface="+mn-cs"/>
+              </a:rPr>
+              <a:t>와 동일</a:t>
+            </a:r>
+          </a:p>
           <a:p>
             <a:endParaRPr lang="ko-KR" altLang="en-US" dirty="0"/>
           </a:p>
@@ -1070,7 +1166,331 @@
             </a:r>
             <a:r>
               <a:rPr lang="ko-KR" altLang="en-US" baseline="0" dirty="0" smtClean="0"/>
-              <a:t> 있지 않음</a:t>
+              <a:t> 있지 </a:t>
+            </a:r>
+            <a:r>
+              <a:rPr lang="ko-KR" altLang="en-US" baseline="0" dirty="0" smtClean="0"/>
+              <a:t>않음</a:t>
+            </a:r>
+            <a:endParaRPr lang="en-US" altLang="ko-KR" baseline="0" dirty="0" smtClean="0"/>
+          </a:p>
+          <a:p>
+            <a:endParaRPr lang="en-US" altLang="ko-KR" baseline="0" dirty="0" smtClean="0"/>
+          </a:p>
+          <a:p>
+            <a:r>
+              <a:rPr lang="en-US" altLang="ko-KR" baseline="0" dirty="0" smtClean="0"/>
+              <a:t>**</a:t>
+            </a:r>
+          </a:p>
+          <a:p>
+            <a:r>
+              <a:rPr lang="en-US" altLang="ko-KR" baseline="0" dirty="0" smtClean="0"/>
+              <a:t>‘bind’ </a:t>
+            </a:r>
+            <a:r>
+              <a:rPr lang="ko-KR" altLang="en-US" baseline="0" dirty="0" smtClean="0"/>
+              <a:t>메서드로 </a:t>
+            </a:r>
+            <a:r>
+              <a:rPr lang="en-US" altLang="ko-KR" baseline="0" dirty="0" smtClean="0"/>
+              <a:t>‘this’ </a:t>
+            </a:r>
+            <a:r>
+              <a:rPr lang="ko-KR" altLang="en-US" baseline="0" dirty="0" smtClean="0"/>
+              <a:t>바인딩</a:t>
+            </a:r>
+            <a:endParaRPr lang="en-US" altLang="ko-KR" baseline="0" dirty="0" smtClean="0"/>
+          </a:p>
+          <a:p>
+            <a:endParaRPr lang="en-US" altLang="ko-KR" dirty="0" smtClean="0"/>
+          </a:p>
+          <a:p>
+            <a:r>
+              <a:rPr lang="en-US" altLang="ko-KR" dirty="0" smtClean="0"/>
+              <a:t>*** </a:t>
+            </a:r>
+            <a:r>
+              <a:rPr lang="ko-KR" altLang="en-US" dirty="0" smtClean="0"/>
+              <a:t>바인딩이란</a:t>
+            </a:r>
+            <a:r>
+              <a:rPr lang="en-US" altLang="ko-KR" dirty="0" smtClean="0"/>
+              <a:t>?</a:t>
+            </a:r>
+            <a:r>
+              <a:rPr lang="en-US" altLang="ko-KR" baseline="0" dirty="0" smtClean="0"/>
+              <a:t> (Binding)</a:t>
+            </a:r>
+          </a:p>
+          <a:p>
+            <a:pPr marL="171450" indent="-171450">
+              <a:buFontTx/>
+              <a:buChar char="-"/>
+            </a:pPr>
+            <a:r>
+              <a:rPr lang="ko-KR" altLang="en-US" baseline="0" dirty="0" smtClean="0"/>
+              <a:t>프로그램의 어떤 기본단위가 가질 수 있는 구성요소의 구체적인 값</a:t>
+            </a:r>
+            <a:r>
+              <a:rPr lang="en-US" altLang="ko-KR" baseline="0" dirty="0" smtClean="0"/>
+              <a:t>, </a:t>
+            </a:r>
+            <a:r>
+              <a:rPr lang="ko-KR" altLang="en-US" baseline="0" dirty="0" smtClean="0"/>
+              <a:t>성격을 확정하는 것</a:t>
+            </a:r>
+            <a:r>
+              <a:rPr lang="en-US" altLang="ko-KR" baseline="0" dirty="0" smtClean="0"/>
+              <a:t>!</a:t>
+            </a:r>
+          </a:p>
+          <a:p>
+            <a:pPr marL="171450" indent="-171450">
+              <a:buFontTx/>
+              <a:buChar char="-"/>
+            </a:pPr>
+            <a:r>
+              <a:rPr lang="en-US" altLang="ko-KR" baseline="0" dirty="0" smtClean="0"/>
+              <a:t>‘this’</a:t>
+            </a:r>
+            <a:r>
+              <a:rPr lang="ko-KR" altLang="en-US" baseline="0" dirty="0" smtClean="0"/>
+              <a:t>는 함수가 호출되는 방식에 따라 달라짐</a:t>
+            </a:r>
+            <a:r>
+              <a:rPr lang="en-US" altLang="ko-KR" baseline="0" dirty="0" smtClean="0"/>
+              <a:t>.</a:t>
+            </a:r>
+          </a:p>
+          <a:p>
+            <a:pPr marL="171450" indent="-171450">
+              <a:buFontTx/>
+              <a:buChar char="-"/>
+            </a:pPr>
+            <a:r>
+              <a:rPr lang="ko-KR" altLang="en-US" baseline="0" dirty="0" smtClean="0"/>
+              <a:t>즉</a:t>
+            </a:r>
+            <a:r>
+              <a:rPr lang="en-US" altLang="ko-KR" baseline="0" dirty="0" smtClean="0"/>
+              <a:t>, ‘this’</a:t>
+            </a:r>
+            <a:r>
+              <a:rPr lang="ko-KR" altLang="en-US" baseline="0" dirty="0" smtClean="0"/>
+              <a:t>가 무엇을 가리키는지 명확하게 해주기 위해 바인딩이 필요</a:t>
+            </a:r>
+            <a:r>
+              <a:rPr lang="en-US" altLang="ko-KR" baseline="0" dirty="0" smtClean="0"/>
+              <a:t>.</a:t>
+            </a:r>
+          </a:p>
+          <a:p>
+            <a:pPr marL="171450" indent="-171450">
+              <a:buFontTx/>
+              <a:buChar char="-"/>
+            </a:pPr>
+            <a:r>
+              <a:rPr lang="en-US" altLang="ko-KR" dirty="0" smtClean="0"/>
+              <a:t>this</a:t>
+            </a:r>
+            <a:r>
+              <a:rPr lang="ko-KR" altLang="en-US" dirty="0" smtClean="0"/>
+              <a:t>가 올바른 객체를 가리키도록 설정하는 작업</a:t>
+            </a:r>
+            <a:r>
+              <a:rPr lang="en-US" altLang="ko-KR" dirty="0" smtClean="0"/>
+              <a:t>.</a:t>
+            </a:r>
+          </a:p>
+          <a:p>
+            <a:pPr marL="171450" indent="-171450">
+              <a:buFontTx/>
+              <a:buChar char="-"/>
+            </a:pPr>
+            <a:endParaRPr lang="en-US" altLang="ko-KR" dirty="0" smtClean="0"/>
+          </a:p>
+          <a:p>
+            <a:r>
+              <a:rPr lang="en-US" altLang="ko-KR" dirty="0" smtClean="0"/>
+              <a:t>**</a:t>
+            </a:r>
+          </a:p>
+          <a:p>
+            <a:r>
+              <a:rPr lang="en-US" altLang="ko-KR" dirty="0" smtClean="0"/>
+              <a:t>‘bind’ </a:t>
+            </a:r>
+            <a:r>
+              <a:rPr lang="ko-KR" altLang="en-US" dirty="0" smtClean="0"/>
+              <a:t>피하기 위한 방법</a:t>
+            </a:r>
+            <a:endParaRPr lang="en-US" altLang="ko-KR" dirty="0" smtClean="0"/>
+          </a:p>
+          <a:p>
+            <a:pPr marL="171450" indent="-171450">
+              <a:buFontTx/>
+              <a:buChar char="-"/>
+            </a:pPr>
+            <a:r>
+              <a:rPr lang="ko-KR" altLang="en-US" dirty="0" smtClean="0"/>
+              <a:t>매번 </a:t>
+            </a:r>
+            <a:r>
+              <a:rPr lang="en-US" altLang="ko-KR" dirty="0" smtClean="0"/>
+              <a:t>‘bind’</a:t>
+            </a:r>
+            <a:r>
+              <a:rPr lang="ko-KR" altLang="en-US" dirty="0" smtClean="0"/>
+              <a:t>를 사용하는 것이 번거롭다면</a:t>
+            </a:r>
+            <a:r>
+              <a:rPr lang="en-US" altLang="ko-KR" dirty="0" smtClean="0"/>
+              <a:t>,</a:t>
+            </a:r>
+          </a:p>
+          <a:p>
+            <a:pPr marL="0" indent="0">
+              <a:buFontTx/>
+              <a:buNone/>
+            </a:pPr>
+            <a:r>
+              <a:rPr lang="en-US" altLang="ko-KR" dirty="0" smtClean="0"/>
+              <a:t>#1</a:t>
+            </a:r>
+            <a:r>
+              <a:rPr lang="en-US" altLang="ko-KR" baseline="0" dirty="0" smtClean="0"/>
+              <a:t> </a:t>
+            </a:r>
+            <a:r>
+              <a:rPr lang="ko-KR" altLang="en-US" baseline="0" dirty="0" smtClean="0"/>
+              <a:t>화살표 함수 이용</a:t>
+            </a:r>
+            <a:r>
+              <a:rPr lang="en-US" altLang="ko-KR" baseline="0" dirty="0" smtClean="0"/>
+              <a:t>.</a:t>
+            </a:r>
+          </a:p>
+          <a:p>
+            <a:pPr marL="0" indent="0">
+              <a:buFontTx/>
+              <a:buNone/>
+            </a:pPr>
+            <a:r>
+              <a:rPr lang="en-US" altLang="ko-KR" baseline="0" dirty="0" smtClean="0"/>
+              <a:t>-&gt; </a:t>
+            </a:r>
+            <a:r>
+              <a:rPr lang="ko-KR" altLang="en-US" baseline="0" dirty="0" smtClean="0"/>
+              <a:t>화살표 함수를 사용하면 </a:t>
+            </a:r>
+            <a:r>
+              <a:rPr lang="en-US" altLang="ko-KR" baseline="0" dirty="0" smtClean="0"/>
+              <a:t>‘this’</a:t>
+            </a:r>
+            <a:r>
+              <a:rPr lang="ko-KR" altLang="en-US" baseline="0" dirty="0" smtClean="0"/>
+              <a:t>가 자동으로 바인딩 되므로 </a:t>
+            </a:r>
+            <a:r>
+              <a:rPr lang="en-US" altLang="ko-KR" baseline="0" dirty="0" smtClean="0"/>
+              <a:t>‘bind’</a:t>
+            </a:r>
+            <a:r>
+              <a:rPr lang="ko-KR" altLang="en-US" baseline="0" dirty="0" smtClean="0"/>
+              <a:t>를</a:t>
+            </a:r>
+            <a:r>
+              <a:rPr lang="en-US" altLang="ko-KR" baseline="0" dirty="0" smtClean="0"/>
+              <a:t> </a:t>
+            </a:r>
+            <a:r>
+              <a:rPr lang="ko-KR" altLang="en-US" baseline="0" dirty="0" smtClean="0"/>
+              <a:t>사용할 필요가 없음</a:t>
+            </a:r>
+            <a:r>
+              <a:rPr lang="en-US" altLang="ko-KR" baseline="0" dirty="0" smtClean="0"/>
+              <a:t>.</a:t>
+            </a:r>
+          </a:p>
+          <a:p>
+            <a:pPr marL="0" indent="0">
+              <a:buFontTx/>
+              <a:buNone/>
+            </a:pPr>
+            <a:endParaRPr lang="en-US" altLang="ko-KR" baseline="0" dirty="0" smtClean="0"/>
+          </a:p>
+          <a:p>
+            <a:pPr marL="0" indent="0">
+              <a:buFontTx/>
+              <a:buNone/>
+            </a:pPr>
+            <a:r>
+              <a:rPr lang="en-US" altLang="ko-KR" baseline="0" dirty="0" smtClean="0"/>
+              <a:t>#2 </a:t>
+            </a:r>
+            <a:r>
+              <a:rPr lang="ko-KR" altLang="en-US" baseline="0" dirty="0" err="1" smtClean="0"/>
+              <a:t>생성자에게</a:t>
+            </a:r>
+            <a:r>
+              <a:rPr lang="ko-KR" altLang="en-US" baseline="0" dirty="0" smtClean="0"/>
+              <a:t> 바인딩하기</a:t>
+            </a:r>
+            <a:endParaRPr lang="en-US" altLang="ko-KR" baseline="0" dirty="0" smtClean="0"/>
+          </a:p>
+          <a:p>
+            <a:pPr marL="0" indent="0">
+              <a:buFontTx/>
+              <a:buNone/>
+            </a:pPr>
+            <a:r>
+              <a:rPr lang="en-US" altLang="ko-KR" dirty="0" smtClean="0"/>
+              <a:t>-&gt; </a:t>
+            </a:r>
+            <a:r>
+              <a:rPr lang="ko-KR" altLang="en-US" dirty="0" err="1" smtClean="0"/>
+              <a:t>생성자에서</a:t>
+            </a:r>
+            <a:r>
+              <a:rPr lang="ko-KR" altLang="en-US" dirty="0" smtClean="0"/>
+              <a:t> 한 번만 </a:t>
+            </a:r>
+            <a:r>
+              <a:rPr lang="en-US" altLang="ko-KR" dirty="0" smtClean="0"/>
+              <a:t>bind</a:t>
+            </a:r>
+            <a:r>
+              <a:rPr lang="ko-KR" altLang="en-US" dirty="0" smtClean="0"/>
+              <a:t>를 해두면</a:t>
+            </a:r>
+            <a:r>
+              <a:rPr lang="en-US" altLang="ko-KR" dirty="0" smtClean="0"/>
+              <a:t>, </a:t>
+            </a:r>
+            <a:r>
+              <a:rPr lang="ko-KR" altLang="en-US" dirty="0" smtClean="0"/>
+              <a:t>나중에 </a:t>
+            </a:r>
+            <a:r>
+              <a:rPr lang="en-US" altLang="ko-KR" dirty="0" smtClean="0"/>
+              <a:t>render </a:t>
+            </a:r>
+            <a:r>
+              <a:rPr lang="ko-KR" altLang="en-US" dirty="0" smtClean="0"/>
+              <a:t>메서드에서 반복적으로 </a:t>
+            </a:r>
+            <a:r>
+              <a:rPr lang="en-US" altLang="ko-KR" dirty="0" smtClean="0"/>
+              <a:t>bind</a:t>
+            </a:r>
+            <a:r>
+              <a:rPr lang="ko-KR" altLang="en-US" dirty="0" smtClean="0"/>
+              <a:t>할 필요가 없습니다</a:t>
+            </a:r>
+            <a:r>
+              <a:rPr lang="en-US" altLang="ko-KR" dirty="0" smtClean="0"/>
+              <a:t>.</a:t>
             </a:r>
             <a:endParaRPr lang="ko-KR" altLang="en-US" dirty="0"/>
           </a:p>
@@ -1358,7 +1778,7 @@
     </p:spTree>
     <p:extLst>
       <p:ext uri="{BB962C8B-B14F-4D97-AF65-F5344CB8AC3E}">
-        <p14:creationId xmlns:p14="http://schemas.microsoft.com/office/powerpoint/2010/main" val="2523700069"/>
+        <p14:creationId xmlns:p14="http://schemas.microsoft.com/office/powerpoint/2010/main" val="771570096"/>
       </p:ext>
     </p:extLst>
   </p:cSld>
@@ -1412,11 +1832,7 @@
           <a:bodyPr/>
           <a:lstStyle/>
           <a:p>
-            <a:r>
-              <a:rPr lang="en-US" altLang="ko-KR" dirty="0"/>
-              <a:t>04_eventhandling</a:t>
-            </a:r>
-            <a:endParaRPr lang="ko-KR" altLang="en-US" dirty="0"/>
+            <a:endParaRPr lang="en-US" altLang="ko-KR" dirty="0"/>
           </a:p>
         </p:txBody>
       </p:sp>
@@ -1446,7 +1862,7 @@
     </p:spTree>
     <p:extLst>
       <p:ext uri="{BB962C8B-B14F-4D97-AF65-F5344CB8AC3E}">
-        <p14:creationId xmlns:p14="http://schemas.microsoft.com/office/powerpoint/2010/main" val="1668826573"/>
+        <p14:creationId xmlns:p14="http://schemas.microsoft.com/office/powerpoint/2010/main" val="1832612303"/>
       </p:ext>
     </p:extLst>
   </p:cSld>
@@ -1473,43 +1889,6 @@
           <a:chExt cx="0" cy="0"/>
         </a:xfrm>
       </p:grpSpPr>
-      <p:pic>
-        <p:nvPicPr>
-          <p:cNvPr id="7" name="그림 6" descr="폰트, 텍스트, 로고, 그래픽이(가) 표시된 사진&#10;&#10;자동 생성된 설명">
-            <a:extLst>
-              <a:ext uri="{FF2B5EF4-FFF2-40B4-BE49-F238E27FC236}">
-                <a16:creationId xmlns:a16="http://schemas.microsoft.com/office/drawing/2014/main" id="{01AB1409-DEDF-C824-D8D3-05B260A93BD6}"/>
-              </a:ext>
-            </a:extLst>
-          </p:cNvPr>
-          <p:cNvPicPr>
-            <a:picLocks noChangeAspect="1"/>
-          </p:cNvPicPr>
-          <p:nvPr userDrawn="1"/>
-        </p:nvPicPr>
-        <p:blipFill>
-          <a:blip r:embed="rId2">
-            <a:alphaModFix/>
-            <a:extLst>
-              <a:ext uri="{28A0092B-C50C-407E-A947-70E740481C1C}">
-                <a14:useLocalDpi xmlns:a14="http://schemas.microsoft.com/office/drawing/2010/main" val="0"/>
-              </a:ext>
-            </a:extLst>
-          </a:blip>
-          <a:stretch>
-            <a:fillRect/>
-          </a:stretch>
-        </p:blipFill>
-        <p:spPr>
-          <a:xfrm>
-            <a:off x="118533" y="103811"/>
-            <a:ext cx="4328535" cy="2280805"/>
-          </a:xfrm>
-          <a:prstGeom prst="rect">
-            <a:avLst/>
-          </a:prstGeom>
-        </p:spPr>
-      </p:pic>
       <p:sp>
         <p:nvSpPr>
           <p:cNvPr id="2" name="제목 1">
@@ -1647,7 +2026,7 @@
           <a:p>
             <a:fld id="{0E19CB95-6D28-40F1-9DA3-1BAC5D4B5B4F}" type="datetime6">
               <a:rPr lang="ko-KR" altLang="en-US" smtClean="0"/>
-              <a:t>2023년 9월</a:t>
+              <a:t>2024년 8월</a:t>
             </a:fld>
             <a:endParaRPr lang="ko-KR" altLang="en-US"/>
           </a:p>
@@ -1762,221 +2141,47 @@
           </a:p>
         </p:txBody>
       </p:sp>
-      <p:sp>
-        <p:nvSpPr>
-          <p:cNvPr id="15" name="부제목 2">
-            <a:extLst>
-              <a:ext uri="{FF2B5EF4-FFF2-40B4-BE49-F238E27FC236}">
-                <a16:creationId xmlns:a16="http://schemas.microsoft.com/office/drawing/2014/main" id="{26026682-DE15-5F01-6FA7-8F46F9ABCC2A}"/>
-              </a:ext>
-            </a:extLst>
-          </p:cNvPr>
-          <p:cNvSpPr txBox="1">
-            <a:spLocks/>
-          </p:cNvSpPr>
+      <p:pic>
+        <p:nvPicPr>
+          <p:cNvPr id="5" name="그림 4" descr="그래픽, 그래픽 디자인, 클립아트, 다채로움이(가) 표시된 사진&#10;&#10;자동 생성된 설명">
+            <a:extLst>
+              <a:ext uri="{FF2B5EF4-FFF2-40B4-BE49-F238E27FC236}">
+                <a16:creationId xmlns:a16="http://schemas.microsoft.com/office/drawing/2014/main" id="{BE5A577B-81A7-2FA6-9E57-9DCEC5BF71F7}"/>
+              </a:ext>
+            </a:extLst>
+          </p:cNvPr>
+          <p:cNvPicPr>
+            <a:picLocks noChangeAspect="1"/>
+          </p:cNvPicPr>
           <p:nvPr userDrawn="1"/>
-        </p:nvSpPr>
+        </p:nvPicPr>
+        <p:blipFill>
+          <a:blip r:embed="rId2" cstate="hqprint">
+            <a:alphaModFix amt="20000"/>
+            <a:extLst>
+              <a:ext uri="{28A0092B-C50C-407E-A947-70E740481C1C}">
+                <a14:useLocalDpi xmlns:a14="http://schemas.microsoft.com/office/drawing/2010/main" val="0"/>
+              </a:ext>
+            </a:extLst>
+          </a:blip>
+          <a:stretch>
+            <a:fillRect/>
+          </a:stretch>
+        </p:blipFill>
         <p:spPr>
           <a:xfrm>
-            <a:off x="9110749" y="5933035"/>
-            <a:ext cx="2948515" cy="365125"/>
+            <a:off x="4296000" y="1461146"/>
+            <a:ext cx="3600000" cy="3652155"/>
           </a:xfrm>
           <a:prstGeom prst="rect">
             <a:avLst/>
           </a:prstGeom>
         </p:spPr>
-        <p:txBody>
-          <a:bodyPr vert="horz" lIns="91440" tIns="45720" rIns="91440" bIns="45720" rtlCol="0" anchor="ctr">
-            <a:noAutofit/>
-          </a:bodyPr>
-          <a:lstStyle>
-            <a:lvl1pPr marL="228600" indent="-228600" algn="l" defTabSz="914400" rtl="0" eaLnBrk="1" latinLnBrk="1" hangingPunct="1">
-              <a:lnSpc>
-                <a:spcPct val="90000"/>
-              </a:lnSpc>
-              <a:spcBef>
-                <a:spcPts val="1000"/>
-              </a:spcBef>
-              <a:buFont typeface="Arial" panose="020B0604020202020204" pitchFamily="34" charset="0"/>
-              <a:buChar char="•"/>
-              <a:defRPr sz="2800" kern="1200">
-                <a:solidFill>
-                  <a:schemeClr val="tx1"/>
-                </a:solidFill>
-                <a:latin typeface="+mn-lt"/>
-                <a:ea typeface="+mn-ea"/>
-                <a:cs typeface="+mn-cs"/>
-              </a:defRPr>
-            </a:lvl1pPr>
-            <a:lvl2pPr marL="685800" indent="-228600" algn="l" defTabSz="914400" rtl="0" eaLnBrk="1" latinLnBrk="1" hangingPunct="1">
-              <a:lnSpc>
-                <a:spcPct val="90000"/>
-              </a:lnSpc>
-              <a:spcBef>
-                <a:spcPts val="500"/>
-              </a:spcBef>
-              <a:buFont typeface="Arial" panose="020B0604020202020204" pitchFamily="34" charset="0"/>
-              <a:buChar char="•"/>
-              <a:defRPr sz="2400" kern="1200">
-                <a:solidFill>
-                  <a:schemeClr val="tx1"/>
-                </a:solidFill>
-                <a:latin typeface="+mn-lt"/>
-                <a:ea typeface="+mn-ea"/>
-                <a:cs typeface="+mn-cs"/>
-              </a:defRPr>
-            </a:lvl2pPr>
-            <a:lvl3pPr marL="1143000" indent="-228600" algn="l" defTabSz="914400" rtl="0" eaLnBrk="1" latinLnBrk="1" hangingPunct="1">
-              <a:lnSpc>
-                <a:spcPct val="90000"/>
-              </a:lnSpc>
-              <a:spcBef>
-                <a:spcPts val="500"/>
-              </a:spcBef>
-              <a:buFont typeface="Arial" panose="020B0604020202020204" pitchFamily="34" charset="0"/>
-              <a:buChar char="•"/>
-              <a:defRPr sz="2000" kern="1200">
-                <a:solidFill>
-                  <a:schemeClr val="tx1"/>
-                </a:solidFill>
-                <a:latin typeface="+mn-lt"/>
-                <a:ea typeface="+mn-ea"/>
-                <a:cs typeface="+mn-cs"/>
-              </a:defRPr>
-            </a:lvl3pPr>
-            <a:lvl4pPr marL="1600200" indent="-228600" algn="l" defTabSz="914400" rtl="0" eaLnBrk="1" latinLnBrk="1" hangingPunct="1">
-              <a:lnSpc>
-                <a:spcPct val="90000"/>
-              </a:lnSpc>
-              <a:spcBef>
-                <a:spcPts val="500"/>
-              </a:spcBef>
-              <a:buFont typeface="Arial" panose="020B0604020202020204" pitchFamily="34" charset="0"/>
-              <a:buChar char="•"/>
-              <a:defRPr sz="1800" kern="1200">
-                <a:solidFill>
-                  <a:schemeClr val="tx1"/>
-                </a:solidFill>
-                <a:latin typeface="+mn-lt"/>
-                <a:ea typeface="+mn-ea"/>
-                <a:cs typeface="+mn-cs"/>
-              </a:defRPr>
-            </a:lvl4pPr>
-            <a:lvl5pPr marL="2057400" indent="-228600" algn="l" defTabSz="914400" rtl="0" eaLnBrk="1" latinLnBrk="1" hangingPunct="1">
-              <a:lnSpc>
-                <a:spcPct val="90000"/>
-              </a:lnSpc>
-              <a:spcBef>
-                <a:spcPts val="500"/>
-              </a:spcBef>
-              <a:buFont typeface="Arial" panose="020B0604020202020204" pitchFamily="34" charset="0"/>
-              <a:buChar char="•"/>
-              <a:defRPr sz="1800" kern="1200">
-                <a:solidFill>
-                  <a:schemeClr val="tx1"/>
-                </a:solidFill>
-                <a:latin typeface="+mn-lt"/>
-                <a:ea typeface="+mn-ea"/>
-                <a:cs typeface="+mn-cs"/>
-              </a:defRPr>
-            </a:lvl5pPr>
-            <a:lvl6pPr marL="2514600" indent="-228600" algn="l" defTabSz="914400" rtl="0" eaLnBrk="1" latinLnBrk="1" hangingPunct="1">
-              <a:lnSpc>
-                <a:spcPct val="90000"/>
-              </a:lnSpc>
-              <a:spcBef>
-                <a:spcPts val="500"/>
-              </a:spcBef>
-              <a:buFont typeface="Arial" panose="020B0604020202020204" pitchFamily="34" charset="0"/>
-              <a:buChar char="•"/>
-              <a:defRPr sz="1800" kern="1200">
-                <a:solidFill>
-                  <a:schemeClr val="tx1"/>
-                </a:solidFill>
-                <a:latin typeface="+mn-lt"/>
-                <a:ea typeface="+mn-ea"/>
-                <a:cs typeface="+mn-cs"/>
-              </a:defRPr>
-            </a:lvl6pPr>
-            <a:lvl7pPr marL="2971800" indent="-228600" algn="l" defTabSz="914400" rtl="0" eaLnBrk="1" latinLnBrk="1" hangingPunct="1">
-              <a:lnSpc>
-                <a:spcPct val="90000"/>
-              </a:lnSpc>
-              <a:spcBef>
-                <a:spcPts val="500"/>
-              </a:spcBef>
-              <a:buFont typeface="Arial" panose="020B0604020202020204" pitchFamily="34" charset="0"/>
-              <a:buChar char="•"/>
-              <a:defRPr sz="1800" kern="1200">
-                <a:solidFill>
-                  <a:schemeClr val="tx1"/>
-                </a:solidFill>
-                <a:latin typeface="+mn-lt"/>
-                <a:ea typeface="+mn-ea"/>
-                <a:cs typeface="+mn-cs"/>
-              </a:defRPr>
-            </a:lvl7pPr>
-            <a:lvl8pPr marL="3429000" indent="-228600" algn="l" defTabSz="914400" rtl="0" eaLnBrk="1" latinLnBrk="1" hangingPunct="1">
-              <a:lnSpc>
-                <a:spcPct val="90000"/>
-              </a:lnSpc>
-              <a:spcBef>
-                <a:spcPts val="500"/>
-              </a:spcBef>
-              <a:buFont typeface="Arial" panose="020B0604020202020204" pitchFamily="34" charset="0"/>
-              <a:buChar char="•"/>
-              <a:defRPr sz="1800" kern="1200">
-                <a:solidFill>
-                  <a:schemeClr val="tx1"/>
-                </a:solidFill>
-                <a:latin typeface="+mn-lt"/>
-                <a:ea typeface="+mn-ea"/>
-                <a:cs typeface="+mn-cs"/>
-              </a:defRPr>
-            </a:lvl8pPr>
-            <a:lvl9pPr marL="3886200" indent="-228600" algn="l" defTabSz="914400" rtl="0" eaLnBrk="1" latinLnBrk="1" hangingPunct="1">
-              <a:lnSpc>
-                <a:spcPct val="90000"/>
-              </a:lnSpc>
-              <a:spcBef>
-                <a:spcPts val="500"/>
-              </a:spcBef>
-              <a:buFont typeface="Arial" panose="020B0604020202020204" pitchFamily="34" charset="0"/>
-              <a:buChar char="•"/>
-              <a:defRPr sz="1800" kern="1200">
-                <a:solidFill>
-                  <a:schemeClr val="tx1"/>
-                </a:solidFill>
-                <a:latin typeface="+mn-lt"/>
-                <a:ea typeface="+mn-ea"/>
-                <a:cs typeface="+mn-cs"/>
-              </a:defRPr>
-            </a:lvl9pPr>
-          </a:lstStyle>
-          <a:p>
-            <a:pPr marL="0" indent="0" algn="r">
-              <a:buNone/>
-            </a:pPr>
-            <a:r>
-              <a:rPr lang="en-US" altLang="ko-KR" sz="2000" u="none" dirty="0"/>
-              <a:t>With. </a:t>
-            </a:r>
-            <a:r>
-              <a:rPr lang="ko-KR" altLang="en-US" sz="2000" u="none" dirty="0"/>
-              <a:t>팀 </a:t>
-            </a:r>
-            <a:r>
-              <a:rPr lang="ko-KR" altLang="en-US" sz="2000" u="none" dirty="0" err="1"/>
-              <a:t>뤼쳐드</a:t>
-            </a:r>
-            <a:endParaRPr lang="ko-KR" altLang="en-US" sz="2000" u="none" dirty="0"/>
-          </a:p>
-        </p:txBody>
-      </p:sp>
+      </p:pic>
     </p:spTree>
     <p:extLst>
       <p:ext uri="{BB962C8B-B14F-4D97-AF65-F5344CB8AC3E}">
-        <p14:creationId xmlns:p14="http://schemas.microsoft.com/office/powerpoint/2010/main" val="2104502687"/>
+        <p14:creationId xmlns:p14="http://schemas.microsoft.com/office/powerpoint/2010/main" val="4205653155"/>
       </p:ext>
     </p:extLst>
   </p:cSld>
@@ -2029,12 +2234,12 @@
           <a:bodyPr anchor="b"/>
           <a:lstStyle>
             <a:lvl1pPr>
-              <a:defRPr sz="3200"/>
+              <a:defRPr sz="3200" b="1"/>
             </a:lvl1pPr>
           </a:lstStyle>
           <a:p>
             <a:r>
-              <a:rPr lang="ko-KR" altLang="en-US"/>
+              <a:rPr lang="ko-KR" altLang="en-US" dirty="0"/>
               <a:t>마스터 제목 스타일 편집</a:t>
             </a:r>
           </a:p>
@@ -2201,7 +2406,7 @@
           <a:p>
             <a:fld id="{C4A39A32-5728-48B8-9F9C-437D214CCAF1}" type="datetime6">
               <a:rPr lang="ko-KR" altLang="en-US" smtClean="0"/>
-              <a:t>2023년 9월</a:t>
+              <a:t>2024년 8월</a:t>
             </a:fld>
             <a:endParaRPr lang="ko-KR" altLang="en-US"/>
           </a:p>
@@ -2264,7 +2469,7 @@
     </p:spTree>
     <p:extLst>
       <p:ext uri="{BB962C8B-B14F-4D97-AF65-F5344CB8AC3E}">
-        <p14:creationId xmlns:p14="http://schemas.microsoft.com/office/powerpoint/2010/main" val="3456815718"/>
+        <p14:creationId xmlns:p14="http://schemas.microsoft.com/office/powerpoint/2010/main" val="2750603418"/>
       </p:ext>
     </p:extLst>
   </p:cSld>
@@ -2310,10 +2515,14 @@
         <p:spPr/>
         <p:txBody>
           <a:bodyPr/>
-          <a:lstStyle/>
-          <a:p>
-            <a:r>
-              <a:rPr lang="ko-KR" altLang="en-US"/>
+          <a:lstStyle>
+            <a:lvl1pPr>
+              <a:defRPr b="1"/>
+            </a:lvl1pPr>
+          </a:lstStyle>
+          <a:p>
+            <a:r>
+              <a:rPr lang="ko-KR" altLang="en-US" dirty="0"/>
               <a:t>마스터 제목 스타일 편집</a:t>
             </a:r>
           </a:p>
@@ -2399,7 +2608,7 @@
           <a:p>
             <a:fld id="{3BECC8BA-EBCB-4BF9-8E87-970CE0138376}" type="datetime6">
               <a:rPr lang="ko-KR" altLang="en-US" smtClean="0"/>
-              <a:t>2023년 9월</a:t>
+              <a:t>2024년 8월</a:t>
             </a:fld>
             <a:endParaRPr lang="ko-KR" altLang="en-US"/>
           </a:p>
@@ -2462,7 +2671,7 @@
     </p:spTree>
     <p:extLst>
       <p:ext uri="{BB962C8B-B14F-4D97-AF65-F5344CB8AC3E}">
-        <p14:creationId xmlns:p14="http://schemas.microsoft.com/office/powerpoint/2010/main" val="3602548054"/>
+        <p14:creationId xmlns:p14="http://schemas.microsoft.com/office/powerpoint/2010/main" val="2896517501"/>
       </p:ext>
     </p:extLst>
   </p:cSld>
@@ -2607,7 +2816,7 @@
           <a:p>
             <a:fld id="{7869FA6E-4699-4AC6-B2CB-4E60A58ED7A8}" type="datetime6">
               <a:rPr lang="ko-KR" altLang="en-US" smtClean="0"/>
-              <a:t>2023년 9월</a:t>
+              <a:t>2024년 8월</a:t>
             </a:fld>
             <a:endParaRPr lang="ko-KR" altLang="en-US"/>
           </a:p>
@@ -2670,7 +2879,7 @@
     </p:spTree>
     <p:extLst>
       <p:ext uri="{BB962C8B-B14F-4D97-AF65-F5344CB8AC3E}">
-        <p14:creationId xmlns:p14="http://schemas.microsoft.com/office/powerpoint/2010/main" val="2313786568"/>
+        <p14:creationId xmlns:p14="http://schemas.microsoft.com/office/powerpoint/2010/main" val="399781433"/>
       </p:ext>
     </p:extLst>
   </p:cSld>
@@ -2720,7 +2929,7 @@
           <a:p>
             <a:fld id="{0E19CB95-6D28-40F1-9DA3-1BAC5D4B5B4F}" type="datetime6">
               <a:rPr lang="ko-KR" altLang="en-US" smtClean="0"/>
-              <a:t>2023년 9월</a:t>
+              <a:t>2024년 8월</a:t>
             </a:fld>
             <a:endParaRPr lang="ko-KR" altLang="en-US"/>
           </a:p>
@@ -2857,7 +3066,7 @@
           </a:bodyPr>
           <a:lstStyle>
             <a:lvl1pPr algn="ctr">
-              <a:defRPr sz="8000" b="0">
+              <a:defRPr sz="8000" b="1">
                 <a:solidFill>
                   <a:srgbClr val="6EC173"/>
                 </a:solidFill>
@@ -2875,7 +3084,7 @@
     </p:spTree>
     <p:extLst>
       <p:ext uri="{BB962C8B-B14F-4D97-AF65-F5344CB8AC3E}">
-        <p14:creationId xmlns:p14="http://schemas.microsoft.com/office/powerpoint/2010/main" val="2608942727"/>
+        <p14:creationId xmlns:p14="http://schemas.microsoft.com/office/powerpoint/2010/main" val="2838905291"/>
       </p:ext>
     </p:extLst>
   </p:cSld>
@@ -2982,7 +3191,7 @@
           <a:p>
             <a:fld id="{3C9CE3CE-253F-4F9D-BA15-C226C8D8501E}" type="datetime6">
               <a:rPr lang="ko-KR" altLang="en-US" smtClean="0"/>
-              <a:t>2023년 9월</a:t>
+              <a:t>2024년 8월</a:t>
             </a:fld>
             <a:endParaRPr lang="ko-KR" altLang="en-US"/>
           </a:p>
@@ -3071,7 +3280,11 @@
           <a:bodyPr vert="horz" lIns="91440" tIns="45720" rIns="91440" bIns="45720" rtlCol="0" anchor="ctr">
             <a:normAutofit/>
           </a:bodyPr>
-          <a:lstStyle/>
+          <a:lstStyle>
+            <a:lvl1pPr>
+              <a:defRPr b="1"/>
+            </a:lvl1pPr>
+          </a:lstStyle>
           <a:p>
             <a:r>
               <a:rPr lang="ko-KR" altLang="en-US" dirty="0"/>
@@ -3083,7 +3296,7 @@
     </p:spTree>
     <p:extLst>
       <p:ext uri="{BB962C8B-B14F-4D97-AF65-F5344CB8AC3E}">
-        <p14:creationId xmlns:p14="http://schemas.microsoft.com/office/powerpoint/2010/main" val="2493143943"/>
+        <p14:creationId xmlns:p14="http://schemas.microsoft.com/office/powerpoint/2010/main" val="2834679020"/>
       </p:ext>
     </p:extLst>
   </p:cSld>
@@ -3295,7 +3508,7 @@
           <a:p>
             <a:fld id="{BE5A7087-D460-46DD-B430-F8D9B9677D08}" type="datetime6">
               <a:rPr lang="ko-KR" altLang="en-US" smtClean="0"/>
-              <a:t>2023년 9월</a:t>
+              <a:t>2024년 8월</a:t>
             </a:fld>
             <a:endParaRPr lang="ko-KR" altLang="en-US"/>
           </a:p>
@@ -3358,7 +3571,7 @@
     </p:spTree>
     <p:extLst>
       <p:ext uri="{BB962C8B-B14F-4D97-AF65-F5344CB8AC3E}">
-        <p14:creationId xmlns:p14="http://schemas.microsoft.com/office/powerpoint/2010/main" val="1559029814"/>
+        <p14:creationId xmlns:p14="http://schemas.microsoft.com/office/powerpoint/2010/main" val="69164461"/>
       </p:ext>
     </p:extLst>
   </p:cSld>
@@ -3404,10 +3617,14 @@
         <p:spPr/>
         <p:txBody>
           <a:bodyPr/>
-          <a:lstStyle/>
-          <a:p>
-            <a:r>
-              <a:rPr lang="ko-KR" altLang="en-US"/>
+          <a:lstStyle>
+            <a:lvl1pPr>
+              <a:defRPr b="1"/>
+            </a:lvl1pPr>
+          </a:lstStyle>
+          <a:p>
+            <a:r>
+              <a:rPr lang="ko-KR" altLang="en-US" dirty="0"/>
               <a:t>마스터 제목 스타일 편집</a:t>
             </a:r>
           </a:p>
@@ -3560,7 +3777,7 @@
           <a:p>
             <a:fld id="{0581BA25-D675-4234-A003-8449BDEEF18E}" type="datetime6">
               <a:rPr lang="ko-KR" altLang="en-US" smtClean="0"/>
-              <a:t>2023년 9월</a:t>
+              <a:t>2024년 8월</a:t>
             </a:fld>
             <a:endParaRPr lang="ko-KR" altLang="en-US"/>
           </a:p>
@@ -3623,7 +3840,7 @@
     </p:spTree>
     <p:extLst>
       <p:ext uri="{BB962C8B-B14F-4D97-AF65-F5344CB8AC3E}">
-        <p14:creationId xmlns:p14="http://schemas.microsoft.com/office/powerpoint/2010/main" val="947449693"/>
+        <p14:creationId xmlns:p14="http://schemas.microsoft.com/office/powerpoint/2010/main" val="2623343193"/>
       </p:ext>
     </p:extLst>
   </p:cSld>
@@ -3674,10 +3891,14 @@
         </p:spPr>
         <p:txBody>
           <a:bodyPr/>
-          <a:lstStyle/>
-          <a:p>
-            <a:r>
-              <a:rPr lang="ko-KR" altLang="en-US"/>
+          <a:lstStyle>
+            <a:lvl1pPr>
+              <a:defRPr b="1"/>
+            </a:lvl1pPr>
+          </a:lstStyle>
+          <a:p>
+            <a:r>
+              <a:rPr lang="ko-KR" altLang="en-US" dirty="0"/>
               <a:t>마스터 제목 스타일 편집</a:t>
             </a:r>
           </a:p>
@@ -3972,7 +4193,7 @@
           <a:p>
             <a:fld id="{26155C29-A87F-46F0-A24C-6C9F0A4BF6AA}" type="datetime6">
               <a:rPr lang="ko-KR" altLang="en-US" smtClean="0"/>
-              <a:t>2023년 9월</a:t>
+              <a:t>2024년 8월</a:t>
             </a:fld>
             <a:endParaRPr lang="ko-KR" altLang="en-US"/>
           </a:p>
@@ -4035,7 +4256,7 @@
     </p:spTree>
     <p:extLst>
       <p:ext uri="{BB962C8B-B14F-4D97-AF65-F5344CB8AC3E}">
-        <p14:creationId xmlns:p14="http://schemas.microsoft.com/office/powerpoint/2010/main" val="2333661961"/>
+        <p14:creationId xmlns:p14="http://schemas.microsoft.com/office/powerpoint/2010/main" val="2581719686"/>
       </p:ext>
     </p:extLst>
   </p:cSld>
@@ -4081,10 +4302,14 @@
         <p:spPr/>
         <p:txBody>
           <a:bodyPr/>
-          <a:lstStyle/>
-          <a:p>
-            <a:r>
-              <a:rPr lang="ko-KR" altLang="en-US"/>
+          <a:lstStyle>
+            <a:lvl1pPr>
+              <a:defRPr b="1"/>
+            </a:lvl1pPr>
+          </a:lstStyle>
+          <a:p>
+            <a:r>
+              <a:rPr lang="ko-KR" altLang="en-US" dirty="0"/>
               <a:t>마스터 제목 스타일 편집</a:t>
             </a:r>
           </a:p>
@@ -4113,7 +4338,7 @@
           <a:p>
             <a:fld id="{DD2EDD62-8757-43DB-BAE0-460422B548EA}" type="datetime6">
               <a:rPr lang="ko-KR" altLang="en-US" smtClean="0"/>
-              <a:t>2023년 9월</a:t>
+              <a:t>2024년 8월</a:t>
             </a:fld>
             <a:endParaRPr lang="ko-KR" altLang="en-US"/>
           </a:p>
@@ -4176,7 +4401,7 @@
     </p:spTree>
     <p:extLst>
       <p:ext uri="{BB962C8B-B14F-4D97-AF65-F5344CB8AC3E}">
-        <p14:creationId xmlns:p14="http://schemas.microsoft.com/office/powerpoint/2010/main" val="1324141276"/>
+        <p14:creationId xmlns:p14="http://schemas.microsoft.com/office/powerpoint/2010/main" val="153719748"/>
       </p:ext>
     </p:extLst>
   </p:cSld>
@@ -4226,7 +4451,7 @@
           <a:p>
             <a:fld id="{DC6A871B-4800-495F-AC75-93D44C7DEBA5}" type="datetime6">
               <a:rPr lang="ko-KR" altLang="en-US" smtClean="0"/>
-              <a:t>2023년 9월</a:t>
+              <a:t>2024년 8월</a:t>
             </a:fld>
             <a:endParaRPr lang="ko-KR" altLang="en-US"/>
           </a:p>
@@ -4289,7 +4514,7 @@
     </p:spTree>
     <p:extLst>
       <p:ext uri="{BB962C8B-B14F-4D97-AF65-F5344CB8AC3E}">
-        <p14:creationId xmlns:p14="http://schemas.microsoft.com/office/powerpoint/2010/main" val="1014306624"/>
+        <p14:creationId xmlns:p14="http://schemas.microsoft.com/office/powerpoint/2010/main" val="1817234270"/>
       </p:ext>
     </p:extLst>
   </p:cSld>
@@ -4342,12 +4567,12 @@
           <a:bodyPr anchor="b"/>
           <a:lstStyle>
             <a:lvl1pPr>
-              <a:defRPr sz="3200"/>
+              <a:defRPr sz="3200" b="1"/>
             </a:lvl1pPr>
           </a:lstStyle>
           <a:p>
             <a:r>
-              <a:rPr lang="ko-KR" altLang="en-US"/>
+              <a:rPr lang="ko-KR" altLang="en-US" dirty="0"/>
               <a:t>마스터 제목 스타일 편집</a:t>
             </a:r>
           </a:p>
@@ -4537,7 +4762,7 @@
           <a:p>
             <a:fld id="{59605888-30A6-49BB-95E2-DEAE4E5B09E9}" type="datetime6">
               <a:rPr lang="ko-KR" altLang="en-US" smtClean="0"/>
-              <a:t>2023년 9월</a:t>
+              <a:t>2024년 8월</a:t>
             </a:fld>
             <a:endParaRPr lang="ko-KR" altLang="en-US"/>
           </a:p>
@@ -4600,7 +4825,7 @@
     </p:spTree>
     <p:extLst>
       <p:ext uri="{BB962C8B-B14F-4D97-AF65-F5344CB8AC3E}">
-        <p14:creationId xmlns:p14="http://schemas.microsoft.com/office/powerpoint/2010/main" val="2040181567"/>
+        <p14:creationId xmlns:p14="http://schemas.microsoft.com/office/powerpoint/2010/main" val="874302767"/>
       </p:ext>
     </p:extLst>
   </p:cSld>
@@ -4703,35 +4928,35 @@
           <a:p>
             <a:pPr lvl="0"/>
             <a:r>
-              <a:rPr lang="ko-KR" altLang="en-US"/>
+              <a:rPr lang="ko-KR" altLang="en-US" dirty="0"/>
               <a:t>마스터 텍스트 스타일을 편집하려면 클릭</a:t>
             </a:r>
           </a:p>
           <a:p>
             <a:pPr lvl="1"/>
             <a:r>
-              <a:rPr lang="ko-KR" altLang="en-US"/>
+              <a:rPr lang="ko-KR" altLang="en-US" dirty="0"/>
               <a:t>두 번째 수준</a:t>
             </a:r>
           </a:p>
           <a:p>
             <a:pPr lvl="2"/>
             <a:r>
-              <a:rPr lang="ko-KR" altLang="en-US"/>
+              <a:rPr lang="ko-KR" altLang="en-US" dirty="0"/>
               <a:t>세 번째 수준</a:t>
             </a:r>
           </a:p>
           <a:p>
             <a:pPr lvl="3"/>
             <a:r>
-              <a:rPr lang="ko-KR" altLang="en-US"/>
+              <a:rPr lang="ko-KR" altLang="en-US" dirty="0"/>
               <a:t>네 번째 수준</a:t>
             </a:r>
           </a:p>
           <a:p>
             <a:pPr lvl="4"/>
             <a:r>
-              <a:rPr lang="ko-KR" altLang="en-US"/>
+              <a:rPr lang="ko-KR" altLang="en-US" dirty="0"/>
               <a:t>다섯 번째 수준</a:t>
             </a:r>
           </a:p>
@@ -4778,7 +5003,7 @@
           <a:p>
             <a:fld id="{8691C14A-5735-4A8B-B68B-DEC1DC2A3813}" type="datetime6">
               <a:rPr lang="ko-KR" altLang="en-US" smtClean="0"/>
-              <a:t>2023년 9월</a:t>
+              <a:t>2024년 8월</a:t>
             </a:fld>
             <a:endParaRPr lang="ko-KR" altLang="en-US"/>
           </a:p>
@@ -4930,10 +5155,10 @@
       </p:sp>
       <p:pic>
         <p:nvPicPr>
-          <p:cNvPr id="9" name="그림 8" descr="텍스트, 클립아트이(가) 표시된 사진&#10;&#10;자동 생성된 설명">
-            <a:extLst>
-              <a:ext uri="{FF2B5EF4-FFF2-40B4-BE49-F238E27FC236}">
-                <a16:creationId xmlns:a16="http://schemas.microsoft.com/office/drawing/2014/main" id="{CFFA81A6-6D9A-9C22-6A01-103FCC7108B8}"/>
+          <p:cNvPr id="14" name="그림 13" descr="그래픽, 그래픽 디자인, 폰트, 원이(가) 표시된 사진&#10;&#10;자동 생성된 설명">
+            <a:extLst>
+              <a:ext uri="{FF2B5EF4-FFF2-40B4-BE49-F238E27FC236}">
+                <a16:creationId xmlns:a16="http://schemas.microsoft.com/office/drawing/2014/main" id="{0EB71D7B-83F1-1414-954A-8C79751B7793}"/>
               </a:ext>
             </a:extLst>
           </p:cNvPr>
@@ -4944,7 +5169,6 @@
         </p:nvPicPr>
         <p:blipFill>
           <a:blip r:embed="rId14" cstate="hqprint">
-            <a:alphaModFix/>
             <a:extLst>
               <a:ext uri="{28A0092B-C50C-407E-A947-70E740481C1C}">
                 <a14:useLocalDpi xmlns:a14="http://schemas.microsoft.com/office/drawing/2010/main" val="0"/>
@@ -4957,136 +5181,35 @@
         </p:blipFill>
         <p:spPr>
           <a:xfrm>
-            <a:off x="11044576" y="140110"/>
-            <a:ext cx="1026976" cy="205105"/>
+            <a:off x="10835681" y="96056"/>
+            <a:ext cx="1260000" cy="270857"/>
           </a:xfrm>
           <a:prstGeom prst="rect">
             <a:avLst/>
           </a:prstGeom>
         </p:spPr>
       </p:pic>
-      <p:sp>
-        <p:nvSpPr>
-          <p:cNvPr id="10" name="TextBox 9">
-            <a:extLst>
-              <a:ext uri="{FF2B5EF4-FFF2-40B4-BE49-F238E27FC236}">
-                <a16:creationId xmlns:a16="http://schemas.microsoft.com/office/drawing/2014/main" id="{2E8CEA0B-0194-B9A0-705F-CAB04B3523DA}"/>
-              </a:ext>
-            </a:extLst>
-          </p:cNvPr>
-          <p:cNvSpPr txBox="1"/>
-          <p:nvPr userDrawn="1"/>
-        </p:nvSpPr>
-        <p:spPr>
-          <a:xfrm>
-            <a:off x="10814758" y="104713"/>
-            <a:ext cx="227015" cy="307777"/>
-          </a:xfrm>
-          <a:prstGeom prst="rect">
-            <a:avLst/>
-          </a:prstGeom>
-          <a:noFill/>
-        </p:spPr>
-        <p:txBody>
-          <a:bodyPr wrap="square" rtlCol="0">
-            <a:spAutoFit/>
-          </a:bodyPr>
-          <a:lstStyle/>
-          <a:p>
-            <a:pPr algn="ctr"/>
-            <a:r>
-              <a:rPr lang="en-US" altLang="ko-KR" sz="1400" b="1" dirty="0">
-                <a:solidFill>
-                  <a:schemeClr val="tx1"/>
-                </a:solidFill>
-              </a:rPr>
-              <a:t>X</a:t>
-            </a:r>
-            <a:endParaRPr lang="ko-KR" altLang="en-US" sz="2000" b="1" dirty="0">
-              <a:solidFill>
-                <a:schemeClr val="tx1"/>
-              </a:solidFill>
-            </a:endParaRPr>
-          </a:p>
-        </p:txBody>
-      </p:sp>
-      <p:pic>
-        <p:nvPicPr>
-          <p:cNvPr id="11" name="Picture 4" descr="청년취업사관학교, 새싹(SeSAC) - YouTube">
-            <a:extLst>
-              <a:ext uri="{FF2B5EF4-FFF2-40B4-BE49-F238E27FC236}">
-                <a16:creationId xmlns:a16="http://schemas.microsoft.com/office/drawing/2014/main" id="{AD5D531A-42B5-6D12-7A47-FFEB75D29CB0}"/>
-              </a:ext>
-            </a:extLst>
-          </p:cNvPr>
-          <p:cNvPicPr>
-            <a:picLocks noChangeAspect="1" noChangeArrowheads="1"/>
-          </p:cNvPicPr>
-          <p:nvPr userDrawn="1"/>
-        </p:nvPicPr>
-        <p:blipFill>
-          <a:blip r:embed="rId15" cstate="hqprint">
-            <a:extLst>
-              <a:ext uri="{BEBA8EAE-BF5A-486C-A8C5-ECC9F3942E4B}">
-                <a14:imgProps xmlns:a14="http://schemas.microsoft.com/office/drawing/2010/main">
-                  <a14:imgLayer r:embed="rId16">
-                    <a14:imgEffect>
-                      <a14:backgroundRemoval t="10000" b="90000" l="10000" r="90000"/>
-                    </a14:imgEffect>
-                  </a14:imgLayer>
-                </a14:imgProps>
-              </a:ext>
-              <a:ext uri="{28A0092B-C50C-407E-A947-70E740481C1C}">
-                <a14:useLocalDpi xmlns:a14="http://schemas.microsoft.com/office/drawing/2010/main" val="0"/>
-              </a:ext>
-            </a:extLst>
-          </a:blip>
-          <a:srcRect/>
-          <a:stretch>
-            <a:fillRect/>
-          </a:stretch>
-        </p:blipFill>
-        <p:spPr bwMode="auto">
-          <a:xfrm>
-            <a:off x="10492653" y="54125"/>
-            <a:ext cx="371243" cy="371243"/>
-          </a:xfrm>
-          <a:prstGeom prst="rect">
-            <a:avLst/>
-          </a:prstGeom>
-          <a:noFill/>
-          <a:extLst>
-            <a:ext uri="{909E8E84-426E-40DD-AFC4-6F175D3DCCD1}">
-              <a14:hiddenFill xmlns:a14="http://schemas.microsoft.com/office/drawing/2010/main">
-                <a:solidFill>
-                  <a:srgbClr val="FFFFFF"/>
-                </a:solidFill>
-              </a14:hiddenFill>
-            </a:ext>
-          </a:extLst>
-        </p:spPr>
-      </p:pic>
     </p:spTree>
     <p:extLst>
       <p:ext uri="{BB962C8B-B14F-4D97-AF65-F5344CB8AC3E}">
-        <p14:creationId xmlns:p14="http://schemas.microsoft.com/office/powerpoint/2010/main" val="579173985"/>
+        <p14:creationId xmlns:p14="http://schemas.microsoft.com/office/powerpoint/2010/main" val="634817039"/>
       </p:ext>
     </p:extLst>
   </p:cSld>
   <p:clrMap bg1="lt1" tx1="dk1" bg2="lt2" tx2="dk2" accent1="accent1" accent2="accent2" accent3="accent3" accent4="accent4" accent5="accent5" accent6="accent6" hlink="hlink" folHlink="folHlink"/>
   <p:sldLayoutIdLst>
-    <p:sldLayoutId id="2147483674" r:id="rId1"/>
-    <p:sldLayoutId id="2147483675" r:id="rId2"/>
-    <p:sldLayoutId id="2147483676" r:id="rId3"/>
-    <p:sldLayoutId id="2147483677" r:id="rId4"/>
-    <p:sldLayoutId id="2147483678" r:id="rId5"/>
-    <p:sldLayoutId id="2147483679" r:id="rId6"/>
-    <p:sldLayoutId id="2147483680" r:id="rId7"/>
-    <p:sldLayoutId id="2147483681" r:id="rId8"/>
-    <p:sldLayoutId id="2147483682" r:id="rId9"/>
-    <p:sldLayoutId id="2147483683" r:id="rId10"/>
-    <p:sldLayoutId id="2147483684" r:id="rId11"/>
-    <p:sldLayoutId id="2147483685" r:id="rId12"/>
+    <p:sldLayoutId id="2147483687" r:id="rId1"/>
+    <p:sldLayoutId id="2147483688" r:id="rId2"/>
+    <p:sldLayoutId id="2147483689" r:id="rId3"/>
+    <p:sldLayoutId id="2147483690" r:id="rId4"/>
+    <p:sldLayoutId id="2147483691" r:id="rId5"/>
+    <p:sldLayoutId id="2147483692" r:id="rId6"/>
+    <p:sldLayoutId id="2147483693" r:id="rId7"/>
+    <p:sldLayoutId id="2147483694" r:id="rId8"/>
+    <p:sldLayoutId id="2147483695" r:id="rId9"/>
+    <p:sldLayoutId id="2147483696" r:id="rId10"/>
+    <p:sldLayoutId id="2147483697" r:id="rId11"/>
+    <p:sldLayoutId id="2147483698" r:id="rId12"/>
   </p:sldLayoutIdLst>
   <p:hf hdr="0" ftr="0"/>
   <p:txStyles>
@@ -5099,7 +5222,7 @@
           <a:spcPct val="0"/>
         </a:spcBef>
         <a:buNone/>
-        <a:defRPr sz="4400" kern="1200">
+        <a:defRPr sz="4400" b="1" kern="1200">
           <a:solidFill>
             <a:schemeClr val="tx1"/>
           </a:solidFill>
@@ -5465,7 +5588,7 @@
           <a:p>
             <a:fld id="{4DA02FB7-A3D0-4BF4-B23F-90A4C3B73A56}" type="datetime6">
               <a:rPr lang="ko-KR" altLang="en-US" smtClean="0"/>
-              <a:t>2023년 9월</a:t>
+              <a:t>2024년 8월</a:t>
             </a:fld>
             <a:endParaRPr lang="ko-KR" altLang="en-US" dirty="0"/>
           </a:p>
@@ -5530,36 +5653,64 @@
           <a:chExt cx="0" cy="0"/>
         </a:xfrm>
       </p:grpSpPr>
-      <p:pic>
-        <p:nvPicPr>
-          <p:cNvPr id="9" name="그림 8">
-            <a:extLst>
-              <a:ext uri="{FF2B5EF4-FFF2-40B4-BE49-F238E27FC236}">
-                <a16:creationId xmlns:a16="http://schemas.microsoft.com/office/drawing/2014/main" id="{230A421F-38AB-A0C8-4720-2AD039A60B18}"/>
-              </a:ext>
-            </a:extLst>
-          </p:cNvPr>
-          <p:cNvPicPr>
-            <a:picLocks noChangeAspect="1"/>
-          </p:cNvPicPr>
-          <p:nvPr/>
-        </p:nvPicPr>
-        <p:blipFill>
-          <a:blip r:embed="rId3"/>
-          <a:stretch>
-            <a:fillRect/>
-          </a:stretch>
-        </p:blipFill>
-        <p:spPr>
-          <a:xfrm>
-            <a:off x="3915508" y="3497888"/>
-            <a:ext cx="7742663" cy="2781178"/>
-          </a:xfrm>
-          <a:prstGeom prst="rect">
-            <a:avLst/>
-          </a:prstGeom>
-        </p:spPr>
-      </p:pic>
+      <p:sp>
+        <p:nvSpPr>
+          <p:cNvPr id="4" name="날짜 개체 틀 3">
+            <a:extLst>
+              <a:ext uri="{FF2B5EF4-FFF2-40B4-BE49-F238E27FC236}">
+                <a16:creationId xmlns:a16="http://schemas.microsoft.com/office/drawing/2014/main" id="{6EE9B434-8977-A422-69B8-4F63EBA503FB}"/>
+              </a:ext>
+            </a:extLst>
+          </p:cNvPr>
+          <p:cNvSpPr>
+            <a:spLocks noGrp="1"/>
+          </p:cNvSpPr>
+          <p:nvPr>
+            <p:ph type="dt" sz="half" idx="10"/>
+          </p:nvPr>
+        </p:nvSpPr>
+        <p:spPr/>
+        <p:txBody>
+          <a:bodyPr/>
+          <a:lstStyle/>
+          <a:p>
+            <a:fld id="{F5DECA0C-8384-4A80-8CAF-F40503FCCF4C}" type="datetime6">
+              <a:rPr lang="ko-KR" altLang="en-US" smtClean="0"/>
+              <a:t>2024년 8월</a:t>
+            </a:fld>
+            <a:endParaRPr lang="ko-KR" altLang="en-US"/>
+          </a:p>
+        </p:txBody>
+      </p:sp>
+      <p:sp>
+        <p:nvSpPr>
+          <p:cNvPr id="5" name="슬라이드 번호 개체 틀 4">
+            <a:extLst>
+              <a:ext uri="{FF2B5EF4-FFF2-40B4-BE49-F238E27FC236}">
+                <a16:creationId xmlns:a16="http://schemas.microsoft.com/office/drawing/2014/main" id="{75E3E9B0-C628-12AF-B688-62BAA3A8B414}"/>
+              </a:ext>
+            </a:extLst>
+          </p:cNvPr>
+          <p:cNvSpPr>
+            <a:spLocks noGrp="1"/>
+          </p:cNvSpPr>
+          <p:nvPr>
+            <p:ph type="sldNum" sz="quarter" idx="12"/>
+          </p:nvPr>
+        </p:nvSpPr>
+        <p:spPr/>
+        <p:txBody>
+          <a:bodyPr/>
+          <a:lstStyle/>
+          <a:p>
+            <a:fld id="{083A2CE0-18CD-4102-B738-4ACFF9E68BA4}" type="slidenum">
+              <a:rPr lang="ko-KR" altLang="en-US" smtClean="0"/>
+              <a:t>10</a:t>
+            </a:fld>
+            <a:endParaRPr lang="ko-KR" altLang="en-US"/>
+          </a:p>
+        </p:txBody>
+      </p:sp>
       <p:sp>
         <p:nvSpPr>
           <p:cNvPr id="2" name="제목 1">
@@ -5606,948 +5757,6 @@
               <a:t> </a:t>
             </a:r>
             <a:r>
-              <a:rPr lang="ko-KR" altLang="en-US" dirty="0"/>
-              <a:t>이벤트 핸들링 실습</a:t>
-            </a:r>
-          </a:p>
-        </p:txBody>
-      </p:sp>
-      <p:sp>
-        <p:nvSpPr>
-          <p:cNvPr id="4" name="날짜 개체 틀 3">
-            <a:extLst>
-              <a:ext uri="{FF2B5EF4-FFF2-40B4-BE49-F238E27FC236}">
-                <a16:creationId xmlns:a16="http://schemas.microsoft.com/office/drawing/2014/main" id="{6EE9B434-8977-A422-69B8-4F63EBA503FB}"/>
-              </a:ext>
-            </a:extLst>
-          </p:cNvPr>
-          <p:cNvSpPr>
-            <a:spLocks noGrp="1"/>
-          </p:cNvSpPr>
-          <p:nvPr>
-            <p:ph type="dt" sz="half" idx="10"/>
-          </p:nvPr>
-        </p:nvSpPr>
-        <p:spPr/>
-        <p:txBody>
-          <a:bodyPr/>
-          <a:lstStyle/>
-          <a:p>
-            <a:fld id="{F5DECA0C-8384-4A80-8CAF-F40503FCCF4C}" type="datetime6">
-              <a:rPr lang="ko-KR" altLang="en-US" smtClean="0"/>
-              <a:t>2023년 9월</a:t>
-            </a:fld>
-            <a:endParaRPr lang="ko-KR" altLang="en-US"/>
-          </a:p>
-        </p:txBody>
-      </p:sp>
-      <p:sp>
-        <p:nvSpPr>
-          <p:cNvPr id="5" name="슬라이드 번호 개체 틀 4">
-            <a:extLst>
-              <a:ext uri="{FF2B5EF4-FFF2-40B4-BE49-F238E27FC236}">
-                <a16:creationId xmlns:a16="http://schemas.microsoft.com/office/drawing/2014/main" id="{75E3E9B0-C628-12AF-B688-62BAA3A8B414}"/>
-              </a:ext>
-            </a:extLst>
-          </p:cNvPr>
-          <p:cNvSpPr>
-            <a:spLocks noGrp="1"/>
-          </p:cNvSpPr>
-          <p:nvPr>
-            <p:ph type="sldNum" sz="quarter" idx="12"/>
-          </p:nvPr>
-        </p:nvSpPr>
-        <p:spPr/>
-        <p:txBody>
-          <a:bodyPr/>
-          <a:lstStyle/>
-          <a:p>
-            <a:fld id="{083A2CE0-18CD-4102-B738-4ACFF9E68BA4}" type="slidenum">
-              <a:rPr lang="ko-KR" altLang="en-US" smtClean="0"/>
-              <a:t>10</a:t>
-            </a:fld>
-            <a:endParaRPr lang="ko-KR" altLang="en-US"/>
-          </a:p>
-        </p:txBody>
-      </p:sp>
-      <p:sp>
-        <p:nvSpPr>
-          <p:cNvPr id="3" name="내용 개체 틀 2">
-            <a:extLst>
-              <a:ext uri="{FF2B5EF4-FFF2-40B4-BE49-F238E27FC236}">
-                <a16:creationId xmlns:a16="http://schemas.microsoft.com/office/drawing/2014/main" id="{317B1316-1F01-A547-2C0A-66500E99699F}"/>
-              </a:ext>
-            </a:extLst>
-          </p:cNvPr>
-          <p:cNvSpPr>
-            <a:spLocks noGrp="1"/>
-          </p:cNvSpPr>
-          <p:nvPr>
-            <p:ph idx="1"/>
-          </p:nvPr>
-        </p:nvSpPr>
-        <p:spPr/>
-        <p:txBody>
-          <a:bodyPr/>
-          <a:lstStyle/>
-          <a:p>
-            <a:r>
-              <a:rPr lang="en-US" altLang="ko-KR" dirty="0">
-                <a:hlinkClick r:id="rId4"/>
-              </a:rPr>
-              <a:t>https://</a:t>
-            </a:r>
-            <a:r>
-              <a:rPr lang="en-US" altLang="ko-KR" dirty="0" smtClean="0">
-                <a:hlinkClick r:id="rId4"/>
-              </a:rPr>
-              <a:t>codingon.co.kr/partner/sesac_ydp_5th/login</a:t>
-            </a:r>
-            <a:endParaRPr lang="en-US" altLang="ko-KR" dirty="0" smtClean="0"/>
-          </a:p>
-          <a:p>
-            <a:r>
-              <a:rPr lang="ko-KR" altLang="en-US" dirty="0" smtClean="0"/>
-              <a:t>접속 </a:t>
-            </a:r>
-            <a:r>
-              <a:rPr lang="ko-KR" altLang="en-US" dirty="0"/>
-              <a:t>후 </a:t>
-            </a:r>
-            <a:r>
-              <a:rPr lang="en-US" altLang="ko-KR" dirty="0"/>
-              <a:t>“React &gt; </a:t>
-            </a:r>
-            <a:r>
-              <a:rPr lang="ko-KR" altLang="en-US" dirty="0"/>
-              <a:t>이벤트 핸들링</a:t>
-            </a:r>
-            <a:r>
-              <a:rPr lang="en-US" altLang="ko-KR" dirty="0"/>
-              <a:t> </a:t>
-            </a:r>
-            <a:r>
-              <a:rPr lang="ko-KR" altLang="en-US" dirty="0"/>
-              <a:t>실습 진행</a:t>
-            </a:r>
-            <a:r>
-              <a:rPr lang="en-US" altLang="ko-KR" dirty="0"/>
-              <a:t>“</a:t>
-            </a:r>
-          </a:p>
-          <a:p>
-            <a:r>
-              <a:rPr lang="ko-KR" altLang="en-US" dirty="0"/>
-              <a:t>함수형으로도 만들어보기</a:t>
-            </a:r>
-          </a:p>
-        </p:txBody>
-      </p:sp>
-      <p:sp>
-        <p:nvSpPr>
-          <p:cNvPr id="8" name="직사각형 7">
-            <a:extLst>
-              <a:ext uri="{FF2B5EF4-FFF2-40B4-BE49-F238E27FC236}">
-                <a16:creationId xmlns:a16="http://schemas.microsoft.com/office/drawing/2014/main" id="{D5DF12E8-C5BE-ABAA-E147-02444AA43208}"/>
-              </a:ext>
-            </a:extLst>
-          </p:cNvPr>
-          <p:cNvSpPr/>
-          <p:nvPr/>
-        </p:nvSpPr>
-        <p:spPr>
-          <a:xfrm>
-            <a:off x="3915508" y="4435155"/>
-            <a:ext cx="7186246" cy="906644"/>
-          </a:xfrm>
-          <a:prstGeom prst="rect">
-            <a:avLst/>
-          </a:prstGeom>
-          <a:noFill/>
-          <a:ln w="57150">
-            <a:solidFill>
-              <a:srgbClr val="FF0000"/>
-            </a:solidFill>
-          </a:ln>
-        </p:spPr>
-        <p:style>
-          <a:lnRef idx="2">
-            <a:schemeClr val="accent1">
-              <a:shade val="50000"/>
-            </a:schemeClr>
-          </a:lnRef>
-          <a:fillRef idx="1">
-            <a:schemeClr val="accent1"/>
-          </a:fillRef>
-          <a:effectRef idx="0">
-            <a:schemeClr val="accent1"/>
-          </a:effectRef>
-          <a:fontRef idx="minor">
-            <a:schemeClr val="lt1"/>
-          </a:fontRef>
-        </p:style>
-        <p:txBody>
-          <a:bodyPr rtlCol="0" anchor="ctr"/>
-          <a:lstStyle/>
-          <a:p>
-            <a:pPr algn="ctr"/>
-            <a:endParaRPr lang="ko-KR" altLang="en-US"/>
-          </a:p>
-        </p:txBody>
-      </p:sp>
-    </p:spTree>
-    <p:extLst>
-      <p:ext uri="{BB962C8B-B14F-4D97-AF65-F5344CB8AC3E}">
-        <p14:creationId xmlns:p14="http://schemas.microsoft.com/office/powerpoint/2010/main" val="325935513"/>
-      </p:ext>
-    </p:extLst>
-  </p:cSld>
-  <p:clrMapOvr>
-    <a:masterClrMapping/>
-  </p:clrMapOvr>
-</p:sld>
-</file>
-
-<file path=ppt/slides/slide11.xml><?xml version="1.0" encoding="utf-8"?>
-<p:sld xmlns:a="http://schemas.openxmlformats.org/drawingml/2006/main" xmlns:r="http://schemas.openxmlformats.org/officeDocument/2006/relationships" xmlns:p="http://schemas.openxmlformats.org/presentationml/2006/main">
-  <p:cSld>
-    <p:spTree>
-      <p:nvGrpSpPr>
-        <p:cNvPr id="1" name=""/>
-        <p:cNvGrpSpPr/>
-        <p:nvPr/>
-      </p:nvGrpSpPr>
-      <p:grpSpPr>
-        <a:xfrm>
-          <a:off x="0" y="0"/>
-          <a:ext cx="0" cy="0"/>
-          <a:chOff x="0" y="0"/>
-          <a:chExt cx="0" cy="0"/>
-        </a:xfrm>
-      </p:grpSpPr>
-      <p:sp>
-        <p:nvSpPr>
-          <p:cNvPr id="2" name="제목 1">
-            <a:extLst>
-              <a:ext uri="{FF2B5EF4-FFF2-40B4-BE49-F238E27FC236}">
-                <a16:creationId xmlns:a16="http://schemas.microsoft.com/office/drawing/2014/main" id="{6C705268-880D-AF4E-8A90-8B152EB81097}"/>
-              </a:ext>
-            </a:extLst>
-          </p:cNvPr>
-          <p:cNvSpPr>
-            <a:spLocks noGrp="1"/>
-          </p:cNvSpPr>
-          <p:nvPr>
-            <p:ph type="title"/>
-          </p:nvPr>
-        </p:nvSpPr>
-        <p:spPr/>
-        <p:txBody>
-          <a:bodyPr/>
-          <a:lstStyle/>
-          <a:p>
-            <a:r>
-              <a:rPr lang="ko-KR" altLang="en-US" dirty="0">
-                <a:solidFill>
-                  <a:schemeClr val="accent1"/>
-                </a:solidFill>
-              </a:rPr>
-              <a:t>실습</a:t>
-            </a:r>
-            <a:r>
-              <a:rPr lang="en-US" altLang="ko-KR" dirty="0">
-                <a:solidFill>
-                  <a:schemeClr val="accent1"/>
-                </a:solidFill>
-              </a:rPr>
-              <a:t>.</a:t>
-            </a:r>
-            <a:r>
-              <a:rPr lang="ko-KR" altLang="en-US" dirty="0">
-                <a:solidFill>
-                  <a:schemeClr val="accent1"/>
-                </a:solidFill>
-              </a:rPr>
-              <a:t> </a:t>
-            </a:r>
-            <a:r>
-              <a:rPr lang="en-US" altLang="ko-KR" dirty="0"/>
-              <a:t>State</a:t>
-            </a:r>
-            <a:r>
-              <a:rPr lang="ko-KR" altLang="en-US" dirty="0"/>
-              <a:t> </a:t>
-            </a:r>
-            <a:r>
-              <a:rPr lang="en-US" altLang="ko-KR" dirty="0"/>
-              <a:t>&amp;</a:t>
-            </a:r>
-            <a:r>
-              <a:rPr lang="ko-KR" altLang="en-US" dirty="0"/>
-              <a:t> 이벤트 핸들링</a:t>
-            </a:r>
-          </a:p>
-        </p:txBody>
-      </p:sp>
-      <p:sp>
-        <p:nvSpPr>
-          <p:cNvPr id="4" name="날짜 개체 틀 3">
-            <a:extLst>
-              <a:ext uri="{FF2B5EF4-FFF2-40B4-BE49-F238E27FC236}">
-                <a16:creationId xmlns:a16="http://schemas.microsoft.com/office/drawing/2014/main" id="{6EE9B434-8977-A422-69B8-4F63EBA503FB}"/>
-              </a:ext>
-            </a:extLst>
-          </p:cNvPr>
-          <p:cNvSpPr>
-            <a:spLocks noGrp="1"/>
-          </p:cNvSpPr>
-          <p:nvPr>
-            <p:ph type="dt" sz="half" idx="10"/>
-          </p:nvPr>
-        </p:nvSpPr>
-        <p:spPr/>
-        <p:txBody>
-          <a:bodyPr/>
-          <a:lstStyle/>
-          <a:p>
-            <a:fld id="{F5DECA0C-8384-4A80-8CAF-F40503FCCF4C}" type="datetime6">
-              <a:rPr lang="ko-KR" altLang="en-US" smtClean="0"/>
-              <a:t>2023년 9월</a:t>
-            </a:fld>
-            <a:endParaRPr lang="ko-KR" altLang="en-US"/>
-          </a:p>
-        </p:txBody>
-      </p:sp>
-      <p:sp>
-        <p:nvSpPr>
-          <p:cNvPr id="5" name="슬라이드 번호 개체 틀 4">
-            <a:extLst>
-              <a:ext uri="{FF2B5EF4-FFF2-40B4-BE49-F238E27FC236}">
-                <a16:creationId xmlns:a16="http://schemas.microsoft.com/office/drawing/2014/main" id="{75E3E9B0-C628-12AF-B688-62BAA3A8B414}"/>
-              </a:ext>
-            </a:extLst>
-          </p:cNvPr>
-          <p:cNvSpPr>
-            <a:spLocks noGrp="1"/>
-          </p:cNvSpPr>
-          <p:nvPr>
-            <p:ph type="sldNum" sz="quarter" idx="12"/>
-          </p:nvPr>
-        </p:nvSpPr>
-        <p:spPr/>
-        <p:txBody>
-          <a:bodyPr/>
-          <a:lstStyle/>
-          <a:p>
-            <a:fld id="{083A2CE0-18CD-4102-B738-4ACFF9E68BA4}" type="slidenum">
-              <a:rPr lang="ko-KR" altLang="en-US" smtClean="0"/>
-              <a:t>11</a:t>
-            </a:fld>
-            <a:endParaRPr lang="ko-KR" altLang="en-US"/>
-          </a:p>
-        </p:txBody>
-      </p:sp>
-      <p:pic>
-        <p:nvPicPr>
-          <p:cNvPr id="11" name="그림 10">
-            <a:extLst>
-              <a:ext uri="{FF2B5EF4-FFF2-40B4-BE49-F238E27FC236}">
-                <a16:creationId xmlns:a16="http://schemas.microsoft.com/office/drawing/2014/main" id="{647C9FF7-1555-0ABB-D3AE-A8BBF66A7BAA}"/>
-              </a:ext>
-            </a:extLst>
-          </p:cNvPr>
-          <p:cNvPicPr>
-            <a:picLocks noChangeAspect="1"/>
-          </p:cNvPicPr>
-          <p:nvPr/>
-        </p:nvPicPr>
-        <p:blipFill>
-          <a:blip r:embed="rId3"/>
-          <a:stretch>
-            <a:fillRect/>
-          </a:stretch>
-        </p:blipFill>
-        <p:spPr>
-          <a:xfrm>
-            <a:off x="1148136" y="2746471"/>
-            <a:ext cx="3088858" cy="1632683"/>
-          </a:xfrm>
-          <a:prstGeom prst="rect">
-            <a:avLst/>
-          </a:prstGeom>
-        </p:spPr>
-      </p:pic>
-      <p:pic>
-        <p:nvPicPr>
-          <p:cNvPr id="13" name="그림 12">
-            <a:extLst>
-              <a:ext uri="{FF2B5EF4-FFF2-40B4-BE49-F238E27FC236}">
-                <a16:creationId xmlns:a16="http://schemas.microsoft.com/office/drawing/2014/main" id="{E91C671D-EEF4-C002-4BE0-384FDBDE0DD3}"/>
-              </a:ext>
-            </a:extLst>
-          </p:cNvPr>
-          <p:cNvPicPr>
-            <a:picLocks noChangeAspect="1"/>
-          </p:cNvPicPr>
-          <p:nvPr/>
-        </p:nvPicPr>
-        <p:blipFill>
-          <a:blip r:embed="rId4"/>
-          <a:stretch>
-            <a:fillRect/>
-          </a:stretch>
-        </p:blipFill>
-        <p:spPr>
-          <a:xfrm>
-            <a:off x="4631220" y="2746471"/>
-            <a:ext cx="3345403" cy="1766836"/>
-          </a:xfrm>
-          <a:prstGeom prst="rect">
-            <a:avLst/>
-          </a:prstGeom>
-        </p:spPr>
-      </p:pic>
-      <p:pic>
-        <p:nvPicPr>
-          <p:cNvPr id="15" name="그림 14">
-            <a:extLst>
-              <a:ext uri="{FF2B5EF4-FFF2-40B4-BE49-F238E27FC236}">
-                <a16:creationId xmlns:a16="http://schemas.microsoft.com/office/drawing/2014/main" id="{E6CA8F71-FCEC-F49B-88CB-7C5A543674A5}"/>
-              </a:ext>
-            </a:extLst>
-          </p:cNvPr>
-          <p:cNvPicPr>
-            <a:picLocks noChangeAspect="1"/>
-          </p:cNvPicPr>
-          <p:nvPr/>
-        </p:nvPicPr>
-        <p:blipFill>
-          <a:blip r:embed="rId5"/>
-          <a:stretch>
-            <a:fillRect/>
-          </a:stretch>
-        </p:blipFill>
-        <p:spPr>
-          <a:xfrm>
-            <a:off x="8370849" y="2817878"/>
-            <a:ext cx="3137210" cy="1695429"/>
-          </a:xfrm>
-          <a:prstGeom prst="rect">
-            <a:avLst/>
-          </a:prstGeom>
-        </p:spPr>
-      </p:pic>
-      <p:sp>
-        <p:nvSpPr>
-          <p:cNvPr id="16" name="화살표: 오른쪽 15">
-            <a:extLst>
-              <a:ext uri="{FF2B5EF4-FFF2-40B4-BE49-F238E27FC236}">
-                <a16:creationId xmlns:a16="http://schemas.microsoft.com/office/drawing/2014/main" id="{FE046686-8412-CCA0-59BB-FE1FB4A307D7}"/>
-              </a:ext>
-            </a:extLst>
-          </p:cNvPr>
-          <p:cNvSpPr/>
-          <p:nvPr/>
-        </p:nvSpPr>
-        <p:spPr>
-          <a:xfrm rot="18844310">
-            <a:off x="4538517" y="4031507"/>
-            <a:ext cx="479503" cy="365125"/>
-          </a:xfrm>
-          <a:prstGeom prst="rightArrow">
-            <a:avLst/>
-          </a:prstGeom>
-          <a:solidFill>
-            <a:srgbClr val="00B050"/>
-          </a:solidFill>
-          <a:ln>
-            <a:noFill/>
-          </a:ln>
-        </p:spPr>
-        <p:style>
-          <a:lnRef idx="2">
-            <a:schemeClr val="accent1">
-              <a:shade val="50000"/>
-            </a:schemeClr>
-          </a:lnRef>
-          <a:fillRef idx="1">
-            <a:schemeClr val="accent1"/>
-          </a:fillRef>
-          <a:effectRef idx="0">
-            <a:schemeClr val="accent1"/>
-          </a:effectRef>
-          <a:fontRef idx="minor">
-            <a:schemeClr val="lt1"/>
-          </a:fontRef>
-        </p:style>
-        <p:txBody>
-          <a:bodyPr rtlCol="0" anchor="ctr"/>
-          <a:lstStyle/>
-          <a:p>
-            <a:pPr algn="ctr"/>
-            <a:endParaRPr lang="ko-KR" altLang="en-US"/>
-          </a:p>
-        </p:txBody>
-      </p:sp>
-      <p:sp>
-        <p:nvSpPr>
-          <p:cNvPr id="17" name="화살표: 오른쪽 16">
-            <a:extLst>
-              <a:ext uri="{FF2B5EF4-FFF2-40B4-BE49-F238E27FC236}">
-                <a16:creationId xmlns:a16="http://schemas.microsoft.com/office/drawing/2014/main" id="{8A08DA88-90C0-E7C0-03AF-03DA52238EEF}"/>
-              </a:ext>
-            </a:extLst>
-          </p:cNvPr>
-          <p:cNvSpPr/>
-          <p:nvPr/>
-        </p:nvSpPr>
-        <p:spPr>
-          <a:xfrm rot="18844310">
-            <a:off x="9151406" y="3960986"/>
-            <a:ext cx="479503" cy="365125"/>
-          </a:xfrm>
-          <a:prstGeom prst="rightArrow">
-            <a:avLst/>
-          </a:prstGeom>
-          <a:solidFill>
-            <a:srgbClr val="00B050"/>
-          </a:solidFill>
-          <a:ln>
-            <a:noFill/>
-          </a:ln>
-        </p:spPr>
-        <p:style>
-          <a:lnRef idx="2">
-            <a:schemeClr val="accent1">
-              <a:shade val="50000"/>
-            </a:schemeClr>
-          </a:lnRef>
-          <a:fillRef idx="1">
-            <a:schemeClr val="accent1"/>
-          </a:fillRef>
-          <a:effectRef idx="0">
-            <a:schemeClr val="accent1"/>
-          </a:effectRef>
-          <a:fontRef idx="minor">
-            <a:schemeClr val="lt1"/>
-          </a:fontRef>
-        </p:style>
-        <p:txBody>
-          <a:bodyPr rtlCol="0" anchor="ctr"/>
-          <a:lstStyle/>
-          <a:p>
-            <a:pPr algn="ctr"/>
-            <a:endParaRPr lang="ko-KR" altLang="en-US"/>
-          </a:p>
-        </p:txBody>
-      </p:sp>
-    </p:spTree>
-    <p:extLst>
-      <p:ext uri="{BB962C8B-B14F-4D97-AF65-F5344CB8AC3E}">
-        <p14:creationId xmlns:p14="http://schemas.microsoft.com/office/powerpoint/2010/main" val="1869249189"/>
-      </p:ext>
-    </p:extLst>
-  </p:cSld>
-  <p:clrMapOvr>
-    <a:masterClrMapping/>
-  </p:clrMapOvr>
-</p:sld>
-</file>
-
-<file path=ppt/slides/slide12.xml><?xml version="1.0" encoding="utf-8"?>
-<p:sld xmlns:a="http://schemas.openxmlformats.org/drawingml/2006/main" xmlns:r="http://schemas.openxmlformats.org/officeDocument/2006/relationships" xmlns:p="http://schemas.openxmlformats.org/presentationml/2006/main">
-  <p:cSld>
-    <p:spTree>
-      <p:nvGrpSpPr>
-        <p:cNvPr id="1" name=""/>
-        <p:cNvGrpSpPr/>
-        <p:nvPr/>
-      </p:nvGrpSpPr>
-      <p:grpSpPr>
-        <a:xfrm>
-          <a:off x="0" y="0"/>
-          <a:ext cx="0" cy="0"/>
-          <a:chOff x="0" y="0"/>
-          <a:chExt cx="0" cy="0"/>
-        </a:xfrm>
-      </p:grpSpPr>
-      <p:sp>
-        <p:nvSpPr>
-          <p:cNvPr id="2" name="제목 1">
-            <a:extLst>
-              <a:ext uri="{FF2B5EF4-FFF2-40B4-BE49-F238E27FC236}">
-                <a16:creationId xmlns:a16="http://schemas.microsoft.com/office/drawing/2014/main" id="{6C705268-880D-AF4E-8A90-8B152EB81097}"/>
-              </a:ext>
-            </a:extLst>
-          </p:cNvPr>
-          <p:cNvSpPr>
-            <a:spLocks noGrp="1"/>
-          </p:cNvSpPr>
-          <p:nvPr>
-            <p:ph type="title"/>
-          </p:nvPr>
-        </p:nvSpPr>
-        <p:spPr/>
-        <p:txBody>
-          <a:bodyPr>
-            <a:normAutofit/>
-          </a:bodyPr>
-          <a:lstStyle/>
-          <a:p>
-            <a:r>
-              <a:rPr lang="ko-KR" altLang="en-US" dirty="0">
-                <a:solidFill>
-                  <a:schemeClr val="accent1"/>
-                </a:solidFill>
-              </a:rPr>
-              <a:t>실습</a:t>
-            </a:r>
-            <a:r>
-              <a:rPr lang="en-US" altLang="ko-KR" dirty="0">
-                <a:solidFill>
-                  <a:schemeClr val="accent1"/>
-                </a:solidFill>
-              </a:rPr>
-              <a:t>.</a:t>
-            </a:r>
-            <a:r>
-              <a:rPr lang="ko-KR" altLang="en-US" dirty="0">
-                <a:solidFill>
-                  <a:schemeClr val="accent1"/>
-                </a:solidFill>
-              </a:rPr>
-              <a:t> </a:t>
-            </a:r>
-            <a:r>
-              <a:rPr lang="en-US" altLang="ko-KR" dirty="0"/>
-              <a:t>State</a:t>
-            </a:r>
-            <a:r>
-              <a:rPr lang="ko-KR" altLang="en-US" dirty="0"/>
-              <a:t> </a:t>
-            </a:r>
-            <a:r>
-              <a:rPr lang="en-US" altLang="ko-KR" dirty="0"/>
-              <a:t>&amp;</a:t>
-            </a:r>
-            <a:r>
-              <a:rPr lang="ko-KR" altLang="en-US" dirty="0"/>
-              <a:t> 이벤트 핸들링</a:t>
-            </a:r>
-            <a:r>
-              <a:rPr lang="en-US" altLang="ko-KR" dirty="0"/>
-              <a:t>2</a:t>
-            </a:r>
-            <a:endParaRPr lang="ko-KR" altLang="en-US" dirty="0"/>
-          </a:p>
-        </p:txBody>
-      </p:sp>
-      <p:sp>
-        <p:nvSpPr>
-          <p:cNvPr id="4" name="날짜 개체 틀 3">
-            <a:extLst>
-              <a:ext uri="{FF2B5EF4-FFF2-40B4-BE49-F238E27FC236}">
-                <a16:creationId xmlns:a16="http://schemas.microsoft.com/office/drawing/2014/main" id="{6EE9B434-8977-A422-69B8-4F63EBA503FB}"/>
-              </a:ext>
-            </a:extLst>
-          </p:cNvPr>
-          <p:cNvSpPr>
-            <a:spLocks noGrp="1"/>
-          </p:cNvSpPr>
-          <p:nvPr>
-            <p:ph type="dt" sz="half" idx="10"/>
-          </p:nvPr>
-        </p:nvSpPr>
-        <p:spPr/>
-        <p:txBody>
-          <a:bodyPr/>
-          <a:lstStyle/>
-          <a:p>
-            <a:fld id="{F5DECA0C-8384-4A80-8CAF-F40503FCCF4C}" type="datetime6">
-              <a:rPr lang="ko-KR" altLang="en-US" smtClean="0"/>
-              <a:t>2023년 9월</a:t>
-            </a:fld>
-            <a:endParaRPr lang="ko-KR" altLang="en-US"/>
-          </a:p>
-        </p:txBody>
-      </p:sp>
-      <p:sp>
-        <p:nvSpPr>
-          <p:cNvPr id="5" name="슬라이드 번호 개체 틀 4">
-            <a:extLst>
-              <a:ext uri="{FF2B5EF4-FFF2-40B4-BE49-F238E27FC236}">
-                <a16:creationId xmlns:a16="http://schemas.microsoft.com/office/drawing/2014/main" id="{75E3E9B0-C628-12AF-B688-62BAA3A8B414}"/>
-              </a:ext>
-            </a:extLst>
-          </p:cNvPr>
-          <p:cNvSpPr>
-            <a:spLocks noGrp="1"/>
-          </p:cNvSpPr>
-          <p:nvPr>
-            <p:ph type="sldNum" sz="quarter" idx="12"/>
-          </p:nvPr>
-        </p:nvSpPr>
-        <p:spPr/>
-        <p:txBody>
-          <a:bodyPr/>
-          <a:lstStyle/>
-          <a:p>
-            <a:fld id="{083A2CE0-18CD-4102-B738-4ACFF9E68BA4}" type="slidenum">
-              <a:rPr lang="ko-KR" altLang="en-US" smtClean="0"/>
-              <a:t>12</a:t>
-            </a:fld>
-            <a:endParaRPr lang="ko-KR" altLang="en-US"/>
-          </a:p>
-        </p:txBody>
-      </p:sp>
-      <p:pic>
-        <p:nvPicPr>
-          <p:cNvPr id="7" name="bandicam 2022-10-07 12-27-04-842">
-            <a:hlinkClick r:id="" action="ppaction://media"/>
-            <a:extLst>
-              <a:ext uri="{FF2B5EF4-FFF2-40B4-BE49-F238E27FC236}">
-                <a16:creationId xmlns:a16="http://schemas.microsoft.com/office/drawing/2014/main" id="{2C7430AD-D2D7-484B-EB41-99FE1B92AFD1}"/>
-              </a:ext>
-            </a:extLst>
-          </p:cNvPr>
-          <p:cNvPicPr>
-            <a:picLocks noChangeAspect="1"/>
-          </p:cNvPicPr>
-          <p:nvPr>
-            <a:videoFile r:link="rId2"/>
-            <p:extLst>
-              <p:ext uri="{DAA4B4D4-6D71-4841-9C94-3DE7FCFB9230}">
-                <p14:media xmlns:p14="http://schemas.microsoft.com/office/powerpoint/2010/main" r:embed="rId1"/>
-              </p:ext>
-            </p:extLst>
-          </p:nvPr>
-        </p:nvPicPr>
-        <p:blipFill rotWithShape="1">
-          <a:blip r:embed="rId5"/>
-          <a:srcRect t="27073"/>
-          <a:stretch/>
-        </p:blipFill>
-        <p:spPr>
-          <a:xfrm>
-            <a:off x="2530195" y="2049840"/>
-            <a:ext cx="7456985" cy="2598233"/>
-          </a:xfrm>
-          <a:prstGeom prst="rect">
-            <a:avLst/>
-          </a:prstGeom>
-        </p:spPr>
-      </p:pic>
-    </p:spTree>
-    <p:extLst>
-      <p:ext uri="{BB962C8B-B14F-4D97-AF65-F5344CB8AC3E}">
-        <p14:creationId xmlns:p14="http://schemas.microsoft.com/office/powerpoint/2010/main" val="2646873412"/>
-      </p:ext>
-    </p:extLst>
-  </p:cSld>
-  <p:clrMapOvr>
-    <a:masterClrMapping/>
-  </p:clrMapOvr>
-  <p:timing>
-    <p:tnLst>
-      <p:par>
-        <p:cTn id="1" dur="indefinite" restart="never" nodeType="tmRoot">
-          <p:childTnLst>
-            <p:seq concurrent="1" nextAc="seek">
-              <p:cTn id="2" dur="indefinite" nodeType="mainSeq">
-                <p:childTnLst>
-                  <p:par>
-                    <p:cTn id="3" fill="hold">
-                      <p:stCondLst>
-                        <p:cond delay="indefinite"/>
-                      </p:stCondLst>
-                      <p:childTnLst>
-                        <p:par>
-                          <p:cTn id="4" fill="hold">
-                            <p:stCondLst>
-                              <p:cond delay="0"/>
-                            </p:stCondLst>
-                            <p:childTnLst>
-                              <p:par>
-                                <p:cTn id="5" presetID="1" presetClass="mediacall" presetSubtype="0" fill="hold" nodeType="clickEffect">
-                                  <p:stCondLst>
-                                    <p:cond delay="0"/>
-                                  </p:stCondLst>
-                                  <p:childTnLst>
-                                    <p:cmd type="call" cmd="playFrom(0.0)">
-                                      <p:cBhvr>
-                                        <p:cTn id="6" dur="4467" fill="hold"/>
-                                        <p:tgtEl>
-                                          <p:spTgt spid="7"/>
-                                        </p:tgtEl>
-                                      </p:cBhvr>
-                                    </p:cmd>
-                                  </p:childTnLst>
-                                </p:cTn>
-                              </p:par>
-                            </p:childTnLst>
-                          </p:cTn>
-                        </p:par>
-                      </p:childTnLst>
-                    </p:cTn>
-                  </p:par>
-                </p:childTnLst>
-              </p:cTn>
-              <p:prevCondLst>
-                <p:cond evt="onPrev" delay="0">
-                  <p:tgtEl>
-                    <p:sldTgt/>
-                  </p:tgtEl>
-                </p:cond>
-              </p:prevCondLst>
-              <p:nextCondLst>
-                <p:cond evt="onNext" delay="0">
-                  <p:tgtEl>
-                    <p:sldTgt/>
-                  </p:tgtEl>
-                </p:cond>
-              </p:nextCondLst>
-            </p:seq>
-            <p:video>
-              <p:cMediaNode vol="80000">
-                <p:cTn id="7" fill="hold" display="0">
-                  <p:stCondLst>
-                    <p:cond delay="indefinite"/>
-                  </p:stCondLst>
-                </p:cTn>
-                <p:tgtEl>
-                  <p:spTgt spid="7"/>
-                </p:tgtEl>
-              </p:cMediaNode>
-            </p:video>
-            <p:seq concurrent="1" nextAc="seek">
-              <p:cTn id="8" restart="whenNotActive" fill="hold" evtFilter="cancelBubble" nodeType="interactiveSeq">
-                <p:stCondLst>
-                  <p:cond evt="onClick" delay="0">
-                    <p:tgtEl>
-                      <p:spTgt spid="7"/>
-                    </p:tgtEl>
-                  </p:cond>
-                </p:stCondLst>
-                <p:endSync evt="end" delay="0">
-                  <p:rtn val="all"/>
-                </p:endSync>
-                <p:childTnLst>
-                  <p:par>
-                    <p:cTn id="9" fill="hold">
-                      <p:stCondLst>
-                        <p:cond delay="0"/>
-                      </p:stCondLst>
-                      <p:childTnLst>
-                        <p:par>
-                          <p:cTn id="10" fill="hold">
-                            <p:stCondLst>
-                              <p:cond delay="0"/>
-                            </p:stCondLst>
-                            <p:childTnLst>
-                              <p:par>
-                                <p:cTn id="11" presetID="2" presetClass="mediacall" presetSubtype="0" fill="hold" nodeType="clickEffect">
-                                  <p:stCondLst>
-                                    <p:cond delay="0"/>
-                                  </p:stCondLst>
-                                  <p:childTnLst>
-                                    <p:cmd type="call" cmd="togglePause">
-                                      <p:cBhvr>
-                                        <p:cTn id="12" dur="1" fill="hold"/>
-                                        <p:tgtEl>
-                                          <p:spTgt spid="7"/>
-                                        </p:tgtEl>
-                                      </p:cBhvr>
-                                    </p:cmd>
-                                  </p:childTnLst>
-                                </p:cTn>
-                              </p:par>
-                            </p:childTnLst>
-                          </p:cTn>
-                        </p:par>
-                      </p:childTnLst>
-                    </p:cTn>
-                  </p:par>
-                </p:childTnLst>
-              </p:cTn>
-              <p:nextCondLst>
-                <p:cond evt="onClick" delay="0">
-                  <p:tgtEl>
-                    <p:spTgt spid="7"/>
-                  </p:tgtEl>
-                </p:cond>
-              </p:nextCondLst>
-            </p:seq>
-          </p:childTnLst>
-        </p:cTn>
-      </p:par>
-    </p:tnLst>
-  </p:timing>
-</p:sld>
-</file>
-
-<file path=ppt/slides/slide13.xml><?xml version="1.0" encoding="utf-8"?>
-<p:sld xmlns:a="http://schemas.openxmlformats.org/drawingml/2006/main" xmlns:r="http://schemas.openxmlformats.org/officeDocument/2006/relationships" xmlns:p="http://schemas.openxmlformats.org/presentationml/2006/main">
-  <p:cSld>
-    <p:spTree>
-      <p:nvGrpSpPr>
-        <p:cNvPr id="1" name=""/>
-        <p:cNvGrpSpPr/>
-        <p:nvPr/>
-      </p:nvGrpSpPr>
-      <p:grpSpPr>
-        <a:xfrm>
-          <a:off x="0" y="0"/>
-          <a:ext cx="0" cy="0"/>
-          <a:chOff x="0" y="0"/>
-          <a:chExt cx="0" cy="0"/>
-        </a:xfrm>
-      </p:grpSpPr>
-      <p:sp>
-        <p:nvSpPr>
-          <p:cNvPr id="2" name="제목 1">
-            <a:extLst>
-              <a:ext uri="{FF2B5EF4-FFF2-40B4-BE49-F238E27FC236}">
-                <a16:creationId xmlns:a16="http://schemas.microsoft.com/office/drawing/2014/main" id="{6C705268-880D-AF4E-8A90-8B152EB81097}"/>
-              </a:ext>
-            </a:extLst>
-          </p:cNvPr>
-          <p:cNvSpPr>
-            <a:spLocks noGrp="1"/>
-          </p:cNvSpPr>
-          <p:nvPr>
-            <p:ph type="title"/>
-          </p:nvPr>
-        </p:nvSpPr>
-        <p:spPr/>
-        <p:txBody>
-          <a:bodyPr/>
-          <a:lstStyle/>
-          <a:p>
-            <a:r>
-              <a:rPr lang="ko-KR" altLang="en-US" dirty="0">
-                <a:solidFill>
-                  <a:schemeClr val="accent1"/>
-                </a:solidFill>
-              </a:rPr>
-              <a:t>실습</a:t>
-            </a:r>
-            <a:r>
-              <a:rPr lang="en-US" altLang="ko-KR" dirty="0">
-                <a:solidFill>
-                  <a:schemeClr val="accent1"/>
-                </a:solidFill>
-              </a:rPr>
-              <a:t>.</a:t>
-            </a:r>
-            <a:r>
-              <a:rPr lang="ko-KR" altLang="en-US" dirty="0">
-                <a:solidFill>
-                  <a:schemeClr val="accent1"/>
-                </a:solidFill>
-              </a:rPr>
-              <a:t> </a:t>
-            </a:r>
-            <a:r>
               <a:rPr lang="ko-KR" altLang="en-US" dirty="0" smtClean="0"/>
               <a:t>종합 실습 </a:t>
             </a:r>
@@ -6556,64 +5765,6 @@
               <a:t>(props, state, event)</a:t>
             </a:r>
             <a:endParaRPr lang="ko-KR" altLang="en-US" dirty="0"/>
-          </a:p>
-        </p:txBody>
-      </p:sp>
-      <p:sp>
-        <p:nvSpPr>
-          <p:cNvPr id="4" name="날짜 개체 틀 3">
-            <a:extLst>
-              <a:ext uri="{FF2B5EF4-FFF2-40B4-BE49-F238E27FC236}">
-                <a16:creationId xmlns:a16="http://schemas.microsoft.com/office/drawing/2014/main" id="{6EE9B434-8977-A422-69B8-4F63EBA503FB}"/>
-              </a:ext>
-            </a:extLst>
-          </p:cNvPr>
-          <p:cNvSpPr>
-            <a:spLocks noGrp="1"/>
-          </p:cNvSpPr>
-          <p:nvPr>
-            <p:ph type="dt" sz="half" idx="10"/>
-          </p:nvPr>
-        </p:nvSpPr>
-        <p:spPr/>
-        <p:txBody>
-          <a:bodyPr/>
-          <a:lstStyle/>
-          <a:p>
-            <a:fld id="{F5DECA0C-8384-4A80-8CAF-F40503FCCF4C}" type="datetime6">
-              <a:rPr lang="ko-KR" altLang="en-US" smtClean="0"/>
-              <a:t>2023년 9월</a:t>
-            </a:fld>
-            <a:endParaRPr lang="ko-KR" altLang="en-US"/>
-          </a:p>
-        </p:txBody>
-      </p:sp>
-      <p:sp>
-        <p:nvSpPr>
-          <p:cNvPr id="5" name="슬라이드 번호 개체 틀 4">
-            <a:extLst>
-              <a:ext uri="{FF2B5EF4-FFF2-40B4-BE49-F238E27FC236}">
-                <a16:creationId xmlns:a16="http://schemas.microsoft.com/office/drawing/2014/main" id="{75E3E9B0-C628-12AF-B688-62BAA3A8B414}"/>
-              </a:ext>
-            </a:extLst>
-          </p:cNvPr>
-          <p:cNvSpPr>
-            <a:spLocks noGrp="1"/>
-          </p:cNvSpPr>
-          <p:nvPr>
-            <p:ph type="sldNum" sz="quarter" idx="12"/>
-          </p:nvPr>
-        </p:nvSpPr>
-        <p:spPr/>
-        <p:txBody>
-          <a:bodyPr/>
-          <a:lstStyle/>
-          <a:p>
-            <a:fld id="{083A2CE0-18CD-4102-B738-4ACFF9E68BA4}" type="slidenum">
-              <a:rPr lang="ko-KR" altLang="en-US" smtClean="0"/>
-              <a:t>13</a:t>
-            </a:fld>
-            <a:endParaRPr lang="ko-KR" altLang="en-US"/>
           </a:p>
         </p:txBody>
       </p:sp>
@@ -6743,6 +5894,625 @@
 </p:sld>
 </file>
 
+<file path=ppt/slides/slide11.xml><?xml version="1.0" encoding="utf-8"?>
+<p:sld xmlns:a="http://schemas.openxmlformats.org/drawingml/2006/main" xmlns:r="http://schemas.openxmlformats.org/officeDocument/2006/relationships" xmlns:p="http://schemas.openxmlformats.org/presentationml/2006/main">
+  <p:cSld>
+    <p:spTree>
+      <p:nvGrpSpPr>
+        <p:cNvPr id="1" name=""/>
+        <p:cNvGrpSpPr/>
+        <p:nvPr/>
+      </p:nvGrpSpPr>
+      <p:grpSpPr>
+        <a:xfrm>
+          <a:off x="0" y="0"/>
+          <a:ext cx="0" cy="0"/>
+          <a:chOff x="0" y="0"/>
+          <a:chExt cx="0" cy="0"/>
+        </a:xfrm>
+      </p:grpSpPr>
+      <p:sp>
+        <p:nvSpPr>
+          <p:cNvPr id="13" name="내용 개체 틀 2">
+            <a:extLst>
+              <a:ext uri="{FF2B5EF4-FFF2-40B4-BE49-F238E27FC236}">
+                <a16:creationId xmlns:a16="http://schemas.microsoft.com/office/drawing/2014/main" id="{847FD532-7F61-A001-537F-B970BD821AF3}"/>
+              </a:ext>
+            </a:extLst>
+          </p:cNvPr>
+          <p:cNvSpPr>
+            <a:spLocks noGrp="1"/>
+          </p:cNvSpPr>
+          <p:nvPr>
+            <p:ph idx="1"/>
+          </p:nvPr>
+        </p:nvSpPr>
+        <p:spPr>
+          <a:xfrm>
+            <a:off x="510988" y="1328391"/>
+            <a:ext cx="11260802" cy="5328442"/>
+          </a:xfrm>
+        </p:spPr>
+        <p:txBody>
+          <a:bodyPr>
+            <a:normAutofit/>
+          </a:bodyPr>
+          <a:lstStyle/>
+          <a:p>
+            <a:endParaRPr lang="en-US" altLang="ko-KR" dirty="0"/>
+          </a:p>
+          <a:p>
+            <a:pPr marL="0" indent="0">
+              <a:buNone/>
+            </a:pPr>
+            <a:endParaRPr lang="en-US" altLang="ko-KR" dirty="0"/>
+          </a:p>
+          <a:p>
+            <a:endParaRPr lang="en-US" altLang="ko-KR" dirty="0"/>
+          </a:p>
+        </p:txBody>
+      </p:sp>
+      <p:sp>
+        <p:nvSpPr>
+          <p:cNvPr id="4" name="날짜 개체 틀 3">
+            <a:extLst>
+              <a:ext uri="{FF2B5EF4-FFF2-40B4-BE49-F238E27FC236}">
+                <a16:creationId xmlns:a16="http://schemas.microsoft.com/office/drawing/2014/main" id="{A695DDE5-0A39-A366-4CFE-A283911999CD}"/>
+              </a:ext>
+            </a:extLst>
+          </p:cNvPr>
+          <p:cNvSpPr>
+            <a:spLocks noGrp="1"/>
+          </p:cNvSpPr>
+          <p:nvPr>
+            <p:ph type="dt" sz="half" idx="10"/>
+          </p:nvPr>
+        </p:nvSpPr>
+        <p:spPr/>
+        <p:txBody>
+          <a:bodyPr/>
+          <a:lstStyle/>
+          <a:p>
+            <a:fld id="{0F78D9C4-20C1-4B15-A116-16DC77AD9A1E}" type="datetime1">
+              <a:rPr lang="ko-KR" altLang="en-US" smtClean="0"/>
+              <a:t>2024-08-05</a:t>
+            </a:fld>
+            <a:endParaRPr lang="ko-KR" altLang="en-US"/>
+          </a:p>
+        </p:txBody>
+      </p:sp>
+      <p:sp>
+        <p:nvSpPr>
+          <p:cNvPr id="5" name="슬라이드 번호 개체 틀 4">
+            <a:extLst>
+              <a:ext uri="{FF2B5EF4-FFF2-40B4-BE49-F238E27FC236}">
+                <a16:creationId xmlns:a16="http://schemas.microsoft.com/office/drawing/2014/main" id="{5E040F43-60A7-C50D-1F5B-F984054F2D7C}"/>
+              </a:ext>
+            </a:extLst>
+          </p:cNvPr>
+          <p:cNvSpPr>
+            <a:spLocks noGrp="1"/>
+          </p:cNvSpPr>
+          <p:nvPr>
+            <p:ph type="sldNum" sz="quarter" idx="12"/>
+          </p:nvPr>
+        </p:nvSpPr>
+        <p:spPr/>
+        <p:txBody>
+          <a:bodyPr/>
+          <a:lstStyle/>
+          <a:p>
+            <a:fld id="{083A2CE0-18CD-4102-B738-4ACFF9E68BA4}" type="slidenum">
+              <a:rPr lang="ko-KR" altLang="en-US" smtClean="0"/>
+              <a:t>11</a:t>
+            </a:fld>
+            <a:endParaRPr lang="ko-KR" altLang="en-US"/>
+          </a:p>
+        </p:txBody>
+      </p:sp>
+      <p:sp>
+        <p:nvSpPr>
+          <p:cNvPr id="2" name="제목 1">
+            <a:extLst>
+              <a:ext uri="{FF2B5EF4-FFF2-40B4-BE49-F238E27FC236}">
+                <a16:creationId xmlns:a16="http://schemas.microsoft.com/office/drawing/2014/main" id="{5FAC57F5-99D7-9C46-B6C1-D16224151FE9}"/>
+              </a:ext>
+            </a:extLst>
+          </p:cNvPr>
+          <p:cNvSpPr>
+            <a:spLocks noGrp="1"/>
+          </p:cNvSpPr>
+          <p:nvPr>
+            <p:ph type="title"/>
+          </p:nvPr>
+        </p:nvSpPr>
+        <p:spPr/>
+        <p:txBody>
+          <a:bodyPr/>
+          <a:lstStyle/>
+          <a:p>
+            <a:r>
+              <a:rPr lang="ko-KR" altLang="en-US" dirty="0">
+                <a:solidFill>
+                  <a:srgbClr val="6EC173"/>
+                </a:solidFill>
+              </a:rPr>
+              <a:t>실습</a:t>
+            </a:r>
+            <a:r>
+              <a:rPr lang="en-US" altLang="ko-KR" dirty="0">
+                <a:solidFill>
+                  <a:srgbClr val="6EC173"/>
+                </a:solidFill>
+              </a:rPr>
+              <a:t>.  </a:t>
+            </a:r>
+            <a:r>
+              <a:rPr lang="en-US" altLang="ko-KR" dirty="0"/>
+              <a:t> </a:t>
+            </a:r>
+            <a:r>
+              <a:rPr lang="ko-KR" altLang="en-US" dirty="0" smtClean="0"/>
+              <a:t>이벤트 핸들링</a:t>
+            </a:r>
+            <a:r>
+              <a:rPr lang="en-US" altLang="ko-KR" dirty="0" smtClean="0"/>
+              <a:t> </a:t>
+            </a:r>
+            <a:r>
+              <a:rPr lang="ko-KR" altLang="en-US" dirty="0"/>
+              <a:t>실습</a:t>
+            </a:r>
+          </a:p>
+        </p:txBody>
+      </p:sp>
+      <p:sp>
+        <p:nvSpPr>
+          <p:cNvPr id="6" name="내용 개체 틀 1">
+            <a:extLst>
+              <a:ext uri="{FF2B5EF4-FFF2-40B4-BE49-F238E27FC236}">
+                <a16:creationId xmlns:a16="http://schemas.microsoft.com/office/drawing/2014/main" id="{70C2BA37-BE91-39C4-AC08-0E8A1052E2F7}"/>
+              </a:ext>
+            </a:extLst>
+          </p:cNvPr>
+          <p:cNvSpPr txBox="1">
+            <a:spLocks/>
+          </p:cNvSpPr>
+          <p:nvPr/>
+        </p:nvSpPr>
+        <p:spPr>
+          <a:xfrm>
+            <a:off x="838200" y="1825625"/>
+            <a:ext cx="10515600" cy="4351338"/>
+          </a:xfrm>
+          <a:prstGeom prst="rect">
+            <a:avLst/>
+          </a:prstGeom>
+        </p:spPr>
+        <p:txBody>
+          <a:bodyPr vert="horz" lIns="91440" tIns="45720" rIns="91440" bIns="45720" rtlCol="0">
+            <a:normAutofit/>
+          </a:bodyPr>
+          <a:lstStyle>
+            <a:lvl1pPr marL="228600" indent="-228600" algn="l" defTabSz="914400" rtl="0" eaLnBrk="1" latinLnBrk="1" hangingPunct="1">
+              <a:lnSpc>
+                <a:spcPct val="90000"/>
+              </a:lnSpc>
+              <a:spcBef>
+                <a:spcPts val="1000"/>
+              </a:spcBef>
+              <a:buFont typeface="Arial" panose="020B0604020202020204" pitchFamily="34" charset="0"/>
+              <a:buChar char="•"/>
+              <a:defRPr sz="2800" kern="1200">
+                <a:solidFill>
+                  <a:schemeClr val="tx1"/>
+                </a:solidFill>
+                <a:latin typeface="+mn-lt"/>
+                <a:ea typeface="+mn-ea"/>
+                <a:cs typeface="+mn-cs"/>
+              </a:defRPr>
+            </a:lvl1pPr>
+            <a:lvl2pPr marL="685800" indent="-228600" algn="l" defTabSz="914400" rtl="0" eaLnBrk="1" latinLnBrk="1" hangingPunct="1">
+              <a:lnSpc>
+                <a:spcPct val="90000"/>
+              </a:lnSpc>
+              <a:spcBef>
+                <a:spcPts val="500"/>
+              </a:spcBef>
+              <a:buFont typeface="Arial" panose="020B0604020202020204" pitchFamily="34" charset="0"/>
+              <a:buChar char="•"/>
+              <a:defRPr sz="2400" kern="1200">
+                <a:solidFill>
+                  <a:schemeClr val="tx1"/>
+                </a:solidFill>
+                <a:latin typeface="+mn-lt"/>
+                <a:ea typeface="+mn-ea"/>
+                <a:cs typeface="+mn-cs"/>
+              </a:defRPr>
+            </a:lvl2pPr>
+            <a:lvl3pPr marL="1143000" indent="-228600" algn="l" defTabSz="914400" rtl="0" eaLnBrk="1" latinLnBrk="1" hangingPunct="1">
+              <a:lnSpc>
+                <a:spcPct val="90000"/>
+              </a:lnSpc>
+              <a:spcBef>
+                <a:spcPts val="500"/>
+              </a:spcBef>
+              <a:buFont typeface="Arial" panose="020B0604020202020204" pitchFamily="34" charset="0"/>
+              <a:buChar char="•"/>
+              <a:defRPr sz="2000" kern="1200">
+                <a:solidFill>
+                  <a:schemeClr val="tx1"/>
+                </a:solidFill>
+                <a:latin typeface="+mn-lt"/>
+                <a:ea typeface="+mn-ea"/>
+                <a:cs typeface="+mn-cs"/>
+              </a:defRPr>
+            </a:lvl3pPr>
+            <a:lvl4pPr marL="1600200" indent="-228600" algn="l" defTabSz="914400" rtl="0" eaLnBrk="1" latinLnBrk="1" hangingPunct="1">
+              <a:lnSpc>
+                <a:spcPct val="90000"/>
+              </a:lnSpc>
+              <a:spcBef>
+                <a:spcPts val="500"/>
+              </a:spcBef>
+              <a:buFont typeface="Arial" panose="020B0604020202020204" pitchFamily="34" charset="0"/>
+              <a:buChar char="•"/>
+              <a:defRPr sz="1800" kern="1200">
+                <a:solidFill>
+                  <a:schemeClr val="tx1"/>
+                </a:solidFill>
+                <a:latin typeface="+mn-lt"/>
+                <a:ea typeface="+mn-ea"/>
+                <a:cs typeface="+mn-cs"/>
+              </a:defRPr>
+            </a:lvl4pPr>
+            <a:lvl5pPr marL="2057400" indent="-228600" algn="l" defTabSz="914400" rtl="0" eaLnBrk="1" latinLnBrk="1" hangingPunct="1">
+              <a:lnSpc>
+                <a:spcPct val="90000"/>
+              </a:lnSpc>
+              <a:spcBef>
+                <a:spcPts val="500"/>
+              </a:spcBef>
+              <a:buFont typeface="Arial" panose="020B0604020202020204" pitchFamily="34" charset="0"/>
+              <a:buChar char="•"/>
+              <a:defRPr sz="1800" kern="1200">
+                <a:solidFill>
+                  <a:schemeClr val="tx1"/>
+                </a:solidFill>
+                <a:latin typeface="+mn-lt"/>
+                <a:ea typeface="+mn-ea"/>
+                <a:cs typeface="+mn-cs"/>
+              </a:defRPr>
+            </a:lvl5pPr>
+            <a:lvl6pPr marL="2514600" indent="-228600" algn="l" defTabSz="914400" rtl="0" eaLnBrk="1" latinLnBrk="1" hangingPunct="1">
+              <a:lnSpc>
+                <a:spcPct val="90000"/>
+              </a:lnSpc>
+              <a:spcBef>
+                <a:spcPts val="500"/>
+              </a:spcBef>
+              <a:buFont typeface="Arial" panose="020B0604020202020204" pitchFamily="34" charset="0"/>
+              <a:buChar char="•"/>
+              <a:defRPr sz="1800" kern="1200">
+                <a:solidFill>
+                  <a:schemeClr val="tx1"/>
+                </a:solidFill>
+                <a:latin typeface="+mn-lt"/>
+                <a:ea typeface="+mn-ea"/>
+                <a:cs typeface="+mn-cs"/>
+              </a:defRPr>
+            </a:lvl6pPr>
+            <a:lvl7pPr marL="2971800" indent="-228600" algn="l" defTabSz="914400" rtl="0" eaLnBrk="1" latinLnBrk="1" hangingPunct="1">
+              <a:lnSpc>
+                <a:spcPct val="90000"/>
+              </a:lnSpc>
+              <a:spcBef>
+                <a:spcPts val="500"/>
+              </a:spcBef>
+              <a:buFont typeface="Arial" panose="020B0604020202020204" pitchFamily="34" charset="0"/>
+              <a:buChar char="•"/>
+              <a:defRPr sz="1800" kern="1200">
+                <a:solidFill>
+                  <a:schemeClr val="tx1"/>
+                </a:solidFill>
+                <a:latin typeface="+mn-lt"/>
+                <a:ea typeface="+mn-ea"/>
+                <a:cs typeface="+mn-cs"/>
+              </a:defRPr>
+            </a:lvl7pPr>
+            <a:lvl8pPr marL="3429000" indent="-228600" algn="l" defTabSz="914400" rtl="0" eaLnBrk="1" latinLnBrk="1" hangingPunct="1">
+              <a:lnSpc>
+                <a:spcPct val="90000"/>
+              </a:lnSpc>
+              <a:spcBef>
+                <a:spcPts val="500"/>
+              </a:spcBef>
+              <a:buFont typeface="Arial" panose="020B0604020202020204" pitchFamily="34" charset="0"/>
+              <a:buChar char="•"/>
+              <a:defRPr sz="1800" kern="1200">
+                <a:solidFill>
+                  <a:schemeClr val="tx1"/>
+                </a:solidFill>
+                <a:latin typeface="+mn-lt"/>
+                <a:ea typeface="+mn-ea"/>
+                <a:cs typeface="+mn-cs"/>
+              </a:defRPr>
+            </a:lvl8pPr>
+            <a:lvl9pPr marL="3886200" indent="-228600" algn="l" defTabSz="914400" rtl="0" eaLnBrk="1" latinLnBrk="1" hangingPunct="1">
+              <a:lnSpc>
+                <a:spcPct val="90000"/>
+              </a:lnSpc>
+              <a:spcBef>
+                <a:spcPts val="500"/>
+              </a:spcBef>
+              <a:buFont typeface="Arial" panose="020B0604020202020204" pitchFamily="34" charset="0"/>
+              <a:buChar char="•"/>
+              <a:defRPr sz="1800" kern="1200">
+                <a:solidFill>
+                  <a:schemeClr val="tx1"/>
+                </a:solidFill>
+                <a:latin typeface="+mn-lt"/>
+                <a:ea typeface="+mn-ea"/>
+                <a:cs typeface="+mn-cs"/>
+              </a:defRPr>
+            </a:lvl9pPr>
+          </a:lstStyle>
+          <a:p>
+            <a:pPr marL="457200" lvl="1" indent="0">
+              <a:buFont typeface="Arial" panose="020B0604020202020204" pitchFamily="34" charset="0"/>
+              <a:buNone/>
+            </a:pPr>
+            <a:endParaRPr lang="en-US" altLang="ko-KR" dirty="0">
+              <a:solidFill>
+                <a:srgbClr val="212529"/>
+              </a:solidFill>
+              <a:latin typeface="+mn-ea"/>
+            </a:endParaRPr>
+          </a:p>
+          <a:p>
+            <a:pPr marL="457200" lvl="1" indent="0">
+              <a:buFont typeface="Arial" panose="020B0604020202020204" pitchFamily="34" charset="0"/>
+              <a:buNone/>
+            </a:pPr>
+            <a:endParaRPr lang="en-US" altLang="ko-KR" dirty="0">
+              <a:solidFill>
+                <a:srgbClr val="212529"/>
+              </a:solidFill>
+              <a:latin typeface="+mn-ea"/>
+            </a:endParaRPr>
+          </a:p>
+          <a:p>
+            <a:r>
+              <a:rPr lang="en-US" altLang="ko-KR" b="1" dirty="0">
+                <a:solidFill>
+                  <a:srgbClr val="212529"/>
+                </a:solidFill>
+                <a:latin typeface="+mn-ea"/>
+              </a:rPr>
+              <a:t>[</a:t>
+            </a:r>
+            <a:r>
+              <a:rPr lang="ko-KR" altLang="en-US" b="1" dirty="0" err="1">
+                <a:solidFill>
+                  <a:srgbClr val="212529"/>
+                </a:solidFill>
+                <a:latin typeface="+mn-ea"/>
+              </a:rPr>
+              <a:t>코딩온</a:t>
+            </a:r>
+            <a:r>
+              <a:rPr lang="en-US" altLang="ko-KR" b="1" dirty="0">
+                <a:solidFill>
+                  <a:srgbClr val="212529"/>
+                </a:solidFill>
+                <a:latin typeface="+mn-ea"/>
+              </a:rPr>
+              <a:t>] React </a:t>
+            </a:r>
+            <a:r>
+              <a:rPr lang="ko-KR" altLang="en-US" b="1" dirty="0">
+                <a:solidFill>
+                  <a:srgbClr val="212529"/>
+                </a:solidFill>
+                <a:latin typeface="+mn-ea"/>
+              </a:rPr>
+              <a:t>실습 </a:t>
+            </a:r>
+            <a:r>
+              <a:rPr lang="ko-KR" altLang="en-US" dirty="0">
+                <a:solidFill>
+                  <a:srgbClr val="212529"/>
+                </a:solidFill>
+                <a:latin typeface="+mn-ea"/>
+              </a:rPr>
+              <a:t>강의 클릭</a:t>
+            </a:r>
+            <a:r>
+              <a:rPr lang="en-US" altLang="ko-KR" dirty="0">
+                <a:solidFill>
+                  <a:srgbClr val="212529"/>
+                </a:solidFill>
+                <a:latin typeface="+mn-ea"/>
+              </a:rPr>
+              <a:t/>
+            </a:r>
+            <a:br>
+              <a:rPr lang="en-US" altLang="ko-KR" dirty="0">
+                <a:solidFill>
+                  <a:srgbClr val="212529"/>
+                </a:solidFill>
+                <a:latin typeface="+mn-ea"/>
+              </a:rPr>
+            </a:br>
+            <a:endParaRPr lang="en-US" altLang="ko-KR" dirty="0">
+              <a:solidFill>
+                <a:srgbClr val="212529"/>
+              </a:solidFill>
+              <a:latin typeface="+mn-ea"/>
+            </a:endParaRPr>
+          </a:p>
+          <a:p>
+            <a:pPr lvl="1"/>
+            <a:r>
+              <a:rPr lang="ko-KR" altLang="en-US" sz="2800" b="1" dirty="0">
+                <a:solidFill>
+                  <a:srgbClr val="212529"/>
+                </a:solidFill>
+                <a:latin typeface="+mn-ea"/>
+              </a:rPr>
+              <a:t>➡ </a:t>
+            </a:r>
+            <a:r>
+              <a:rPr lang="en-US" altLang="ko-KR" sz="2800" b="1" dirty="0" smtClean="0">
+                <a:solidFill>
+                  <a:srgbClr val="212529"/>
+                </a:solidFill>
+                <a:latin typeface="+mn-ea"/>
+              </a:rPr>
+              <a:t>[</a:t>
+            </a:r>
+            <a:r>
+              <a:rPr lang="ko-KR" altLang="en-US" sz="2800" b="1" dirty="0" smtClean="0">
+                <a:solidFill>
+                  <a:srgbClr val="212529"/>
+                </a:solidFill>
+                <a:latin typeface="+mn-ea"/>
+              </a:rPr>
+              <a:t>이벤트 핸들링 </a:t>
+            </a:r>
+            <a:r>
+              <a:rPr lang="ko-KR" altLang="en-US" sz="2800" b="1" dirty="0">
+                <a:solidFill>
+                  <a:srgbClr val="212529"/>
+                </a:solidFill>
+                <a:latin typeface="+mn-ea"/>
+              </a:rPr>
+              <a:t>실습</a:t>
+            </a:r>
+            <a:r>
+              <a:rPr lang="en-US" altLang="ko-KR" sz="2800" b="1" dirty="0">
+                <a:solidFill>
+                  <a:srgbClr val="212529"/>
+                </a:solidFill>
+                <a:latin typeface="+mn-ea"/>
+              </a:rPr>
+              <a:t>]</a:t>
+            </a:r>
+            <a:r>
+              <a:rPr lang="en-US" altLang="ko-KR" sz="2800" dirty="0">
+                <a:solidFill>
+                  <a:srgbClr val="212529"/>
+                </a:solidFill>
+                <a:latin typeface="+mn-ea"/>
+              </a:rPr>
+              <a:t> </a:t>
+            </a:r>
+            <a:r>
+              <a:rPr lang="ko-KR" altLang="en-US" sz="2800" dirty="0">
+                <a:solidFill>
+                  <a:srgbClr val="212529"/>
+                </a:solidFill>
+                <a:latin typeface="+mn-ea"/>
+              </a:rPr>
+              <a:t>커리큘럼 클릭</a:t>
+            </a:r>
+            <a:endParaRPr lang="en-US" altLang="ko-KR" sz="2800" dirty="0">
+              <a:solidFill>
+                <a:srgbClr val="212529"/>
+              </a:solidFill>
+              <a:latin typeface="+mn-ea"/>
+            </a:endParaRPr>
+          </a:p>
+          <a:p>
+            <a:pPr lvl="1"/>
+            <a:r>
+              <a:rPr lang="ko-KR" altLang="en-US" sz="2800" b="1" dirty="0">
+                <a:solidFill>
+                  <a:srgbClr val="212529"/>
+                </a:solidFill>
+                <a:latin typeface="+mn-ea"/>
+              </a:rPr>
+              <a:t>➡ </a:t>
+            </a:r>
+            <a:r>
+              <a:rPr lang="en-US" altLang="ko-KR" sz="2800" b="1" dirty="0">
+                <a:solidFill>
+                  <a:schemeClr val="accent1"/>
+                </a:solidFill>
+                <a:latin typeface="+mn-ea"/>
+              </a:rPr>
+              <a:t>[</a:t>
+            </a:r>
+            <a:r>
+              <a:rPr lang="en-US" altLang="ko-KR" sz="2800" b="1" dirty="0" smtClean="0">
+                <a:solidFill>
+                  <a:schemeClr val="accent1"/>
+                </a:solidFill>
+                <a:latin typeface="+mn-ea"/>
+              </a:rPr>
+              <a:t>1~3</a:t>
+            </a:r>
+            <a:r>
+              <a:rPr lang="ko-KR" altLang="en-US" sz="2800" b="1" dirty="0" smtClean="0">
+                <a:solidFill>
+                  <a:schemeClr val="accent1"/>
+                </a:solidFill>
+                <a:latin typeface="+mn-ea"/>
+              </a:rPr>
+              <a:t>번 </a:t>
+            </a:r>
+            <a:r>
+              <a:rPr lang="ko-KR" altLang="en-US" sz="2800" b="1" dirty="0">
+                <a:solidFill>
+                  <a:schemeClr val="accent1"/>
+                </a:solidFill>
+                <a:latin typeface="+mn-ea"/>
+              </a:rPr>
+              <a:t>문제</a:t>
+            </a:r>
+            <a:r>
+              <a:rPr lang="en-US" altLang="ko-KR" sz="2800" b="1" dirty="0">
+                <a:solidFill>
+                  <a:schemeClr val="accent1"/>
+                </a:solidFill>
+                <a:latin typeface="+mn-ea"/>
+              </a:rPr>
+              <a:t>]</a:t>
+            </a:r>
+            <a:r>
+              <a:rPr lang="en-US" altLang="ko-KR" sz="2800" dirty="0">
+                <a:solidFill>
+                  <a:schemeClr val="accent1"/>
+                </a:solidFill>
+                <a:latin typeface="+mn-ea"/>
+              </a:rPr>
+              <a:t> </a:t>
+            </a:r>
+            <a:r>
+              <a:rPr lang="ko-KR" altLang="en-US" sz="2800" dirty="0">
+                <a:solidFill>
+                  <a:srgbClr val="212529"/>
+                </a:solidFill>
+                <a:latin typeface="+mn-ea"/>
+              </a:rPr>
+              <a:t> 진행</a:t>
+            </a:r>
+          </a:p>
+        </p:txBody>
+      </p:sp>
+    </p:spTree>
+    <p:extLst>
+      <p:ext uri="{BB962C8B-B14F-4D97-AF65-F5344CB8AC3E}">
+        <p14:creationId xmlns:p14="http://schemas.microsoft.com/office/powerpoint/2010/main" val="2852773060"/>
+      </p:ext>
+    </p:extLst>
+  </p:cSld>
+  <p:clrMapOvr>
+    <a:masterClrMapping/>
+  </p:clrMapOvr>
+</p:sld>
+</file>
+
 <file path=ppt/slides/slide2.xml><?xml version="1.0" encoding="utf-8"?>
 <p:sld xmlns:a="http://schemas.openxmlformats.org/drawingml/2006/main" xmlns:r="http://schemas.openxmlformats.org/officeDocument/2006/relationships" xmlns:p="http://schemas.openxmlformats.org/presentationml/2006/main">
   <p:cSld>
@@ -6777,7 +6547,7 @@
           <a:p>
             <a:fld id="{0E19CB95-6D28-40F1-9DA3-1BAC5D4B5B4F}" type="datetime6">
               <a:rPr lang="ko-KR" altLang="en-US" smtClean="0"/>
-              <a:t>2023년 9월</a:t>
+              <a:t>2024년 8월</a:t>
             </a:fld>
             <a:endParaRPr lang="ko-KR" altLang="en-US"/>
           </a:p>
@@ -6861,24 +6631,44 @@
       </p:grpSpPr>
       <p:sp>
         <p:nvSpPr>
-          <p:cNvPr id="2" name="제목 1">
-            <a:extLst>
-              <a:ext uri="{FF2B5EF4-FFF2-40B4-BE49-F238E27FC236}">
-                <a16:creationId xmlns:a16="http://schemas.microsoft.com/office/drawing/2014/main" id="{E11A36B4-A46B-4E8E-E378-EA3A6D84A2C6}"/>
-              </a:ext>
-            </a:extLst>
-          </p:cNvPr>
-          <p:cNvSpPr>
-            <a:spLocks noGrp="1"/>
-          </p:cNvSpPr>
-          <p:nvPr>
-            <p:ph type="title"/>
-          </p:nvPr>
-        </p:nvSpPr>
-        <p:spPr/>
-        <p:txBody>
-          <a:bodyPr/>
-          <a:lstStyle/>
+          <p:cNvPr id="3" name="내용 개체 틀 2">
+            <a:extLst>
+              <a:ext uri="{FF2B5EF4-FFF2-40B4-BE49-F238E27FC236}">
+                <a16:creationId xmlns:a16="http://schemas.microsoft.com/office/drawing/2014/main" id="{DA4637DE-CA85-54BD-9BB5-8A7EF0E6FC9C}"/>
+              </a:ext>
+            </a:extLst>
+          </p:cNvPr>
+          <p:cNvSpPr>
+            <a:spLocks noGrp="1"/>
+          </p:cNvSpPr>
+          <p:nvPr>
+            <p:ph idx="1"/>
+          </p:nvPr>
+        </p:nvSpPr>
+        <p:spPr/>
+        <p:txBody>
+          <a:bodyPr/>
+          <a:lstStyle/>
+          <a:p>
+            <a:r>
+              <a:rPr lang="en-US" altLang="ko-KR" dirty="0"/>
+              <a:t>HTML</a:t>
+            </a:r>
+            <a:r>
+              <a:rPr lang="ko-KR" altLang="en-US" dirty="0"/>
+              <a:t> </a:t>
+            </a:r>
+            <a:r>
+              <a:rPr lang="en-US" altLang="ko-KR" dirty="0"/>
+              <a:t>Event</a:t>
+            </a:r>
+          </a:p>
+          <a:p>
+            <a:endParaRPr lang="en-US" altLang="ko-KR" dirty="0"/>
+          </a:p>
+          <a:p>
+            <a:endParaRPr lang="en-US" altLang="ko-KR" dirty="0"/>
+          </a:p>
           <a:p>
             <a:r>
               <a:rPr lang="en-US" altLang="ko-KR" dirty="0"/>
@@ -6886,7 +6676,7 @@
             </a:r>
             <a:r>
               <a:rPr lang="ko-KR" altLang="en-US" dirty="0"/>
-              <a:t>의 </a:t>
+              <a:t> </a:t>
             </a:r>
             <a:r>
               <a:rPr lang="en-US" altLang="ko-KR" dirty="0"/>
@@ -6919,7 +6709,7 @@
           <a:p>
             <a:fld id="{7AFDD245-6FC9-4BCD-9848-9FACA08CE32D}" type="datetime6">
               <a:rPr lang="ko-KR" altLang="en-US" smtClean="0"/>
-              <a:t>2023년 9월</a:t>
+              <a:t>2024년 8월</a:t>
             </a:fld>
             <a:endParaRPr lang="ko-KR" altLang="en-US"/>
           </a:p>
@@ -6956,44 +6746,24 @@
       </p:sp>
       <p:sp>
         <p:nvSpPr>
-          <p:cNvPr id="3" name="내용 개체 틀 2">
-            <a:extLst>
-              <a:ext uri="{FF2B5EF4-FFF2-40B4-BE49-F238E27FC236}">
-                <a16:creationId xmlns:a16="http://schemas.microsoft.com/office/drawing/2014/main" id="{DA4637DE-CA85-54BD-9BB5-8A7EF0E6FC9C}"/>
-              </a:ext>
-            </a:extLst>
-          </p:cNvPr>
-          <p:cNvSpPr>
-            <a:spLocks noGrp="1"/>
-          </p:cNvSpPr>
-          <p:nvPr>
-            <p:ph idx="1"/>
-          </p:nvPr>
-        </p:nvSpPr>
-        <p:spPr/>
-        <p:txBody>
-          <a:bodyPr/>
-          <a:lstStyle/>
-          <a:p>
-            <a:r>
-              <a:rPr lang="en-US" altLang="ko-KR" dirty="0"/>
-              <a:t>HTML</a:t>
-            </a:r>
-            <a:r>
-              <a:rPr lang="ko-KR" altLang="en-US" dirty="0"/>
-              <a:t> </a:t>
-            </a:r>
-            <a:r>
-              <a:rPr lang="en-US" altLang="ko-KR" dirty="0"/>
-              <a:t>Event</a:t>
-            </a:r>
-          </a:p>
-          <a:p>
-            <a:endParaRPr lang="en-US" altLang="ko-KR" dirty="0"/>
-          </a:p>
-          <a:p>
-            <a:endParaRPr lang="en-US" altLang="ko-KR" dirty="0"/>
-          </a:p>
+          <p:cNvPr id="2" name="제목 1">
+            <a:extLst>
+              <a:ext uri="{FF2B5EF4-FFF2-40B4-BE49-F238E27FC236}">
+                <a16:creationId xmlns:a16="http://schemas.microsoft.com/office/drawing/2014/main" id="{E11A36B4-A46B-4E8E-E378-EA3A6D84A2C6}"/>
+              </a:ext>
+            </a:extLst>
+          </p:cNvPr>
+          <p:cNvSpPr>
+            <a:spLocks noGrp="1"/>
+          </p:cNvSpPr>
+          <p:nvPr>
+            <p:ph type="title"/>
+          </p:nvPr>
+        </p:nvSpPr>
+        <p:spPr/>
+        <p:txBody>
+          <a:bodyPr/>
+          <a:lstStyle/>
           <a:p>
             <a:r>
               <a:rPr lang="en-US" altLang="ko-KR" dirty="0"/>
@@ -7001,7 +6771,7 @@
             </a:r>
             <a:r>
               <a:rPr lang="ko-KR" altLang="en-US" dirty="0"/>
-              <a:t> </a:t>
+              <a:t>의 </a:t>
             </a:r>
             <a:r>
               <a:rPr lang="en-US" altLang="ko-KR" dirty="0"/>
@@ -7103,104 +6873,6 @@
       </p:grpSpPr>
       <p:sp>
         <p:nvSpPr>
-          <p:cNvPr id="2" name="제목 1">
-            <a:extLst>
-              <a:ext uri="{FF2B5EF4-FFF2-40B4-BE49-F238E27FC236}">
-                <a16:creationId xmlns:a16="http://schemas.microsoft.com/office/drawing/2014/main" id="{7D5DA34B-BD5E-6F7D-62FD-07DB62C80384}"/>
-              </a:ext>
-            </a:extLst>
-          </p:cNvPr>
-          <p:cNvSpPr>
-            <a:spLocks noGrp="1"/>
-          </p:cNvSpPr>
-          <p:nvPr>
-            <p:ph type="title"/>
-          </p:nvPr>
-        </p:nvSpPr>
-        <p:spPr/>
-        <p:txBody>
-          <a:bodyPr/>
-          <a:lstStyle/>
-          <a:p>
-            <a:r>
-              <a:rPr lang="en-US" altLang="ko-KR" dirty="0"/>
-              <a:t>React</a:t>
-            </a:r>
-            <a:r>
-              <a:rPr lang="ko-KR" altLang="en-US" dirty="0"/>
-              <a:t>의 </a:t>
-            </a:r>
-            <a:r>
-              <a:rPr lang="en-US" altLang="ko-KR" dirty="0"/>
-              <a:t>Event </a:t>
-            </a:r>
-            <a:r>
-              <a:rPr lang="ko-KR" altLang="en-US" dirty="0"/>
-              <a:t>주의점</a:t>
-            </a:r>
-          </a:p>
-        </p:txBody>
-      </p:sp>
-      <p:sp>
-        <p:nvSpPr>
-          <p:cNvPr id="4" name="날짜 개체 틀 3">
-            <a:extLst>
-              <a:ext uri="{FF2B5EF4-FFF2-40B4-BE49-F238E27FC236}">
-                <a16:creationId xmlns:a16="http://schemas.microsoft.com/office/drawing/2014/main" id="{749C73BA-05AB-CFC8-9436-46F8C6801E1F}"/>
-              </a:ext>
-            </a:extLst>
-          </p:cNvPr>
-          <p:cNvSpPr>
-            <a:spLocks noGrp="1"/>
-          </p:cNvSpPr>
-          <p:nvPr>
-            <p:ph type="dt" sz="half" idx="10"/>
-          </p:nvPr>
-        </p:nvSpPr>
-        <p:spPr/>
-        <p:txBody>
-          <a:bodyPr/>
-          <a:lstStyle/>
-          <a:p>
-            <a:fld id="{7C4FB1EE-E7B1-4C9E-8657-7267753DFD72}" type="datetime6">
-              <a:rPr lang="ko-KR" altLang="en-US" smtClean="0"/>
-              <a:t>2023년 9월</a:t>
-            </a:fld>
-            <a:endParaRPr lang="ko-KR" altLang="en-US"/>
-          </a:p>
-        </p:txBody>
-      </p:sp>
-      <p:sp>
-        <p:nvSpPr>
-          <p:cNvPr id="5" name="슬라이드 번호 개체 틀 4">
-            <a:extLst>
-              <a:ext uri="{FF2B5EF4-FFF2-40B4-BE49-F238E27FC236}">
-                <a16:creationId xmlns:a16="http://schemas.microsoft.com/office/drawing/2014/main" id="{4B043475-D0E2-D9DA-2F0A-3B596D3EC280}"/>
-              </a:ext>
-            </a:extLst>
-          </p:cNvPr>
-          <p:cNvSpPr>
-            <a:spLocks noGrp="1"/>
-          </p:cNvSpPr>
-          <p:nvPr>
-            <p:ph type="sldNum" sz="quarter" idx="12"/>
-          </p:nvPr>
-        </p:nvSpPr>
-        <p:spPr/>
-        <p:txBody>
-          <a:bodyPr/>
-          <a:lstStyle/>
-          <a:p>
-            <a:fld id="{083A2CE0-18CD-4102-B738-4ACFF9E68BA4}" type="slidenum">
-              <a:rPr lang="ko-KR" altLang="en-US" smtClean="0"/>
-              <a:t>4</a:t>
-            </a:fld>
-            <a:endParaRPr lang="ko-KR" altLang="en-US"/>
-          </a:p>
-        </p:txBody>
-      </p:sp>
-      <p:sp>
-        <p:nvSpPr>
           <p:cNvPr id="3" name="내용 개체 틀 2">
             <a:extLst>
               <a:ext uri="{FF2B5EF4-FFF2-40B4-BE49-F238E27FC236}">
@@ -7218,7 +6890,7 @@
         <p:spPr/>
         <p:txBody>
           <a:bodyPr>
-            <a:normAutofit lnSpcReduction="10000"/>
+            <a:normAutofit fontScale="92500"/>
           </a:bodyPr>
           <a:lstStyle/>
           <a:p>
@@ -7367,6 +7039,104 @@
               <a:t>이벤트를 설정 가능</a:t>
             </a:r>
             <a:endParaRPr lang="en-US" altLang="ko-KR" dirty="0"/>
+          </a:p>
+        </p:txBody>
+      </p:sp>
+      <p:sp>
+        <p:nvSpPr>
+          <p:cNvPr id="4" name="날짜 개체 틀 3">
+            <a:extLst>
+              <a:ext uri="{FF2B5EF4-FFF2-40B4-BE49-F238E27FC236}">
+                <a16:creationId xmlns:a16="http://schemas.microsoft.com/office/drawing/2014/main" id="{749C73BA-05AB-CFC8-9436-46F8C6801E1F}"/>
+              </a:ext>
+            </a:extLst>
+          </p:cNvPr>
+          <p:cNvSpPr>
+            <a:spLocks noGrp="1"/>
+          </p:cNvSpPr>
+          <p:nvPr>
+            <p:ph type="dt" sz="half" idx="10"/>
+          </p:nvPr>
+        </p:nvSpPr>
+        <p:spPr/>
+        <p:txBody>
+          <a:bodyPr/>
+          <a:lstStyle/>
+          <a:p>
+            <a:fld id="{7C4FB1EE-E7B1-4C9E-8657-7267753DFD72}" type="datetime6">
+              <a:rPr lang="ko-KR" altLang="en-US" smtClean="0"/>
+              <a:t>2024년 8월</a:t>
+            </a:fld>
+            <a:endParaRPr lang="ko-KR" altLang="en-US"/>
+          </a:p>
+        </p:txBody>
+      </p:sp>
+      <p:sp>
+        <p:nvSpPr>
+          <p:cNvPr id="5" name="슬라이드 번호 개체 틀 4">
+            <a:extLst>
+              <a:ext uri="{FF2B5EF4-FFF2-40B4-BE49-F238E27FC236}">
+                <a16:creationId xmlns:a16="http://schemas.microsoft.com/office/drawing/2014/main" id="{4B043475-D0E2-D9DA-2F0A-3B596D3EC280}"/>
+              </a:ext>
+            </a:extLst>
+          </p:cNvPr>
+          <p:cNvSpPr>
+            <a:spLocks noGrp="1"/>
+          </p:cNvSpPr>
+          <p:nvPr>
+            <p:ph type="sldNum" sz="quarter" idx="12"/>
+          </p:nvPr>
+        </p:nvSpPr>
+        <p:spPr/>
+        <p:txBody>
+          <a:bodyPr/>
+          <a:lstStyle/>
+          <a:p>
+            <a:fld id="{083A2CE0-18CD-4102-B738-4ACFF9E68BA4}" type="slidenum">
+              <a:rPr lang="ko-KR" altLang="en-US" smtClean="0"/>
+              <a:t>4</a:t>
+            </a:fld>
+            <a:endParaRPr lang="ko-KR" altLang="en-US"/>
+          </a:p>
+        </p:txBody>
+      </p:sp>
+      <p:sp>
+        <p:nvSpPr>
+          <p:cNvPr id="2" name="제목 1">
+            <a:extLst>
+              <a:ext uri="{FF2B5EF4-FFF2-40B4-BE49-F238E27FC236}">
+                <a16:creationId xmlns:a16="http://schemas.microsoft.com/office/drawing/2014/main" id="{7D5DA34B-BD5E-6F7D-62FD-07DB62C80384}"/>
+              </a:ext>
+            </a:extLst>
+          </p:cNvPr>
+          <p:cNvSpPr>
+            <a:spLocks noGrp="1"/>
+          </p:cNvSpPr>
+          <p:nvPr>
+            <p:ph type="title"/>
+          </p:nvPr>
+        </p:nvSpPr>
+        <p:spPr/>
+        <p:txBody>
+          <a:bodyPr/>
+          <a:lstStyle/>
+          <a:p>
+            <a:r>
+              <a:rPr lang="en-US" altLang="ko-KR" dirty="0"/>
+              <a:t>React</a:t>
+            </a:r>
+            <a:r>
+              <a:rPr lang="ko-KR" altLang="en-US" dirty="0"/>
+              <a:t>의 </a:t>
+            </a:r>
+            <a:r>
+              <a:rPr lang="en-US" altLang="ko-KR" dirty="0"/>
+              <a:t>Event </a:t>
+            </a:r>
+            <a:r>
+              <a:rPr lang="ko-KR" altLang="en-US" dirty="0"/>
+              <a:t>주의점</a:t>
+            </a:r>
           </a:p>
         </p:txBody>
       </p:sp>
@@ -7572,96 +7342,6 @@
       </p:grpSpPr>
       <p:sp>
         <p:nvSpPr>
-          <p:cNvPr id="2" name="제목 1">
-            <a:extLst>
-              <a:ext uri="{FF2B5EF4-FFF2-40B4-BE49-F238E27FC236}">
-                <a16:creationId xmlns:a16="http://schemas.microsoft.com/office/drawing/2014/main" id="{AA93C0E8-B826-7B4F-3A0F-2CFD43024A8F}"/>
-              </a:ext>
-            </a:extLst>
-          </p:cNvPr>
-          <p:cNvSpPr>
-            <a:spLocks noGrp="1"/>
-          </p:cNvSpPr>
-          <p:nvPr>
-            <p:ph type="title"/>
-          </p:nvPr>
-        </p:nvSpPr>
-        <p:spPr/>
-        <p:txBody>
-          <a:bodyPr/>
-          <a:lstStyle/>
-          <a:p>
-            <a:r>
-              <a:rPr lang="en-US" altLang="ko-KR" dirty="0"/>
-              <a:t>React </a:t>
-            </a:r>
-            <a:r>
-              <a:rPr lang="ko-KR" altLang="en-US" dirty="0"/>
-              <a:t>합성 이벤트</a:t>
-            </a:r>
-          </a:p>
-        </p:txBody>
-      </p:sp>
-      <p:sp>
-        <p:nvSpPr>
-          <p:cNvPr id="4" name="날짜 개체 틀 3">
-            <a:extLst>
-              <a:ext uri="{FF2B5EF4-FFF2-40B4-BE49-F238E27FC236}">
-                <a16:creationId xmlns:a16="http://schemas.microsoft.com/office/drawing/2014/main" id="{B769830B-B1D0-1DF5-3C05-863D21BA2602}"/>
-              </a:ext>
-            </a:extLst>
-          </p:cNvPr>
-          <p:cNvSpPr>
-            <a:spLocks noGrp="1"/>
-          </p:cNvSpPr>
-          <p:nvPr>
-            <p:ph type="dt" sz="half" idx="10"/>
-          </p:nvPr>
-        </p:nvSpPr>
-        <p:spPr/>
-        <p:txBody>
-          <a:bodyPr/>
-          <a:lstStyle/>
-          <a:p>
-            <a:fld id="{5704CCD4-02AF-4FAB-9662-016ADDF90A58}" type="datetime6">
-              <a:rPr lang="ko-KR" altLang="en-US" smtClean="0"/>
-              <a:t>2023년 9월</a:t>
-            </a:fld>
-            <a:endParaRPr lang="ko-KR" altLang="en-US"/>
-          </a:p>
-        </p:txBody>
-      </p:sp>
-      <p:sp>
-        <p:nvSpPr>
-          <p:cNvPr id="5" name="슬라이드 번호 개체 틀 4">
-            <a:extLst>
-              <a:ext uri="{FF2B5EF4-FFF2-40B4-BE49-F238E27FC236}">
-                <a16:creationId xmlns:a16="http://schemas.microsoft.com/office/drawing/2014/main" id="{8E1E4BFD-39B7-91D3-BDA9-C844CAE97729}"/>
-              </a:ext>
-            </a:extLst>
-          </p:cNvPr>
-          <p:cNvSpPr>
-            <a:spLocks noGrp="1"/>
-          </p:cNvSpPr>
-          <p:nvPr>
-            <p:ph type="sldNum" sz="quarter" idx="12"/>
-          </p:nvPr>
-        </p:nvSpPr>
-        <p:spPr/>
-        <p:txBody>
-          <a:bodyPr/>
-          <a:lstStyle/>
-          <a:p>
-            <a:fld id="{083A2CE0-18CD-4102-B738-4ACFF9E68BA4}" type="slidenum">
-              <a:rPr lang="ko-KR" altLang="en-US" smtClean="0"/>
-              <a:t>5</a:t>
-            </a:fld>
-            <a:endParaRPr lang="ko-KR" altLang="en-US" dirty="0"/>
-          </a:p>
-        </p:txBody>
-      </p:sp>
-      <p:sp>
-        <p:nvSpPr>
           <p:cNvPr id="3" name="내용 개체 틀 2">
             <a:extLst>
               <a:ext uri="{FF2B5EF4-FFF2-40B4-BE49-F238E27FC236}">
@@ -7735,6 +7415,96 @@
       </p:sp>
       <p:sp>
         <p:nvSpPr>
+          <p:cNvPr id="4" name="날짜 개체 틀 3">
+            <a:extLst>
+              <a:ext uri="{FF2B5EF4-FFF2-40B4-BE49-F238E27FC236}">
+                <a16:creationId xmlns:a16="http://schemas.microsoft.com/office/drawing/2014/main" id="{B769830B-B1D0-1DF5-3C05-863D21BA2602}"/>
+              </a:ext>
+            </a:extLst>
+          </p:cNvPr>
+          <p:cNvSpPr>
+            <a:spLocks noGrp="1"/>
+          </p:cNvSpPr>
+          <p:nvPr>
+            <p:ph type="dt" sz="half" idx="10"/>
+          </p:nvPr>
+        </p:nvSpPr>
+        <p:spPr/>
+        <p:txBody>
+          <a:bodyPr/>
+          <a:lstStyle/>
+          <a:p>
+            <a:fld id="{5704CCD4-02AF-4FAB-9662-016ADDF90A58}" type="datetime6">
+              <a:rPr lang="ko-KR" altLang="en-US" smtClean="0"/>
+              <a:t>2024년 8월</a:t>
+            </a:fld>
+            <a:endParaRPr lang="ko-KR" altLang="en-US"/>
+          </a:p>
+        </p:txBody>
+      </p:sp>
+      <p:sp>
+        <p:nvSpPr>
+          <p:cNvPr id="5" name="슬라이드 번호 개체 틀 4">
+            <a:extLst>
+              <a:ext uri="{FF2B5EF4-FFF2-40B4-BE49-F238E27FC236}">
+                <a16:creationId xmlns:a16="http://schemas.microsoft.com/office/drawing/2014/main" id="{8E1E4BFD-39B7-91D3-BDA9-C844CAE97729}"/>
+              </a:ext>
+            </a:extLst>
+          </p:cNvPr>
+          <p:cNvSpPr>
+            <a:spLocks noGrp="1"/>
+          </p:cNvSpPr>
+          <p:nvPr>
+            <p:ph type="sldNum" sz="quarter" idx="12"/>
+          </p:nvPr>
+        </p:nvSpPr>
+        <p:spPr/>
+        <p:txBody>
+          <a:bodyPr/>
+          <a:lstStyle/>
+          <a:p>
+            <a:fld id="{083A2CE0-18CD-4102-B738-4ACFF9E68BA4}" type="slidenum">
+              <a:rPr lang="ko-KR" altLang="en-US" smtClean="0"/>
+              <a:t>5</a:t>
+            </a:fld>
+            <a:endParaRPr lang="ko-KR" altLang="en-US" dirty="0"/>
+          </a:p>
+        </p:txBody>
+      </p:sp>
+      <p:sp>
+        <p:nvSpPr>
+          <p:cNvPr id="2" name="제목 1">
+            <a:extLst>
+              <a:ext uri="{FF2B5EF4-FFF2-40B4-BE49-F238E27FC236}">
+                <a16:creationId xmlns:a16="http://schemas.microsoft.com/office/drawing/2014/main" id="{AA93C0E8-B826-7B4F-3A0F-2CFD43024A8F}"/>
+              </a:ext>
+            </a:extLst>
+          </p:cNvPr>
+          <p:cNvSpPr>
+            <a:spLocks noGrp="1"/>
+          </p:cNvSpPr>
+          <p:nvPr>
+            <p:ph type="title"/>
+          </p:nvPr>
+        </p:nvSpPr>
+        <p:spPr/>
+        <p:txBody>
+          <a:bodyPr/>
+          <a:lstStyle/>
+          <a:p>
+            <a:r>
+              <a:rPr lang="en-US" altLang="ko-KR" dirty="0"/>
+              <a:t>React </a:t>
+            </a:r>
+            <a:r>
+              <a:rPr lang="ko-KR" altLang="en-US" dirty="0"/>
+              <a:t>합성 이벤트</a:t>
+            </a:r>
+          </a:p>
+        </p:txBody>
+      </p:sp>
+      <p:sp>
+        <p:nvSpPr>
           <p:cNvPr id="6" name="TextBox 5">
             <a:extLst>
               <a:ext uri="{FF2B5EF4-FFF2-40B4-BE49-F238E27FC236}">
@@ -7747,8 +7517,8 @@
         </p:nvSpPr>
         <p:spPr>
           <a:xfrm>
-            <a:off x="5799481" y="2673350"/>
-            <a:ext cx="5167377" cy="369332"/>
+            <a:off x="5315387" y="2683428"/>
+            <a:ext cx="5851051" cy="369332"/>
           </a:xfrm>
           <a:prstGeom prst="rect">
             <a:avLst/>
@@ -7774,7 +7544,7 @@
           </a:fontRef>
         </p:style>
         <p:txBody>
-          <a:bodyPr wrap="none" rtlCol="0" anchor="ctr">
+          <a:bodyPr wrap="square" rtlCol="0" anchor="ctr">
             <a:spAutoFit/>
           </a:bodyPr>
           <a:lstStyle/>
@@ -8032,92 +7802,6 @@
       </p:grpSpPr>
       <p:sp>
         <p:nvSpPr>
-          <p:cNvPr id="2" name="제목 1">
-            <a:extLst>
-              <a:ext uri="{FF2B5EF4-FFF2-40B4-BE49-F238E27FC236}">
-                <a16:creationId xmlns:a16="http://schemas.microsoft.com/office/drawing/2014/main" id="{5182ED02-3326-D1A1-E9D0-68ECC62978ED}"/>
-              </a:ext>
-            </a:extLst>
-          </p:cNvPr>
-          <p:cNvSpPr>
-            <a:spLocks noGrp="1"/>
-          </p:cNvSpPr>
-          <p:nvPr>
-            <p:ph type="title"/>
-          </p:nvPr>
-        </p:nvSpPr>
-        <p:spPr/>
-        <p:txBody>
-          <a:bodyPr/>
-          <a:lstStyle/>
-          <a:p>
-            <a:r>
-              <a:rPr lang="ko-KR" altLang="en-US" dirty="0"/>
-              <a:t>클래스형 컴포넌트에서의 이벤트</a:t>
-            </a:r>
-          </a:p>
-        </p:txBody>
-      </p:sp>
-      <p:sp>
-        <p:nvSpPr>
-          <p:cNvPr id="4" name="날짜 개체 틀 3">
-            <a:extLst>
-              <a:ext uri="{FF2B5EF4-FFF2-40B4-BE49-F238E27FC236}">
-                <a16:creationId xmlns:a16="http://schemas.microsoft.com/office/drawing/2014/main" id="{E8659164-56CC-323D-F86E-CDDC34C6F46C}"/>
-              </a:ext>
-            </a:extLst>
-          </p:cNvPr>
-          <p:cNvSpPr>
-            <a:spLocks noGrp="1"/>
-          </p:cNvSpPr>
-          <p:nvPr>
-            <p:ph type="dt" sz="half" idx="10"/>
-          </p:nvPr>
-        </p:nvSpPr>
-        <p:spPr/>
-        <p:txBody>
-          <a:bodyPr/>
-          <a:lstStyle/>
-          <a:p>
-            <a:fld id="{9E092EB6-6BAC-455A-B68D-8451BA06159C}" type="datetime6">
-              <a:rPr lang="ko-KR" altLang="en-US" smtClean="0"/>
-              <a:t>2023년 9월</a:t>
-            </a:fld>
-            <a:endParaRPr lang="ko-KR" altLang="en-US"/>
-          </a:p>
-        </p:txBody>
-      </p:sp>
-      <p:sp>
-        <p:nvSpPr>
-          <p:cNvPr id="5" name="슬라이드 번호 개체 틀 4">
-            <a:extLst>
-              <a:ext uri="{FF2B5EF4-FFF2-40B4-BE49-F238E27FC236}">
-                <a16:creationId xmlns:a16="http://schemas.microsoft.com/office/drawing/2014/main" id="{0FB22CE3-1211-B61A-01FB-C2FCF4344918}"/>
-              </a:ext>
-            </a:extLst>
-          </p:cNvPr>
-          <p:cNvSpPr>
-            <a:spLocks noGrp="1"/>
-          </p:cNvSpPr>
-          <p:nvPr>
-            <p:ph type="sldNum" sz="quarter" idx="12"/>
-          </p:nvPr>
-        </p:nvSpPr>
-        <p:spPr/>
-        <p:txBody>
-          <a:bodyPr/>
-          <a:lstStyle/>
-          <a:p>
-            <a:fld id="{083A2CE0-18CD-4102-B738-4ACFF9E68BA4}" type="slidenum">
-              <a:rPr lang="ko-KR" altLang="en-US" smtClean="0"/>
-              <a:t>6</a:t>
-            </a:fld>
-            <a:endParaRPr lang="ko-KR" altLang="en-US"/>
-          </a:p>
-        </p:txBody>
-      </p:sp>
-      <p:sp>
-        <p:nvSpPr>
           <p:cNvPr id="3" name="내용 개체 틀 2">
             <a:extLst>
               <a:ext uri="{FF2B5EF4-FFF2-40B4-BE49-F238E27FC236}">
@@ -8132,7 +7816,12 @@
             <p:ph idx="1"/>
           </p:nvPr>
         </p:nvSpPr>
-        <p:spPr/>
+        <p:spPr>
+          <a:xfrm>
+            <a:off x="559398" y="1825625"/>
+            <a:ext cx="10794402" cy="4351338"/>
+          </a:xfrm>
+        </p:spPr>
         <p:txBody>
           <a:bodyPr/>
           <a:lstStyle/>
@@ -8181,6 +7870,92 @@
               <a:t>)</a:t>
             </a:r>
             <a:endParaRPr lang="ko-KR" altLang="en-US" dirty="0"/>
+          </a:p>
+        </p:txBody>
+      </p:sp>
+      <p:sp>
+        <p:nvSpPr>
+          <p:cNvPr id="4" name="날짜 개체 틀 3">
+            <a:extLst>
+              <a:ext uri="{FF2B5EF4-FFF2-40B4-BE49-F238E27FC236}">
+                <a16:creationId xmlns:a16="http://schemas.microsoft.com/office/drawing/2014/main" id="{E8659164-56CC-323D-F86E-CDDC34C6F46C}"/>
+              </a:ext>
+            </a:extLst>
+          </p:cNvPr>
+          <p:cNvSpPr>
+            <a:spLocks noGrp="1"/>
+          </p:cNvSpPr>
+          <p:nvPr>
+            <p:ph type="dt" sz="half" idx="10"/>
+          </p:nvPr>
+        </p:nvSpPr>
+        <p:spPr/>
+        <p:txBody>
+          <a:bodyPr/>
+          <a:lstStyle/>
+          <a:p>
+            <a:fld id="{9E092EB6-6BAC-455A-B68D-8451BA06159C}" type="datetime6">
+              <a:rPr lang="ko-KR" altLang="en-US" smtClean="0"/>
+              <a:t>2024년 8월</a:t>
+            </a:fld>
+            <a:endParaRPr lang="ko-KR" altLang="en-US"/>
+          </a:p>
+        </p:txBody>
+      </p:sp>
+      <p:sp>
+        <p:nvSpPr>
+          <p:cNvPr id="5" name="슬라이드 번호 개체 틀 4">
+            <a:extLst>
+              <a:ext uri="{FF2B5EF4-FFF2-40B4-BE49-F238E27FC236}">
+                <a16:creationId xmlns:a16="http://schemas.microsoft.com/office/drawing/2014/main" id="{0FB22CE3-1211-B61A-01FB-C2FCF4344918}"/>
+              </a:ext>
+            </a:extLst>
+          </p:cNvPr>
+          <p:cNvSpPr>
+            <a:spLocks noGrp="1"/>
+          </p:cNvSpPr>
+          <p:nvPr>
+            <p:ph type="sldNum" sz="quarter" idx="12"/>
+          </p:nvPr>
+        </p:nvSpPr>
+        <p:spPr/>
+        <p:txBody>
+          <a:bodyPr/>
+          <a:lstStyle/>
+          <a:p>
+            <a:fld id="{083A2CE0-18CD-4102-B738-4ACFF9E68BA4}" type="slidenum">
+              <a:rPr lang="ko-KR" altLang="en-US" smtClean="0"/>
+              <a:t>6</a:t>
+            </a:fld>
+            <a:endParaRPr lang="ko-KR" altLang="en-US"/>
+          </a:p>
+        </p:txBody>
+      </p:sp>
+      <p:sp>
+        <p:nvSpPr>
+          <p:cNvPr id="2" name="제목 1">
+            <a:extLst>
+              <a:ext uri="{FF2B5EF4-FFF2-40B4-BE49-F238E27FC236}">
+                <a16:creationId xmlns:a16="http://schemas.microsoft.com/office/drawing/2014/main" id="{5182ED02-3326-D1A1-E9D0-68ECC62978ED}"/>
+              </a:ext>
+            </a:extLst>
+          </p:cNvPr>
+          <p:cNvSpPr>
+            <a:spLocks noGrp="1"/>
+          </p:cNvSpPr>
+          <p:nvPr>
+            <p:ph type="title"/>
+          </p:nvPr>
+        </p:nvSpPr>
+        <p:spPr/>
+        <p:txBody>
+          <a:bodyPr/>
+          <a:lstStyle/>
+          <a:p>
+            <a:r>
+              <a:rPr lang="ko-KR" altLang="en-US" dirty="0"/>
+              <a:t>클래스형 컴포넌트에서의 이벤트</a:t>
+            </a:r>
           </a:p>
         </p:txBody>
       </p:sp>
@@ -8206,7 +7981,7 @@
         </p:blipFill>
         <p:spPr>
           <a:xfrm>
-            <a:off x="838200" y="2945349"/>
+            <a:off x="761187" y="3655352"/>
             <a:ext cx="10390823" cy="904509"/>
           </a:xfrm>
           <a:prstGeom prst="rect">
@@ -8246,36 +8021,63 @@
       </p:grpSpPr>
       <p:sp>
         <p:nvSpPr>
-          <p:cNvPr id="2" name="제목 1">
-            <a:extLst>
-              <a:ext uri="{FF2B5EF4-FFF2-40B4-BE49-F238E27FC236}">
-                <a16:creationId xmlns:a16="http://schemas.microsoft.com/office/drawing/2014/main" id="{AA482668-8E44-ED6E-9811-FB00C6D8BA2E}"/>
-              </a:ext>
-            </a:extLst>
-          </p:cNvPr>
-          <p:cNvSpPr>
-            <a:spLocks noGrp="1"/>
-          </p:cNvSpPr>
-          <p:nvPr>
-            <p:ph type="title"/>
-          </p:nvPr>
-        </p:nvSpPr>
-        <p:spPr/>
-        <p:txBody>
-          <a:bodyPr/>
-          <a:lstStyle/>
-          <a:p>
+          <p:cNvPr id="3" name="내용 개체 틀 2">
+            <a:extLst>
+              <a:ext uri="{FF2B5EF4-FFF2-40B4-BE49-F238E27FC236}">
+                <a16:creationId xmlns:a16="http://schemas.microsoft.com/office/drawing/2014/main" id="{897DCB27-8B54-0ACB-7D07-185C4B1AC8BD}"/>
+              </a:ext>
+            </a:extLst>
+          </p:cNvPr>
+          <p:cNvSpPr>
+            <a:spLocks noGrp="1"/>
+          </p:cNvSpPr>
+          <p:nvPr>
+            <p:ph idx="1"/>
+          </p:nvPr>
+        </p:nvSpPr>
+        <p:spPr/>
+        <p:txBody>
+          <a:bodyPr/>
+          <a:lstStyle/>
+          <a:p>
+            <a:pPr marL="514350" indent="-514350">
+              <a:buAutoNum type="arabicPeriod"/>
+            </a:pPr>
+            <a:r>
+              <a:rPr lang="en-US" altLang="ko-KR" dirty="0"/>
+              <a:t>bind</a:t>
+            </a:r>
             <a:r>
               <a:rPr lang="ko-KR" altLang="en-US" dirty="0"/>
-              <a:t>함수에서 </a:t>
-            </a:r>
-            <a:r>
-              <a:rPr lang="en-US" altLang="ko-KR" dirty="0"/>
-              <a:t>this </a:t>
-            </a:r>
+              <a:t> 사용하기</a:t>
+            </a:r>
+            <a:endParaRPr lang="en-US" altLang="ko-KR" dirty="0"/>
+          </a:p>
+          <a:p>
+            <a:pPr marL="514350" indent="-514350">
+              <a:buAutoNum type="arabicPeriod"/>
+            </a:pPr>
+            <a:endParaRPr lang="en-US" altLang="ko-KR" dirty="0"/>
+          </a:p>
+          <a:p>
+            <a:pPr marL="514350" indent="-514350">
+              <a:buAutoNum type="arabicPeriod"/>
+            </a:pPr>
+            <a:endParaRPr lang="en-US" altLang="ko-KR" dirty="0"/>
+          </a:p>
+          <a:p>
+            <a:pPr marL="514350" indent="-514350">
+              <a:buAutoNum type="arabicPeriod"/>
+            </a:pPr>
+            <a:endParaRPr lang="en-US" altLang="ko-KR" dirty="0"/>
+          </a:p>
+          <a:p>
+            <a:pPr marL="514350" indent="-514350">
+              <a:buAutoNum type="arabicPeriod"/>
+            </a:pPr>
             <a:r>
               <a:rPr lang="ko-KR" altLang="en-US" dirty="0"/>
-              <a:t>사용하기</a:t>
+              <a:t>화살표 함수 이용하기</a:t>
             </a:r>
           </a:p>
         </p:txBody>
@@ -8303,7 +8105,7 @@
           <a:p>
             <a:fld id="{2E35068E-430D-4BE5-8CE2-117F88CCC3A1}" type="datetime6">
               <a:rPr lang="ko-KR" altLang="en-US" smtClean="0"/>
-              <a:t>2023년 9월</a:t>
+              <a:t>2024년 8월</a:t>
             </a:fld>
             <a:endParaRPr lang="ko-KR" altLang="en-US"/>
           </a:p>
@@ -8340,63 +8142,36 @@
       </p:sp>
       <p:sp>
         <p:nvSpPr>
-          <p:cNvPr id="3" name="내용 개체 틀 2">
-            <a:extLst>
-              <a:ext uri="{FF2B5EF4-FFF2-40B4-BE49-F238E27FC236}">
-                <a16:creationId xmlns:a16="http://schemas.microsoft.com/office/drawing/2014/main" id="{897DCB27-8B54-0ACB-7D07-185C4B1AC8BD}"/>
-              </a:ext>
-            </a:extLst>
-          </p:cNvPr>
-          <p:cNvSpPr>
-            <a:spLocks noGrp="1"/>
-          </p:cNvSpPr>
-          <p:nvPr>
-            <p:ph idx="1"/>
-          </p:nvPr>
-        </p:nvSpPr>
-        <p:spPr/>
-        <p:txBody>
-          <a:bodyPr/>
-          <a:lstStyle/>
-          <a:p>
-            <a:pPr marL="514350" indent="-514350">
-              <a:buAutoNum type="arabicPeriod"/>
-            </a:pPr>
+          <p:cNvPr id="2" name="제목 1">
+            <a:extLst>
+              <a:ext uri="{FF2B5EF4-FFF2-40B4-BE49-F238E27FC236}">
+                <a16:creationId xmlns:a16="http://schemas.microsoft.com/office/drawing/2014/main" id="{AA482668-8E44-ED6E-9811-FB00C6D8BA2E}"/>
+              </a:ext>
+            </a:extLst>
+          </p:cNvPr>
+          <p:cNvSpPr>
+            <a:spLocks noGrp="1"/>
+          </p:cNvSpPr>
+          <p:nvPr>
+            <p:ph type="title"/>
+          </p:nvPr>
+        </p:nvSpPr>
+        <p:spPr/>
+        <p:txBody>
+          <a:bodyPr/>
+          <a:lstStyle/>
+          <a:p>
+            <a:r>
+              <a:rPr lang="ko-KR" altLang="en-US" dirty="0"/>
+              <a:t>함수에서 </a:t>
+            </a:r>
             <a:r>
               <a:rPr lang="en-US" altLang="ko-KR" dirty="0"/>
-              <a:t>bind</a:t>
+              <a:t>this </a:t>
             </a:r>
             <a:r>
               <a:rPr lang="ko-KR" altLang="en-US" dirty="0"/>
-              <a:t> 사용하기</a:t>
-            </a:r>
-            <a:endParaRPr lang="en-US" altLang="ko-KR" dirty="0"/>
-          </a:p>
-          <a:p>
-            <a:pPr marL="514350" indent="-514350">
-              <a:buAutoNum type="arabicPeriod"/>
-            </a:pPr>
-            <a:endParaRPr lang="en-US" altLang="ko-KR" dirty="0"/>
-          </a:p>
-          <a:p>
-            <a:pPr marL="514350" indent="-514350">
-              <a:buAutoNum type="arabicPeriod"/>
-            </a:pPr>
-            <a:endParaRPr lang="en-US" altLang="ko-KR" dirty="0"/>
-          </a:p>
-          <a:p>
-            <a:pPr marL="514350" indent="-514350">
-              <a:buAutoNum type="arabicPeriod"/>
-            </a:pPr>
-            <a:endParaRPr lang="en-US" altLang="ko-KR" dirty="0"/>
-          </a:p>
-          <a:p>
-            <a:pPr marL="514350" indent="-514350">
-              <a:buAutoNum type="arabicPeriod"/>
-            </a:pPr>
-            <a:r>
-              <a:rPr lang="ko-KR" altLang="en-US" dirty="0"/>
-              <a:t>화살표 함수 이용하기</a:t>
+              <a:t>사용하기</a:t>
             </a:r>
           </a:p>
         </p:txBody>
@@ -8493,29 +8268,77 @@
       </p:grpSpPr>
       <p:sp>
         <p:nvSpPr>
-          <p:cNvPr id="2" name="제목 1">
-            <a:extLst>
-              <a:ext uri="{FF2B5EF4-FFF2-40B4-BE49-F238E27FC236}">
-                <a16:creationId xmlns:a16="http://schemas.microsoft.com/office/drawing/2014/main" id="{5201B7EE-A66C-2A59-7AAF-1D4C656C392E}"/>
-              </a:ext>
-            </a:extLst>
-          </p:cNvPr>
-          <p:cNvSpPr>
-            <a:spLocks noGrp="1"/>
-          </p:cNvSpPr>
-          <p:nvPr>
-            <p:ph type="title"/>
-          </p:nvPr>
-        </p:nvSpPr>
-        <p:spPr/>
-        <p:txBody>
-          <a:bodyPr/>
-          <a:lstStyle/>
-          <a:p>
+          <p:cNvPr id="14" name="내용 개체 틀 2">
+            <a:extLst>
+              <a:ext uri="{FF2B5EF4-FFF2-40B4-BE49-F238E27FC236}">
+                <a16:creationId xmlns:a16="http://schemas.microsoft.com/office/drawing/2014/main" id="{5CA1AE80-6F8A-B697-E117-7CB75FA3A9C0}"/>
+              </a:ext>
+            </a:extLst>
+          </p:cNvPr>
+          <p:cNvSpPr>
+            <a:spLocks noGrp="1"/>
+          </p:cNvSpPr>
+          <p:nvPr>
+            <p:ph idx="1"/>
+          </p:nvPr>
+        </p:nvSpPr>
+        <p:spPr>
+          <a:xfrm>
+            <a:off x="559420" y="1565213"/>
+            <a:ext cx="10515600" cy="3955570"/>
+          </a:xfrm>
+        </p:spPr>
+        <p:txBody>
+          <a:bodyPr/>
+          <a:lstStyle/>
+          <a:p>
+            <a:pPr marL="514350" indent="-514350">
+              <a:buAutoNum type="arabicPeriod"/>
+            </a:pPr>
             <a:r>
               <a:rPr lang="ko-KR" altLang="en-US" dirty="0"/>
-              <a:t>함수에 인자 보내기</a:t>
-            </a:r>
+              <a:t>화살표 함수 이용하기</a:t>
+            </a:r>
+            <a:endParaRPr lang="en-US" altLang="ko-KR" dirty="0"/>
+          </a:p>
+          <a:p>
+            <a:pPr marL="514350" indent="-514350">
+              <a:buAutoNum type="arabicPeriod"/>
+            </a:pPr>
+            <a:endParaRPr lang="en-US" altLang="ko-KR" dirty="0"/>
+          </a:p>
+          <a:p>
+            <a:pPr marL="514350" indent="-514350">
+              <a:buAutoNum type="arabicPeriod"/>
+            </a:pPr>
+            <a:endParaRPr lang="en-US" altLang="ko-KR" dirty="0"/>
+          </a:p>
+          <a:p>
+            <a:pPr marL="514350" indent="-514350">
+              <a:buAutoNum type="arabicPeriod"/>
+            </a:pPr>
+            <a:endParaRPr lang="en-US" altLang="ko-KR" dirty="0"/>
+          </a:p>
+          <a:p>
+            <a:pPr marL="514350" indent="-514350">
+              <a:buFont typeface="Arial" panose="020B0604020202020204" pitchFamily="34" charset="0"/>
+              <a:buAutoNum type="arabicPeriod"/>
+            </a:pPr>
+            <a:r>
+              <a:rPr lang="en-US" altLang="ko-KR" dirty="0"/>
+              <a:t>bind</a:t>
+            </a:r>
+            <a:r>
+              <a:rPr lang="ko-KR" altLang="en-US" dirty="0"/>
+              <a:t> 사용하기</a:t>
+            </a:r>
+            <a:endParaRPr lang="en-US" altLang="ko-KR" dirty="0"/>
+          </a:p>
+          <a:p>
+            <a:pPr marL="514350" indent="-514350">
+              <a:buAutoNum type="arabicPeriod"/>
+            </a:pPr>
+            <a:endParaRPr lang="ko-KR" altLang="en-US" dirty="0"/>
           </a:p>
         </p:txBody>
       </p:sp>
@@ -8542,7 +8365,7 @@
           <a:p>
             <a:fld id="{81425F84-7286-4CA9-8454-9C0AD804DE0A}" type="datetime6">
               <a:rPr lang="ko-KR" altLang="en-US" smtClean="0"/>
-              <a:t>2023년 9월</a:t>
+              <a:t>2024년 8월</a:t>
             </a:fld>
             <a:endParaRPr lang="ko-KR" altLang="en-US"/>
           </a:p>
@@ -8574,6 +8397,34 @@
               <a:t>8</a:t>
             </a:fld>
             <a:endParaRPr lang="ko-KR" altLang="en-US"/>
+          </a:p>
+        </p:txBody>
+      </p:sp>
+      <p:sp>
+        <p:nvSpPr>
+          <p:cNvPr id="2" name="제목 1">
+            <a:extLst>
+              <a:ext uri="{FF2B5EF4-FFF2-40B4-BE49-F238E27FC236}">
+                <a16:creationId xmlns:a16="http://schemas.microsoft.com/office/drawing/2014/main" id="{5201B7EE-A66C-2A59-7AAF-1D4C656C392E}"/>
+              </a:ext>
+            </a:extLst>
+          </p:cNvPr>
+          <p:cNvSpPr>
+            <a:spLocks noGrp="1"/>
+          </p:cNvSpPr>
+          <p:nvPr>
+            <p:ph type="title"/>
+          </p:nvPr>
+        </p:nvSpPr>
+        <p:spPr/>
+        <p:txBody>
+          <a:bodyPr/>
+          <a:lstStyle/>
+          <a:p>
+            <a:r>
+              <a:rPr lang="ko-KR" altLang="en-US" dirty="0"/>
+              <a:t>함수에 인자 보내기</a:t>
+            </a:r>
           </a:p>
         </p:txBody>
       </p:sp>
@@ -8636,82 +8487,6 @@
           </a:prstGeom>
         </p:spPr>
       </p:pic>
-      <p:sp>
-        <p:nvSpPr>
-          <p:cNvPr id="14" name="내용 개체 틀 2">
-            <a:extLst>
-              <a:ext uri="{FF2B5EF4-FFF2-40B4-BE49-F238E27FC236}">
-                <a16:creationId xmlns:a16="http://schemas.microsoft.com/office/drawing/2014/main" id="{5CA1AE80-6F8A-B697-E117-7CB75FA3A9C0}"/>
-              </a:ext>
-            </a:extLst>
-          </p:cNvPr>
-          <p:cNvSpPr>
-            <a:spLocks noGrp="1"/>
-          </p:cNvSpPr>
-          <p:nvPr>
-            <p:ph idx="1"/>
-          </p:nvPr>
-        </p:nvSpPr>
-        <p:spPr>
-          <a:xfrm>
-            <a:off x="559420" y="1565213"/>
-            <a:ext cx="10515600" cy="3955570"/>
-          </a:xfrm>
-        </p:spPr>
-        <p:txBody>
-          <a:bodyPr/>
-          <a:lstStyle/>
-          <a:p>
-            <a:pPr marL="514350" indent="-514350">
-              <a:buAutoNum type="arabicPeriod"/>
-            </a:pPr>
-            <a:r>
-              <a:rPr lang="ko-KR" altLang="en-US" dirty="0"/>
-              <a:t>화살표 함수 이용하기</a:t>
-            </a:r>
-            <a:endParaRPr lang="en-US" altLang="ko-KR" dirty="0"/>
-          </a:p>
-          <a:p>
-            <a:pPr marL="514350" indent="-514350">
-              <a:buAutoNum type="arabicPeriod"/>
-            </a:pPr>
-            <a:endParaRPr lang="en-US" altLang="ko-KR" dirty="0"/>
-          </a:p>
-          <a:p>
-            <a:pPr marL="514350" indent="-514350">
-              <a:buAutoNum type="arabicPeriod"/>
-            </a:pPr>
-            <a:endParaRPr lang="en-US" altLang="ko-KR" dirty="0"/>
-          </a:p>
-          <a:p>
-            <a:pPr marL="514350" indent="-514350">
-              <a:buAutoNum type="arabicPeriod"/>
-            </a:pPr>
-            <a:endParaRPr lang="en-US" altLang="ko-KR" dirty="0"/>
-          </a:p>
-          <a:p>
-            <a:pPr marL="514350" indent="-514350">
-              <a:buFont typeface="Arial" panose="020B0604020202020204" pitchFamily="34" charset="0"/>
-              <a:buAutoNum type="arabicPeriod"/>
-            </a:pPr>
-            <a:r>
-              <a:rPr lang="en-US" altLang="ko-KR" dirty="0"/>
-              <a:t>bind</a:t>
-            </a:r>
-            <a:r>
-              <a:rPr lang="ko-KR" altLang="en-US" dirty="0"/>
-              <a:t> 사용하기</a:t>
-            </a:r>
-            <a:endParaRPr lang="en-US" altLang="ko-KR" dirty="0"/>
-          </a:p>
-          <a:p>
-            <a:pPr marL="514350" indent="-514350">
-              <a:buAutoNum type="arabicPeriod"/>
-            </a:pPr>
-            <a:endParaRPr lang="ko-KR" altLang="en-US" dirty="0"/>
-          </a:p>
-        </p:txBody>
-      </p:sp>
     </p:spTree>
     <p:extLst>
       <p:ext uri="{BB962C8B-B14F-4D97-AF65-F5344CB8AC3E}">
@@ -8744,18 +8519,18 @@
       </p:grpSpPr>
       <p:sp>
         <p:nvSpPr>
-          <p:cNvPr id="2" name="제목 1">
-            <a:extLst>
-              <a:ext uri="{FF2B5EF4-FFF2-40B4-BE49-F238E27FC236}">
-                <a16:creationId xmlns:a16="http://schemas.microsoft.com/office/drawing/2014/main" id="{5182ED02-3326-D1A1-E9D0-68ECC62978ED}"/>
-              </a:ext>
-            </a:extLst>
-          </p:cNvPr>
-          <p:cNvSpPr>
-            <a:spLocks noGrp="1"/>
-          </p:cNvSpPr>
-          <p:nvPr>
-            <p:ph type="title"/>
+          <p:cNvPr id="3" name="내용 개체 틀 2">
+            <a:extLst>
+              <a:ext uri="{FF2B5EF4-FFF2-40B4-BE49-F238E27FC236}">
+                <a16:creationId xmlns:a16="http://schemas.microsoft.com/office/drawing/2014/main" id="{36EAE3C2-F07D-A2CE-FAD1-533A2D22DF0B}"/>
+              </a:ext>
+            </a:extLst>
+          </p:cNvPr>
+          <p:cNvSpPr>
+            <a:spLocks noGrp="1"/>
+          </p:cNvSpPr>
+          <p:nvPr>
+            <p:ph idx="1"/>
           </p:nvPr>
         </p:nvSpPr>
         <p:spPr/>
@@ -8765,7 +8540,36 @@
           <a:p>
             <a:r>
               <a:rPr lang="ko-KR" altLang="en-US" dirty="0"/>
-              <a:t>함수형 컴포넌트에서의 이벤트</a:t>
+              <a:t>함수에 인자가 </a:t>
+            </a:r>
+            <a:r>
+              <a:rPr lang="ko-KR" altLang="en-US" dirty="0" smtClean="0"/>
+              <a:t>없는 </a:t>
+            </a:r>
+            <a:r>
+              <a:rPr lang="ko-KR" altLang="en-US" dirty="0"/>
+              <a:t>경우</a:t>
+            </a:r>
+            <a:endParaRPr lang="en-US" altLang="ko-KR" dirty="0"/>
+          </a:p>
+          <a:p>
+            <a:endParaRPr lang="en-US" altLang="ko-KR" dirty="0"/>
+          </a:p>
+          <a:p>
+            <a:endParaRPr lang="en-US" altLang="ko-KR" dirty="0"/>
+          </a:p>
+          <a:p>
+            <a:r>
+              <a:rPr lang="ko-KR" altLang="en-US" dirty="0"/>
+              <a:t>함수에 인자가 </a:t>
+            </a:r>
+            <a:r>
+              <a:rPr lang="ko-KR" altLang="en-US" dirty="0" smtClean="0"/>
+              <a:t>있는 </a:t>
+            </a:r>
+            <a:r>
+              <a:rPr lang="ko-KR" altLang="en-US" dirty="0"/>
+              <a:t>경우</a:t>
             </a:r>
           </a:p>
         </p:txBody>
@@ -8793,7 +8597,7 @@
           <a:p>
             <a:fld id="{9E092EB6-6BAC-455A-B68D-8451BA06159C}" type="datetime6">
               <a:rPr lang="ko-KR" altLang="en-US" smtClean="0"/>
-              <a:t>2023년 9월</a:t>
+              <a:t>2024년 8월</a:t>
             </a:fld>
             <a:endParaRPr lang="ko-KR" altLang="en-US"/>
           </a:p>
@@ -8830,18 +8634,18 @@
       </p:sp>
       <p:sp>
         <p:nvSpPr>
-          <p:cNvPr id="3" name="내용 개체 틀 2">
-            <a:extLst>
-              <a:ext uri="{FF2B5EF4-FFF2-40B4-BE49-F238E27FC236}">
-                <a16:creationId xmlns:a16="http://schemas.microsoft.com/office/drawing/2014/main" id="{36EAE3C2-F07D-A2CE-FAD1-533A2D22DF0B}"/>
-              </a:ext>
-            </a:extLst>
-          </p:cNvPr>
-          <p:cNvSpPr>
-            <a:spLocks noGrp="1"/>
-          </p:cNvSpPr>
-          <p:nvPr>
-            <p:ph idx="1"/>
+          <p:cNvPr id="2" name="제목 1">
+            <a:extLst>
+              <a:ext uri="{FF2B5EF4-FFF2-40B4-BE49-F238E27FC236}">
+                <a16:creationId xmlns:a16="http://schemas.microsoft.com/office/drawing/2014/main" id="{5182ED02-3326-D1A1-E9D0-68ECC62978ED}"/>
+              </a:ext>
+            </a:extLst>
+          </p:cNvPr>
+          <p:cNvSpPr>
+            <a:spLocks noGrp="1"/>
+          </p:cNvSpPr>
+          <p:nvPr>
+            <p:ph type="title"/>
           </p:nvPr>
         </p:nvSpPr>
         <p:spPr/>
@@ -8851,36 +8655,7 @@
           <a:p>
             <a:r>
               <a:rPr lang="ko-KR" altLang="en-US" dirty="0"/>
-              <a:t>함수에 인자가 </a:t>
-            </a:r>
-            <a:r>
-              <a:rPr lang="ko-KR" altLang="en-US" dirty="0" smtClean="0"/>
-              <a:t>없는 </a:t>
-            </a:r>
-            <a:r>
-              <a:rPr lang="ko-KR" altLang="en-US" dirty="0"/>
-              <a:t>경우</a:t>
-            </a:r>
-            <a:endParaRPr lang="en-US" altLang="ko-KR" dirty="0"/>
-          </a:p>
-          <a:p>
-            <a:endParaRPr lang="en-US" altLang="ko-KR" dirty="0"/>
-          </a:p>
-          <a:p>
-            <a:endParaRPr lang="en-US" altLang="ko-KR" dirty="0"/>
-          </a:p>
-          <a:p>
-            <a:r>
-              <a:rPr lang="ko-KR" altLang="en-US" dirty="0"/>
-              <a:t>함수에 인자가 </a:t>
-            </a:r>
-            <a:r>
-              <a:rPr lang="ko-KR" altLang="en-US" dirty="0" smtClean="0"/>
-              <a:t>있는 </a:t>
-            </a:r>
-            <a:r>
-              <a:rPr lang="ko-KR" altLang="en-US" dirty="0"/>
-              <a:t>경우</a:t>
+              <a:t>함수형 컴포넌트에서의 이벤트</a:t>
             </a:r>
           </a:p>
         </p:txBody>
@@ -8957,7 +8732,7 @@
 </file>
 
 <file path=ppt/theme/theme1.xml><?xml version="1.0" encoding="utf-8"?>
-<a:theme xmlns:a="http://schemas.openxmlformats.org/drawingml/2006/main" name="1_Office 테마">
+<a:theme xmlns:a="http://schemas.openxmlformats.org/drawingml/2006/main" name="3_Office 테마">
   <a:themeElements>
     <a:clrScheme name="코딩온_새싹">
       <a:dk1>
@@ -8997,15 +8772,15 @@
         <a:srgbClr val="954F72"/>
       </a:folHlink>
     </a:clrScheme>
-    <a:fontScheme name="코딩온">
+    <a:fontScheme name="Pretendard GOV">
       <a:majorFont>
-        <a:latin typeface="메이플스토리"/>
-        <a:ea typeface="메이플스토리"/>
+        <a:latin typeface="Pretendard GOV"/>
+        <a:ea typeface="Pretendard GOV"/>
         <a:cs typeface=""/>
       </a:majorFont>
       <a:minorFont>
-        <a:latin typeface="메이플스토리"/>
-        <a:ea typeface="메이플스토리"/>
+        <a:latin typeface="Pretendard GOV"/>
+        <a:ea typeface="Pretendard GOV"/>
         <a:cs typeface=""/>
       </a:minorFont>
     </a:fontScheme>

--- a/material/[SeSAC_YDP_6] 25_React_Event_handling.pptx
+++ b/material/[SeSAC_YDP_6] 25_React_Event_handling.pptx
@@ -17,8 +17,8 @@
     <p:sldId id="261" r:id="rId8"/>
     <p:sldId id="262" r:id="rId9"/>
     <p:sldId id="263" r:id="rId10"/>
-    <p:sldId id="268" r:id="rId11"/>
-    <p:sldId id="269" r:id="rId12"/>
+    <p:sldId id="269" r:id="rId11"/>
+    <p:sldId id="268" r:id="rId12"/>
   </p:sldIdLst>
   <p:sldSz cx="12192000" cy="6858000"/>
   <p:notesSz cx="6858000" cy="9144000"/>
@@ -606,7 +606,7 @@
           <a:lstStyle/>
           <a:p>
             <a:r>
-              <a:rPr lang="en-US" altLang="ko-KR" sz="1200" b="0" kern="1200" dirty="0" smtClean="0">
+              <a:rPr lang="en-US" altLang="ko-KR" sz="1200" b="0" kern="1200" dirty="0">
                 <a:solidFill>
                   <a:schemeClr val="tx1"/>
                 </a:solidFill>
@@ -618,7 +618,7 @@
               <a:t>- HTML : </a:t>
             </a:r>
             <a:r>
-              <a:rPr lang="en-US" altLang="ko-KR" sz="1200" b="0" kern="1200" dirty="0" err="1" smtClean="0">
+              <a:rPr lang="en-US" altLang="ko-KR" sz="1200" b="0" kern="1200" dirty="0" err="1">
                 <a:solidFill>
                   <a:schemeClr val="tx1"/>
                 </a:solidFill>
@@ -630,7 +630,7 @@
               <a:t>onclick</a:t>
             </a:r>
             <a:r>
-              <a:rPr lang="en-US" altLang="ko-KR" sz="1200" b="0" kern="1200" dirty="0" smtClean="0">
+              <a:rPr lang="en-US" altLang="ko-KR" sz="1200" b="0" kern="1200" dirty="0">
                 <a:solidFill>
                   <a:schemeClr val="tx1"/>
                 </a:solidFill>
@@ -642,7 +642,7 @@
               <a:t>="</a:t>
             </a:r>
             <a:r>
-              <a:rPr lang="en-US" altLang="ko-KR" sz="1200" b="0" kern="1200" dirty="0" err="1" smtClean="0">
+              <a:rPr lang="en-US" altLang="ko-KR" sz="1200" b="0" kern="1200" dirty="0" err="1">
                 <a:solidFill>
                   <a:schemeClr val="tx1"/>
                 </a:solidFill>
@@ -654,7 +654,7 @@
               <a:t>onClickEvent</a:t>
             </a:r>
             <a:r>
-              <a:rPr lang="en-US" altLang="ko-KR" sz="1200" b="0" kern="1200" dirty="0" smtClean="0">
+              <a:rPr lang="en-US" altLang="ko-KR" sz="1200" b="0" kern="1200" dirty="0">
                 <a:solidFill>
                   <a:schemeClr val="tx1"/>
                 </a:solidFill>
@@ -666,7 +666,7 @@
               <a:t>()" -&gt; </a:t>
             </a:r>
             <a:r>
-              <a:rPr lang="ko-KR" altLang="en-US" sz="1200" b="0" kern="1200" dirty="0" smtClean="0">
+              <a:rPr lang="ko-KR" altLang="en-US" sz="1200" b="0" kern="1200" dirty="0">
                 <a:solidFill>
                   <a:schemeClr val="tx1"/>
                 </a:solidFill>
@@ -678,7 +678,7 @@
               <a:t>문자열 형식의 </a:t>
             </a:r>
             <a:r>
-              <a:rPr lang="ko-KR" altLang="en-US" sz="1200" b="0" kern="1200" dirty="0" err="1" smtClean="0">
+              <a:rPr lang="ko-KR" altLang="en-US" sz="1200" b="0" kern="1200" dirty="0" err="1">
                 <a:solidFill>
                   <a:schemeClr val="tx1"/>
                 </a:solidFill>
@@ -690,7 +690,7 @@
               <a:t>호출문</a:t>
             </a:r>
             <a:r>
-              <a:rPr lang="ko-KR" altLang="en-US" sz="1200" b="0" kern="1200" dirty="0" smtClean="0">
+              <a:rPr lang="ko-KR" altLang="en-US" sz="1200" b="0" kern="1200" dirty="0">
                 <a:solidFill>
                   <a:schemeClr val="tx1"/>
                 </a:solidFill>
@@ -704,7 +704,7 @@
           </a:p>
           <a:p>
             <a:r>
-              <a:rPr lang="en-US" altLang="ko-KR" sz="1200" b="0" kern="1200" dirty="0" smtClean="0">
+              <a:rPr lang="en-US" altLang="ko-KR" sz="1200" b="0" kern="1200" dirty="0">
                 <a:solidFill>
                   <a:schemeClr val="tx1"/>
                 </a:solidFill>
@@ -716,7 +716,7 @@
               <a:t>- JS : </a:t>
             </a:r>
             <a:r>
-              <a:rPr lang="en-US" altLang="ko-KR" sz="1200" b="0" kern="1200" dirty="0" err="1" smtClean="0">
+              <a:rPr lang="en-US" altLang="ko-KR" sz="1200" b="0" kern="1200" dirty="0" err="1">
                 <a:solidFill>
                   <a:schemeClr val="tx1"/>
                 </a:solidFill>
@@ -728,7 +728,7 @@
               <a:t>addEventListener</a:t>
             </a:r>
             <a:r>
-              <a:rPr lang="en-US" altLang="ko-KR" sz="1200" b="0" kern="1200" dirty="0" smtClean="0">
+              <a:rPr lang="en-US" altLang="ko-KR" sz="1200" b="0" kern="1200" dirty="0">
                 <a:solidFill>
                   <a:schemeClr val="tx1"/>
                 </a:solidFill>
@@ -740,7 +740,7 @@
               <a:t>('click', </a:t>
             </a:r>
             <a:r>
-              <a:rPr lang="en-US" altLang="ko-KR" sz="1200" b="0" kern="1200" dirty="0" err="1" smtClean="0">
+              <a:rPr lang="en-US" altLang="ko-KR" sz="1200" b="0" kern="1200" dirty="0" err="1">
                 <a:solidFill>
                   <a:schemeClr val="tx1"/>
                 </a:solidFill>
@@ -752,7 +752,7 @@
               <a:t>onClickEvent</a:t>
             </a:r>
             <a:r>
-              <a:rPr lang="en-US" altLang="ko-KR" sz="1200" b="0" kern="1200" dirty="0" smtClean="0">
+              <a:rPr lang="en-US" altLang="ko-KR" sz="1200" b="0" kern="1200" dirty="0">
                 <a:solidFill>
                   <a:schemeClr val="tx1"/>
                 </a:solidFill>
@@ -764,7 +764,7 @@
               <a:t>) -&gt; </a:t>
             </a:r>
             <a:r>
-              <a:rPr lang="ko-KR" altLang="en-US" sz="1200" b="0" kern="1200" dirty="0" smtClean="0">
+              <a:rPr lang="ko-KR" altLang="en-US" sz="1200" b="0" kern="1200" dirty="0">
                 <a:solidFill>
                   <a:schemeClr val="tx1"/>
                 </a:solidFill>
@@ -776,7 +776,7 @@
               <a:t>괄호를 없애 함수를 바로 실행하지 않고</a:t>
             </a:r>
             <a:r>
-              <a:rPr lang="en-US" altLang="ko-KR" sz="1200" b="0" kern="1200" dirty="0" smtClean="0">
+              <a:rPr lang="en-US" altLang="ko-KR" sz="1200" b="0" kern="1200" dirty="0">
                 <a:solidFill>
                   <a:schemeClr val="tx1"/>
                 </a:solidFill>
@@ -788,7 +788,7 @@
               <a:t>, </a:t>
             </a:r>
             <a:r>
-              <a:rPr lang="ko-KR" altLang="en-US" sz="1200" b="0" kern="1200" dirty="0" smtClean="0">
+              <a:rPr lang="ko-KR" altLang="en-US" sz="1200" b="0" kern="1200" dirty="0">
                 <a:solidFill>
                   <a:schemeClr val="tx1"/>
                 </a:solidFill>
@@ -800,7 +800,7 @@
               <a:t>클릭 발생 했을 때 함수가 호출되도록 함</a:t>
             </a:r>
             <a:r>
-              <a:rPr lang="en-US" altLang="ko-KR" sz="1200" b="0" kern="1200" dirty="0" smtClean="0">
+              <a:rPr lang="en-US" altLang="ko-KR" sz="1200" b="0" kern="1200" dirty="0">
                 <a:solidFill>
                   <a:schemeClr val="tx1"/>
                 </a:solidFill>
@@ -811,7 +811,7 @@
               </a:rPr>
               <a:t>.</a:t>
             </a:r>
-            <a:endParaRPr lang="ko-KR" altLang="en-US" sz="1200" b="0" kern="1200" dirty="0" smtClean="0">
+            <a:endParaRPr lang="ko-KR" altLang="en-US" sz="1200" b="0" kern="1200" dirty="0">
               <a:solidFill>
                 <a:schemeClr val="tx1"/>
               </a:solidFill>
@@ -823,7 +823,7 @@
           </a:p>
           <a:p>
             <a:r>
-              <a:rPr lang="en-US" altLang="ko-KR" sz="1200" b="0" kern="1200" dirty="0" smtClean="0">
+              <a:rPr lang="en-US" altLang="ko-KR" sz="1200" b="0" kern="1200" dirty="0">
                 <a:solidFill>
                   <a:schemeClr val="tx1"/>
                 </a:solidFill>
@@ -835,7 +835,7 @@
               <a:t>- React : </a:t>
             </a:r>
             <a:r>
-              <a:rPr lang="en-US" altLang="ko-KR" sz="1200" b="0" kern="1200" dirty="0" err="1" smtClean="0">
+              <a:rPr lang="en-US" altLang="ko-KR" sz="1200" b="0" kern="1200" dirty="0" err="1">
                 <a:solidFill>
                   <a:schemeClr val="tx1"/>
                 </a:solidFill>
@@ -847,7 +847,7 @@
               <a:t>onClick</a:t>
             </a:r>
             <a:r>
-              <a:rPr lang="en-US" altLang="ko-KR" sz="1200" b="0" kern="1200" dirty="0" smtClean="0">
+              <a:rPr lang="en-US" altLang="ko-KR" sz="1200" b="0" kern="1200" dirty="0">
                 <a:solidFill>
                   <a:schemeClr val="tx1"/>
                 </a:solidFill>
@@ -859,7 +859,7 @@
               <a:t>={</a:t>
             </a:r>
             <a:r>
-              <a:rPr lang="en-US" altLang="ko-KR" sz="1200" b="0" kern="1200" dirty="0" err="1" smtClean="0">
+              <a:rPr lang="en-US" altLang="ko-KR" sz="1200" b="0" kern="1200" dirty="0" err="1">
                 <a:solidFill>
                   <a:schemeClr val="tx1"/>
                 </a:solidFill>
@@ -871,7 +871,7 @@
               <a:t>onClickEvent</a:t>
             </a:r>
             <a:r>
-              <a:rPr lang="en-US" altLang="ko-KR" sz="1200" b="0" kern="1200" dirty="0" smtClean="0">
+              <a:rPr lang="en-US" altLang="ko-KR" sz="1200" b="0" kern="1200" dirty="0">
                 <a:solidFill>
                   <a:schemeClr val="tx1"/>
                 </a:solidFill>
@@ -883,7 +883,7 @@
               <a:t>} -&gt; JS</a:t>
             </a:r>
             <a:r>
-              <a:rPr lang="ko-KR" altLang="en-US" sz="1200" b="0" kern="1200" dirty="0" smtClean="0">
+              <a:rPr lang="ko-KR" altLang="en-US" sz="1200" b="0" kern="1200" dirty="0">
                 <a:solidFill>
                   <a:schemeClr val="tx1"/>
                 </a:solidFill>
@@ -1065,10 +1065,9 @@
           <a:lstStyle/>
           <a:p>
             <a:r>
-              <a:rPr lang="ko-KR" altLang="en-US" dirty="0" smtClean="0"/>
+              <a:rPr lang="ko-KR" altLang="en-US" dirty="0"/>
               <a:t>링크 들어가서 나오는 코드 보면서 설명해주기</a:t>
             </a:r>
-            <a:endParaRPr lang="ko-KR" altLang="en-US" dirty="0"/>
           </a:p>
         </p:txBody>
       </p:sp>
@@ -1153,73 +1152,69 @@
           <a:lstStyle/>
           <a:p>
             <a:r>
-              <a:rPr lang="en-US" altLang="ko-KR" baseline="0" dirty="0" err="1" smtClean="0"/>
+              <a:rPr lang="en-US" altLang="ko-KR" baseline="0" dirty="0" err="1"/>
               <a:t>js</a:t>
             </a:r>
             <a:r>
-              <a:rPr lang="ko-KR" altLang="en-US" baseline="0" dirty="0" smtClean="0"/>
+              <a:rPr lang="ko-KR" altLang="en-US" baseline="0" dirty="0"/>
               <a:t>에서 클래스 메서드는 기본적으로 </a:t>
             </a:r>
             <a:r>
-              <a:rPr lang="ko-KR" altLang="en-US" baseline="0" dirty="0" err="1" smtClean="0"/>
+              <a:rPr lang="ko-KR" altLang="en-US" baseline="0" dirty="0" err="1"/>
               <a:t>바인딩되어</a:t>
             </a:r>
             <a:r>
-              <a:rPr lang="ko-KR" altLang="en-US" baseline="0" dirty="0" smtClean="0"/>
-              <a:t> 있지 </a:t>
-            </a:r>
-            <a:r>
-              <a:rPr lang="ko-KR" altLang="en-US" baseline="0" dirty="0" smtClean="0"/>
-              <a:t>않음</a:t>
-            </a:r>
-            <a:endParaRPr lang="en-US" altLang="ko-KR" baseline="0" dirty="0" smtClean="0"/>
-          </a:p>
-          <a:p>
-            <a:endParaRPr lang="en-US" altLang="ko-KR" baseline="0" dirty="0" smtClean="0"/>
-          </a:p>
-          <a:p>
-            <a:r>
-              <a:rPr lang="en-US" altLang="ko-KR" baseline="0" dirty="0" smtClean="0"/>
+              <a:rPr lang="ko-KR" altLang="en-US" baseline="0" dirty="0"/>
+              <a:t> 있지 않음</a:t>
+            </a:r>
+            <a:endParaRPr lang="en-US" altLang="ko-KR" baseline="0" dirty="0"/>
+          </a:p>
+          <a:p>
+            <a:endParaRPr lang="en-US" altLang="ko-KR" baseline="0" dirty="0"/>
+          </a:p>
+          <a:p>
+            <a:r>
+              <a:rPr lang="en-US" altLang="ko-KR" baseline="0" dirty="0"/>
               <a:t>**</a:t>
             </a:r>
           </a:p>
           <a:p>
             <a:r>
-              <a:rPr lang="en-US" altLang="ko-KR" baseline="0" dirty="0" smtClean="0"/>
+              <a:rPr lang="en-US" altLang="ko-KR" baseline="0" dirty="0"/>
               <a:t>‘bind’ </a:t>
             </a:r>
             <a:r>
-              <a:rPr lang="ko-KR" altLang="en-US" baseline="0" dirty="0" smtClean="0"/>
+              <a:rPr lang="ko-KR" altLang="en-US" baseline="0" dirty="0"/>
               <a:t>메서드로 </a:t>
             </a:r>
             <a:r>
-              <a:rPr lang="en-US" altLang="ko-KR" baseline="0" dirty="0" smtClean="0"/>
+              <a:rPr lang="en-US" altLang="ko-KR" baseline="0" dirty="0"/>
               <a:t>‘this’ </a:t>
             </a:r>
             <a:r>
-              <a:rPr lang="ko-KR" altLang="en-US" baseline="0" dirty="0" smtClean="0"/>
+              <a:rPr lang="ko-KR" altLang="en-US" baseline="0" dirty="0"/>
               <a:t>바인딩</a:t>
             </a:r>
-            <a:endParaRPr lang="en-US" altLang="ko-KR" baseline="0" dirty="0" smtClean="0"/>
-          </a:p>
-          <a:p>
-            <a:endParaRPr lang="en-US" altLang="ko-KR" dirty="0" smtClean="0"/>
-          </a:p>
-          <a:p>
-            <a:r>
-              <a:rPr lang="en-US" altLang="ko-KR" dirty="0" smtClean="0"/>
+            <a:endParaRPr lang="en-US" altLang="ko-KR" baseline="0" dirty="0"/>
+          </a:p>
+          <a:p>
+            <a:endParaRPr lang="en-US" altLang="ko-KR" dirty="0"/>
+          </a:p>
+          <a:p>
+            <a:r>
+              <a:rPr lang="en-US" altLang="ko-KR" dirty="0"/>
               <a:t>*** </a:t>
             </a:r>
             <a:r>
-              <a:rPr lang="ko-KR" altLang="en-US" dirty="0" smtClean="0"/>
+              <a:rPr lang="ko-KR" altLang="en-US" dirty="0"/>
               <a:t>바인딩이란</a:t>
             </a:r>
             <a:r>
-              <a:rPr lang="en-US" altLang="ko-KR" dirty="0" smtClean="0"/>
+              <a:rPr lang="en-US" altLang="ko-KR" dirty="0"/>
               <a:t>?</a:t>
             </a:r>
             <a:r>
-              <a:rPr lang="en-US" altLang="ko-KR" baseline="0" dirty="0" smtClean="0"/>
+              <a:rPr lang="en-US" altLang="ko-KR" baseline="0" dirty="0"/>
               <a:t> (Binding)</a:t>
             </a:r>
           </a:p>
@@ -1229,19 +1224,19 @@
               <a:buChar char="-"/>
             </a:pPr>
             <a:r>
-              <a:rPr lang="ko-KR" altLang="en-US" baseline="0" dirty="0" smtClean="0"/>
+              <a:rPr lang="ko-KR" altLang="en-US" baseline="0" dirty="0"/>
               <a:t>프로그램의 어떤 기본단위가 가질 수 있는 구성요소의 구체적인 값</a:t>
             </a:r>
             <a:r>
-              <a:rPr lang="en-US" altLang="ko-KR" baseline="0" dirty="0" smtClean="0"/>
+              <a:rPr lang="en-US" altLang="ko-KR" baseline="0" dirty="0"/>
               <a:t>, </a:t>
             </a:r>
             <a:r>
-              <a:rPr lang="ko-KR" altLang="en-US" baseline="0" dirty="0" smtClean="0"/>
+              <a:rPr lang="ko-KR" altLang="en-US" baseline="0" dirty="0"/>
               <a:t>성격을 확정하는 것</a:t>
             </a:r>
             <a:r>
-              <a:rPr lang="en-US" altLang="ko-KR" baseline="0" dirty="0" smtClean="0"/>
+              <a:rPr lang="en-US" altLang="ko-KR" baseline="0" dirty="0"/>
               <a:t>!</a:t>
             </a:r>
           </a:p>
@@ -1251,15 +1246,15 @@
               <a:buChar char="-"/>
             </a:pPr>
             <a:r>
-              <a:rPr lang="en-US" altLang="ko-KR" baseline="0" dirty="0" smtClean="0"/>
+              <a:rPr lang="en-US" altLang="ko-KR" baseline="0" dirty="0"/>
               <a:t>‘this’</a:t>
             </a:r>
             <a:r>
-              <a:rPr lang="ko-KR" altLang="en-US" baseline="0" dirty="0" smtClean="0"/>
+              <a:rPr lang="ko-KR" altLang="en-US" baseline="0" dirty="0"/>
               <a:t>는 함수가 호출되는 방식에 따라 달라짐</a:t>
             </a:r>
             <a:r>
-              <a:rPr lang="en-US" altLang="ko-KR" baseline="0" dirty="0" smtClean="0"/>
+              <a:rPr lang="en-US" altLang="ko-KR" baseline="0" dirty="0"/>
               <a:t>.</a:t>
             </a:r>
           </a:p>
@@ -1269,19 +1264,19 @@
               <a:buChar char="-"/>
             </a:pPr>
             <a:r>
-              <a:rPr lang="ko-KR" altLang="en-US" baseline="0" dirty="0" smtClean="0"/>
+              <a:rPr lang="ko-KR" altLang="en-US" baseline="0" dirty="0"/>
               <a:t>즉</a:t>
             </a:r>
             <a:r>
-              <a:rPr lang="en-US" altLang="ko-KR" baseline="0" dirty="0" smtClean="0"/>
+              <a:rPr lang="en-US" altLang="ko-KR" baseline="0" dirty="0"/>
               <a:t>, ‘this’</a:t>
             </a:r>
             <a:r>
-              <a:rPr lang="ko-KR" altLang="en-US" baseline="0" dirty="0" smtClean="0"/>
+              <a:rPr lang="ko-KR" altLang="en-US" baseline="0" dirty="0"/>
               <a:t>가 무엇을 가리키는지 명확하게 해주기 위해 바인딩이 필요</a:t>
             </a:r>
             <a:r>
-              <a:rPr lang="en-US" altLang="ko-KR" baseline="0" dirty="0" smtClean="0"/>
+              <a:rPr lang="en-US" altLang="ko-KR" baseline="0" dirty="0"/>
               <a:t>.</a:t>
             </a:r>
           </a:p>
@@ -1291,15 +1286,15 @@
               <a:buChar char="-"/>
             </a:pPr>
             <a:r>
-              <a:rPr lang="en-US" altLang="ko-KR" dirty="0" smtClean="0"/>
+              <a:rPr lang="en-US" altLang="ko-KR" dirty="0"/>
               <a:t>this</a:t>
             </a:r>
             <a:r>
-              <a:rPr lang="ko-KR" altLang="en-US" dirty="0" smtClean="0"/>
+              <a:rPr lang="ko-KR" altLang="en-US" dirty="0"/>
               <a:t>가 올바른 객체를 가리키도록 설정하는 작업</a:t>
             </a:r>
             <a:r>
-              <a:rPr lang="en-US" altLang="ko-KR" dirty="0" smtClean="0"/>
+              <a:rPr lang="en-US" altLang="ko-KR" dirty="0"/>
               <a:t>.</a:t>
             </a:r>
           </a:p>
@@ -1308,24 +1303,24 @@
               <a:buFontTx/>
               <a:buChar char="-"/>
             </a:pPr>
-            <a:endParaRPr lang="en-US" altLang="ko-KR" dirty="0" smtClean="0"/>
-          </a:p>
-          <a:p>
-            <a:r>
-              <a:rPr lang="en-US" altLang="ko-KR" dirty="0" smtClean="0"/>
+            <a:endParaRPr lang="en-US" altLang="ko-KR" dirty="0"/>
+          </a:p>
+          <a:p>
+            <a:r>
+              <a:rPr lang="en-US" altLang="ko-KR" dirty="0"/>
               <a:t>**</a:t>
             </a:r>
           </a:p>
           <a:p>
             <a:r>
-              <a:rPr lang="en-US" altLang="ko-KR" dirty="0" smtClean="0"/>
+              <a:rPr lang="en-US" altLang="ko-KR" dirty="0"/>
               <a:t>‘bind’ </a:t>
             </a:r>
             <a:r>
-              <a:rPr lang="ko-KR" altLang="en-US" dirty="0" smtClean="0"/>
+              <a:rPr lang="ko-KR" altLang="en-US" dirty="0"/>
               <a:t>피하기 위한 방법</a:t>
             </a:r>
-            <a:endParaRPr lang="en-US" altLang="ko-KR" dirty="0" smtClean="0"/>
+            <a:endParaRPr lang="en-US" altLang="ko-KR" dirty="0"/>
           </a:p>
           <a:p>
             <a:pPr marL="171450" indent="-171450">
@@ -1333,19 +1328,19 @@
               <a:buChar char="-"/>
             </a:pPr>
             <a:r>
-              <a:rPr lang="ko-KR" altLang="en-US" dirty="0" smtClean="0"/>
+              <a:rPr lang="ko-KR" altLang="en-US" dirty="0"/>
               <a:t>매번 </a:t>
             </a:r>
             <a:r>
-              <a:rPr lang="en-US" altLang="ko-KR" dirty="0" smtClean="0"/>
+              <a:rPr lang="en-US" altLang="ko-KR" dirty="0"/>
               <a:t>‘bind’</a:t>
             </a:r>
             <a:r>
-              <a:rPr lang="ko-KR" altLang="en-US" dirty="0" smtClean="0"/>
+              <a:rPr lang="ko-KR" altLang="en-US" dirty="0"/>
               <a:t>를 사용하는 것이 번거롭다면</a:t>
             </a:r>
             <a:r>
-              <a:rPr lang="en-US" altLang="ko-KR" dirty="0" smtClean="0"/>
+              <a:rPr lang="en-US" altLang="ko-KR" dirty="0"/>
               <a:t>,</a:t>
             </a:r>
           </a:p>
@@ -1355,19 +1350,19 @@
               <a:buNone/>
             </a:pPr>
             <a:r>
-              <a:rPr lang="en-US" altLang="ko-KR" dirty="0" smtClean="0"/>
+              <a:rPr lang="en-US" altLang="ko-KR" dirty="0"/>
               <a:t>#1</a:t>
             </a:r>
             <a:r>
-              <a:rPr lang="en-US" altLang="ko-KR" baseline="0" dirty="0" smtClean="0"/>
+              <a:rPr lang="en-US" altLang="ko-KR" baseline="0" dirty="0"/>
               <a:t> </a:t>
             </a:r>
             <a:r>
-              <a:rPr lang="ko-KR" altLang="en-US" baseline="0" dirty="0" smtClean="0"/>
+              <a:rPr lang="ko-KR" altLang="en-US" baseline="0" dirty="0"/>
               <a:t>화살표 함수 이용</a:t>
             </a:r>
             <a:r>
-              <a:rPr lang="en-US" altLang="ko-KR" baseline="0" dirty="0" smtClean="0"/>
+              <a:rPr lang="en-US" altLang="ko-KR" baseline="0" dirty="0"/>
               <a:t>.</a:t>
             </a:r>
           </a:p>
@@ -1377,39 +1372,39 @@
               <a:buNone/>
             </a:pPr>
             <a:r>
-              <a:rPr lang="en-US" altLang="ko-KR" baseline="0" dirty="0" smtClean="0"/>
+              <a:rPr lang="en-US" altLang="ko-KR" baseline="0" dirty="0"/>
               <a:t>-&gt; </a:t>
             </a:r>
             <a:r>
-              <a:rPr lang="ko-KR" altLang="en-US" baseline="0" dirty="0" smtClean="0"/>
+              <a:rPr lang="ko-KR" altLang="en-US" baseline="0" dirty="0"/>
               <a:t>화살표 함수를 사용하면 </a:t>
             </a:r>
             <a:r>
-              <a:rPr lang="en-US" altLang="ko-KR" baseline="0" dirty="0" smtClean="0"/>
+              <a:rPr lang="en-US" altLang="ko-KR" baseline="0" dirty="0"/>
               <a:t>‘this’</a:t>
             </a:r>
             <a:r>
-              <a:rPr lang="ko-KR" altLang="en-US" baseline="0" dirty="0" smtClean="0"/>
+              <a:rPr lang="ko-KR" altLang="en-US" baseline="0" dirty="0"/>
               <a:t>가 자동으로 바인딩 되므로 </a:t>
             </a:r>
             <a:r>
-              <a:rPr lang="en-US" altLang="ko-KR" baseline="0" dirty="0" smtClean="0"/>
+              <a:rPr lang="en-US" altLang="ko-KR" baseline="0" dirty="0"/>
               <a:t>‘bind’</a:t>
             </a:r>
             <a:r>
-              <a:rPr lang="ko-KR" altLang="en-US" baseline="0" dirty="0" smtClean="0"/>
+              <a:rPr lang="ko-KR" altLang="en-US" baseline="0" dirty="0"/>
               <a:t>를</a:t>
             </a:r>
             <a:r>
-              <a:rPr lang="en-US" altLang="ko-KR" baseline="0" dirty="0" smtClean="0"/>
+              <a:rPr lang="en-US" altLang="ko-KR" baseline="0" dirty="0"/>
               <a:t> </a:t>
             </a:r>
             <a:r>
-              <a:rPr lang="ko-KR" altLang="en-US" baseline="0" dirty="0" smtClean="0"/>
+              <a:rPr lang="ko-KR" altLang="en-US" baseline="0" dirty="0"/>
               <a:t>사용할 필요가 없음</a:t>
             </a:r>
             <a:r>
-              <a:rPr lang="en-US" altLang="ko-KR" baseline="0" dirty="0" smtClean="0"/>
+              <a:rPr lang="en-US" altLang="ko-KR" baseline="0" dirty="0"/>
               <a:t>.</a:t>
             </a:r>
           </a:p>
@@ -1418,7 +1413,7 @@
               <a:buFontTx/>
               <a:buNone/>
             </a:pPr>
-            <a:endParaRPr lang="en-US" altLang="ko-KR" baseline="0" dirty="0" smtClean="0"/>
+            <a:endParaRPr lang="en-US" altLang="ko-KR" baseline="0" dirty="0"/>
           </a:p>
           <a:p>
             <a:pPr marL="0" indent="0">
@@ -1426,18 +1421,18 @@
               <a:buNone/>
             </a:pPr>
             <a:r>
-              <a:rPr lang="en-US" altLang="ko-KR" baseline="0" dirty="0" smtClean="0"/>
+              <a:rPr lang="en-US" altLang="ko-KR" baseline="0" dirty="0"/>
               <a:t>#2 </a:t>
             </a:r>
             <a:r>
-              <a:rPr lang="ko-KR" altLang="en-US" baseline="0" dirty="0" err="1" smtClean="0"/>
+              <a:rPr lang="ko-KR" altLang="en-US" baseline="0" dirty="0" err="1"/>
               <a:t>생성자에게</a:t>
             </a:r>
             <a:r>
-              <a:rPr lang="ko-KR" altLang="en-US" baseline="0" dirty="0" smtClean="0"/>
+              <a:rPr lang="ko-KR" altLang="en-US" baseline="0" dirty="0"/>
               <a:t> 바인딩하기</a:t>
             </a:r>
-            <a:endParaRPr lang="en-US" altLang="ko-KR" baseline="0" dirty="0" smtClean="0"/>
+            <a:endParaRPr lang="en-US" altLang="ko-KR" baseline="0" dirty="0"/>
           </a:p>
           <a:p>
             <a:pPr marL="0" indent="0">
@@ -1445,51 +1440,51 @@
               <a:buNone/>
             </a:pPr>
             <a:r>
-              <a:rPr lang="en-US" altLang="ko-KR" dirty="0" smtClean="0"/>
+              <a:rPr lang="en-US" altLang="ko-KR" dirty="0"/>
               <a:t>-&gt; </a:t>
             </a:r>
             <a:r>
-              <a:rPr lang="ko-KR" altLang="en-US" dirty="0" err="1" smtClean="0"/>
+              <a:rPr lang="ko-KR" altLang="en-US" dirty="0" err="1"/>
               <a:t>생성자에서</a:t>
             </a:r>
             <a:r>
-              <a:rPr lang="ko-KR" altLang="en-US" dirty="0" smtClean="0"/>
+              <a:rPr lang="ko-KR" altLang="en-US" dirty="0"/>
               <a:t> 한 번만 </a:t>
             </a:r>
             <a:r>
-              <a:rPr lang="en-US" altLang="ko-KR" dirty="0" smtClean="0"/>
+              <a:rPr lang="en-US" altLang="ko-KR" dirty="0"/>
               <a:t>bind</a:t>
             </a:r>
             <a:r>
-              <a:rPr lang="ko-KR" altLang="en-US" dirty="0" smtClean="0"/>
+              <a:rPr lang="ko-KR" altLang="en-US" dirty="0"/>
               <a:t>를 해두면</a:t>
             </a:r>
             <a:r>
-              <a:rPr lang="en-US" altLang="ko-KR" dirty="0" smtClean="0"/>
+              <a:rPr lang="en-US" altLang="ko-KR" dirty="0"/>
               <a:t>, </a:t>
             </a:r>
             <a:r>
-              <a:rPr lang="ko-KR" altLang="en-US" dirty="0" smtClean="0"/>
+              <a:rPr lang="ko-KR" altLang="en-US" dirty="0"/>
               <a:t>나중에 </a:t>
             </a:r>
             <a:r>
-              <a:rPr lang="en-US" altLang="ko-KR" dirty="0" smtClean="0"/>
+              <a:rPr lang="en-US" altLang="ko-KR" dirty="0"/>
               <a:t>render </a:t>
             </a:r>
             <a:r>
-              <a:rPr lang="ko-KR" altLang="en-US" dirty="0" smtClean="0"/>
+              <a:rPr lang="ko-KR" altLang="en-US" dirty="0"/>
               <a:t>메서드에서 반복적으로 </a:t>
             </a:r>
             <a:r>
-              <a:rPr lang="en-US" altLang="ko-KR" dirty="0" smtClean="0"/>
+              <a:rPr lang="en-US" altLang="ko-KR" dirty="0"/>
               <a:t>bind</a:t>
             </a:r>
             <a:r>
-              <a:rPr lang="ko-KR" altLang="en-US" dirty="0" smtClean="0"/>
+              <a:rPr lang="ko-KR" altLang="en-US" dirty="0"/>
               <a:t>할 필요가 없습니다</a:t>
             </a:r>
             <a:r>
-              <a:rPr lang="en-US" altLang="ko-KR" dirty="0" smtClean="0"/>
+              <a:rPr lang="en-US" altLang="ko-KR" dirty="0"/>
               <a:t>.</a:t>
             </a:r>
             <a:endParaRPr lang="ko-KR" altLang="en-US" dirty="0"/>
@@ -1744,11 +1739,7 @@
           <a:bodyPr/>
           <a:lstStyle/>
           <a:p>
-            <a:r>
-              <a:rPr lang="en-US" altLang="ko-KR" dirty="0"/>
-              <a:t>04_eventhandling</a:t>
-            </a:r>
-            <a:endParaRPr lang="ko-KR" altLang="en-US" dirty="0"/>
+            <a:endParaRPr lang="en-US" altLang="ko-KR" dirty="0"/>
           </a:p>
         </p:txBody>
       </p:sp>
@@ -1778,7 +1769,7 @@
     </p:spTree>
     <p:extLst>
       <p:ext uri="{BB962C8B-B14F-4D97-AF65-F5344CB8AC3E}">
-        <p14:creationId xmlns:p14="http://schemas.microsoft.com/office/powerpoint/2010/main" val="771570096"/>
+        <p14:creationId xmlns:p14="http://schemas.microsoft.com/office/powerpoint/2010/main" val="1832612303"/>
       </p:ext>
     </p:extLst>
   </p:cSld>
@@ -1832,7 +1823,11 @@
           <a:bodyPr/>
           <a:lstStyle/>
           <a:p>
-            <a:endParaRPr lang="en-US" altLang="ko-KR" dirty="0"/>
+            <a:r>
+              <a:rPr lang="en-US" altLang="ko-KR" dirty="0"/>
+              <a:t>04_eventhandling</a:t>
+            </a:r>
+            <a:endParaRPr lang="ko-KR" altLang="en-US" dirty="0"/>
           </a:p>
         </p:txBody>
       </p:sp>
@@ -1862,7 +1857,7 @@
     </p:spTree>
     <p:extLst>
       <p:ext uri="{BB962C8B-B14F-4D97-AF65-F5344CB8AC3E}">
-        <p14:creationId xmlns:p14="http://schemas.microsoft.com/office/powerpoint/2010/main" val="1832612303"/>
+        <p14:creationId xmlns:p14="http://schemas.microsoft.com/office/powerpoint/2010/main" val="771570096"/>
       </p:ext>
     </p:extLst>
   </p:cSld>
@@ -5655,264 +5650,6 @@
       </p:grpSpPr>
       <p:sp>
         <p:nvSpPr>
-          <p:cNvPr id="4" name="날짜 개체 틀 3">
-            <a:extLst>
-              <a:ext uri="{FF2B5EF4-FFF2-40B4-BE49-F238E27FC236}">
-                <a16:creationId xmlns:a16="http://schemas.microsoft.com/office/drawing/2014/main" id="{6EE9B434-8977-A422-69B8-4F63EBA503FB}"/>
-              </a:ext>
-            </a:extLst>
-          </p:cNvPr>
-          <p:cNvSpPr>
-            <a:spLocks noGrp="1"/>
-          </p:cNvSpPr>
-          <p:nvPr>
-            <p:ph type="dt" sz="half" idx="10"/>
-          </p:nvPr>
-        </p:nvSpPr>
-        <p:spPr/>
-        <p:txBody>
-          <a:bodyPr/>
-          <a:lstStyle/>
-          <a:p>
-            <a:fld id="{F5DECA0C-8384-4A80-8CAF-F40503FCCF4C}" type="datetime6">
-              <a:rPr lang="ko-KR" altLang="en-US" smtClean="0"/>
-              <a:t>2024년 8월</a:t>
-            </a:fld>
-            <a:endParaRPr lang="ko-KR" altLang="en-US"/>
-          </a:p>
-        </p:txBody>
-      </p:sp>
-      <p:sp>
-        <p:nvSpPr>
-          <p:cNvPr id="5" name="슬라이드 번호 개체 틀 4">
-            <a:extLst>
-              <a:ext uri="{FF2B5EF4-FFF2-40B4-BE49-F238E27FC236}">
-                <a16:creationId xmlns:a16="http://schemas.microsoft.com/office/drawing/2014/main" id="{75E3E9B0-C628-12AF-B688-62BAA3A8B414}"/>
-              </a:ext>
-            </a:extLst>
-          </p:cNvPr>
-          <p:cNvSpPr>
-            <a:spLocks noGrp="1"/>
-          </p:cNvSpPr>
-          <p:nvPr>
-            <p:ph type="sldNum" sz="quarter" idx="12"/>
-          </p:nvPr>
-        </p:nvSpPr>
-        <p:spPr/>
-        <p:txBody>
-          <a:bodyPr/>
-          <a:lstStyle/>
-          <a:p>
-            <a:fld id="{083A2CE0-18CD-4102-B738-4ACFF9E68BA4}" type="slidenum">
-              <a:rPr lang="ko-KR" altLang="en-US" smtClean="0"/>
-              <a:t>10</a:t>
-            </a:fld>
-            <a:endParaRPr lang="ko-KR" altLang="en-US"/>
-          </a:p>
-        </p:txBody>
-      </p:sp>
-      <p:sp>
-        <p:nvSpPr>
-          <p:cNvPr id="2" name="제목 1">
-            <a:extLst>
-              <a:ext uri="{FF2B5EF4-FFF2-40B4-BE49-F238E27FC236}">
-                <a16:creationId xmlns:a16="http://schemas.microsoft.com/office/drawing/2014/main" id="{6C705268-880D-AF4E-8A90-8B152EB81097}"/>
-              </a:ext>
-            </a:extLst>
-          </p:cNvPr>
-          <p:cNvSpPr>
-            <a:spLocks noGrp="1"/>
-          </p:cNvSpPr>
-          <p:nvPr>
-            <p:ph type="title"/>
-          </p:nvPr>
-        </p:nvSpPr>
-        <p:spPr/>
-        <p:txBody>
-          <a:bodyPr/>
-          <a:lstStyle/>
-          <a:p>
-            <a:r>
-              <a:rPr lang="ko-KR" altLang="en-US" dirty="0">
-                <a:solidFill>
-                  <a:schemeClr val="accent1"/>
-                </a:solidFill>
-              </a:rPr>
-              <a:t>실습</a:t>
-            </a:r>
-            <a:r>
-              <a:rPr lang="en-US" altLang="ko-KR" dirty="0">
-                <a:solidFill>
-                  <a:schemeClr val="accent1"/>
-                </a:solidFill>
-              </a:rPr>
-              <a:t>.</a:t>
-            </a:r>
-            <a:r>
-              <a:rPr lang="ko-KR" altLang="en-US" dirty="0">
-                <a:solidFill>
-                  <a:schemeClr val="accent1"/>
-                </a:solidFill>
-              </a:rPr>
-              <a:t> </a:t>
-            </a:r>
-            <a:r>
-              <a:rPr lang="ko-KR" altLang="en-US" dirty="0" smtClean="0"/>
-              <a:t>종합 실습 </a:t>
-            </a:r>
-            <a:r>
-              <a:rPr lang="en-US" altLang="ko-KR" dirty="0" smtClean="0"/>
-              <a:t>(props, state, event)</a:t>
-            </a:r>
-            <a:endParaRPr lang="ko-KR" altLang="en-US" dirty="0"/>
-          </a:p>
-        </p:txBody>
-      </p:sp>
-      <p:pic>
-        <p:nvPicPr>
-          <p:cNvPr id="3" name="20230927-0126-48.7395426">
-            <a:hlinkClick r:id="" action="ppaction://media"/>
-          </p:cNvPr>
-          <p:cNvPicPr>
-            <a:picLocks noChangeAspect="1"/>
-          </p:cNvPicPr>
-          <p:nvPr>
-            <a:videoFile r:link="rId2"/>
-            <p:extLst>
-              <p:ext uri="{DAA4B4D4-6D71-4841-9C94-3DE7FCFB9230}">
-                <p14:media xmlns:p14="http://schemas.microsoft.com/office/powerpoint/2010/main" r:embed="rId1"/>
-              </p:ext>
-            </p:extLst>
-          </p:nvPr>
-        </p:nvPicPr>
-        <p:blipFill>
-          <a:blip r:embed="rId5"/>
-          <a:stretch>
-            <a:fillRect/>
-          </a:stretch>
-        </p:blipFill>
-        <p:spPr>
-          <a:xfrm>
-            <a:off x="3514543" y="1816372"/>
-            <a:ext cx="4871811" cy="3264361"/>
-          </a:xfrm>
-          <a:prstGeom prst="rect">
-            <a:avLst/>
-          </a:prstGeom>
-        </p:spPr>
-      </p:pic>
-    </p:spTree>
-    <p:extLst>
-      <p:ext uri="{BB962C8B-B14F-4D97-AF65-F5344CB8AC3E}">
-        <p14:creationId xmlns:p14="http://schemas.microsoft.com/office/powerpoint/2010/main" val="3120877233"/>
-      </p:ext>
-    </p:extLst>
-  </p:cSld>
-  <p:clrMapOvr>
-    <a:masterClrMapping/>
-  </p:clrMapOvr>
-  <p:timing>
-    <p:tnLst>
-      <p:par>
-        <p:cTn id="1" dur="indefinite" restart="never" nodeType="tmRoot">
-          <p:childTnLst>
-            <p:seq concurrent="1" nextAc="seek">
-              <p:cTn id="2" restart="whenNotActive" fill="hold" evtFilter="cancelBubble" nodeType="interactiveSeq">
-                <p:stCondLst>
-                  <p:cond evt="onClick" delay="0">
-                    <p:tgtEl>
-                      <p:spTgt spid="3"/>
-                    </p:tgtEl>
-                  </p:cond>
-                </p:stCondLst>
-                <p:endSync evt="end" delay="0">
-                  <p:rtn val="all"/>
-                </p:endSync>
-                <p:childTnLst>
-                  <p:par>
-                    <p:cTn id="3" fill="hold">
-                      <p:stCondLst>
-                        <p:cond delay="0"/>
-                      </p:stCondLst>
-                      <p:childTnLst>
-                        <p:par>
-                          <p:cTn id="4" fill="hold">
-                            <p:stCondLst>
-                              <p:cond delay="0"/>
-                            </p:stCondLst>
-                            <p:childTnLst>
-                              <p:par>
-                                <p:cTn id="5" presetID="2" presetClass="mediacall" presetSubtype="0" fill="hold" nodeType="clickEffect">
-                                  <p:stCondLst>
-                                    <p:cond delay="0"/>
-                                  </p:stCondLst>
-                                  <p:childTnLst>
-                                    <p:cmd type="call" cmd="togglePause">
-                                      <p:cBhvr>
-                                        <p:cTn id="6" dur="1" fill="hold"/>
-                                        <p:tgtEl>
-                                          <p:spTgt spid="3"/>
-                                        </p:tgtEl>
-                                      </p:cBhvr>
-                                    </p:cmd>
-                                  </p:childTnLst>
-                                </p:cTn>
-                              </p:par>
-                            </p:childTnLst>
-                          </p:cTn>
-                        </p:par>
-                      </p:childTnLst>
-                    </p:cTn>
-                  </p:par>
-                </p:childTnLst>
-              </p:cTn>
-              <p:nextCondLst>
-                <p:cond evt="onClick" delay="0">
-                  <p:tgtEl>
-                    <p:spTgt spid="3"/>
-                  </p:tgtEl>
-                </p:cond>
-              </p:nextCondLst>
-            </p:seq>
-            <p:video>
-              <p:cMediaNode vol="80000">
-                <p:cTn id="7" fill="hold" display="0">
-                  <p:stCondLst>
-                    <p:cond delay="indefinite"/>
-                  </p:stCondLst>
-                </p:cTn>
-                <p:tgtEl>
-                  <p:spTgt spid="3"/>
-                </p:tgtEl>
-              </p:cMediaNode>
-            </p:video>
-          </p:childTnLst>
-        </p:cTn>
-      </p:par>
-    </p:tnLst>
-  </p:timing>
-</p:sld>
-</file>
-
-<file path=ppt/slides/slide11.xml><?xml version="1.0" encoding="utf-8"?>
-<p:sld xmlns:a="http://schemas.openxmlformats.org/drawingml/2006/main" xmlns:r="http://schemas.openxmlformats.org/officeDocument/2006/relationships" xmlns:p="http://schemas.openxmlformats.org/presentationml/2006/main">
-  <p:cSld>
-    <p:spTree>
-      <p:nvGrpSpPr>
-        <p:cNvPr id="1" name=""/>
-        <p:cNvGrpSpPr/>
-        <p:nvPr/>
-      </p:nvGrpSpPr>
-      <p:grpSpPr>
-        <a:xfrm>
-          <a:off x="0" y="0"/>
-          <a:ext cx="0" cy="0"/>
-          <a:chOff x="0" y="0"/>
-          <a:chExt cx="0" cy="0"/>
-        </a:xfrm>
-      </p:grpSpPr>
-      <p:sp>
-        <p:nvSpPr>
           <p:cNvPr id="13" name="내용 개체 틀 2">
             <a:extLst>
               <a:ext uri="{FF2B5EF4-FFF2-40B4-BE49-F238E27FC236}">
@@ -6004,7 +5741,7 @@
           <a:p>
             <a:fld id="{083A2CE0-18CD-4102-B738-4ACFF9E68BA4}" type="slidenum">
               <a:rPr lang="ko-KR" altLang="en-US" smtClean="0"/>
-              <a:t>11</a:t>
+              <a:t>10</a:t>
             </a:fld>
             <a:endParaRPr lang="ko-KR" altLang="en-US"/>
           </a:p>
@@ -6052,11 +5789,11 @@
               <a:t> </a:t>
             </a:r>
             <a:r>
-              <a:rPr lang="ko-KR" altLang="en-US" dirty="0" smtClean="0"/>
+              <a:rPr lang="ko-KR" altLang="en-US" dirty="0"/>
               <a:t>이벤트 핸들링</a:t>
             </a:r>
             <a:r>
-              <a:rPr lang="en-US" altLang="ko-KR" dirty="0" smtClean="0"/>
+              <a:rPr lang="en-US" altLang="ko-KR" dirty="0"/>
               <a:t> </a:t>
             </a:r>
             <a:r>
@@ -6327,15 +6064,6 @@
               </a:rPr>
               <a:t>강의 클릭</a:t>
             </a:r>
-            <a:r>
-              <a:rPr lang="en-US" altLang="ko-KR" dirty="0">
-                <a:solidFill>
-                  <a:srgbClr val="212529"/>
-                </a:solidFill>
-                <a:latin typeface="+mn-ea"/>
-              </a:rPr>
-              <a:t/>
-            </a:r>
             <a:br>
               <a:rPr lang="en-US" altLang="ko-KR" dirty="0">
                 <a:solidFill>
@@ -6363,7 +6091,7 @@
               <a:t>➡ </a:t>
             </a:r>
             <a:r>
-              <a:rPr lang="en-US" altLang="ko-KR" sz="2800" b="1" dirty="0" smtClean="0">
+              <a:rPr lang="en-US" altLang="ko-KR" sz="2800" b="1" dirty="0">
                 <a:solidFill>
                   <a:srgbClr val="212529"/>
                 </a:solidFill>
@@ -6372,22 +6100,13 @@
               <a:t>[</a:t>
             </a:r>
             <a:r>
-              <a:rPr lang="ko-KR" altLang="en-US" sz="2800" b="1" dirty="0" smtClean="0">
-                <a:solidFill>
-                  <a:srgbClr val="212529"/>
-                </a:solidFill>
-                <a:latin typeface="+mn-ea"/>
-              </a:rPr>
-              <a:t>이벤트 핸들링 </a:t>
-            </a:r>
-            <a:r>
               <a:rPr lang="ko-KR" altLang="en-US" sz="2800" b="1" dirty="0">
                 <a:solidFill>
                   <a:srgbClr val="212529"/>
                 </a:solidFill>
                 <a:latin typeface="+mn-ea"/>
               </a:rPr>
-              <a:t>실습</a:t>
+              <a:t>이벤트 핸들링 실습</a:t>
             </a:r>
             <a:r>
               <a:rPr lang="en-US" altLang="ko-KR" sz="2800" b="1" dirty="0">
@@ -6441,25 +6160,7 @@
                 </a:solidFill>
                 <a:latin typeface="+mn-ea"/>
               </a:rPr>
-              <a:t>[</a:t>
-            </a:r>
-            <a:r>
-              <a:rPr lang="en-US" altLang="ko-KR" sz="2800" b="1" dirty="0" smtClean="0">
-                <a:solidFill>
-                  <a:schemeClr val="accent1"/>
-                </a:solidFill>
-                <a:latin typeface="+mn-ea"/>
-              </a:rPr>
-              <a:t>1~3</a:t>
-            </a:r>
-            <a:r>
-              <a:rPr lang="ko-KR" altLang="en-US" sz="2800" b="1" dirty="0" smtClean="0">
-                <a:solidFill>
-                  <a:schemeClr val="accent1"/>
-                </a:solidFill>
-                <a:latin typeface="+mn-ea"/>
-              </a:rPr>
-              <a:t>번 </a:t>
+              <a:t>[1~3</a:t>
             </a:r>
             <a:r>
               <a:rPr lang="ko-KR" altLang="en-US" sz="2800" b="1" dirty="0">
@@ -6468,7 +6169,7 @@
                 </a:solidFill>
                 <a:latin typeface="+mn-ea"/>
               </a:rPr>
-              <a:t>문제</a:t>
+              <a:t>번 문제</a:t>
             </a:r>
             <a:r>
               <a:rPr lang="en-US" altLang="ko-KR" sz="2800" b="1" dirty="0">
@@ -6510,6 +6211,264 @@
   <p:clrMapOvr>
     <a:masterClrMapping/>
   </p:clrMapOvr>
+</p:sld>
+</file>
+
+<file path=ppt/slides/slide11.xml><?xml version="1.0" encoding="utf-8"?>
+<p:sld xmlns:a="http://schemas.openxmlformats.org/drawingml/2006/main" xmlns:r="http://schemas.openxmlformats.org/officeDocument/2006/relationships" xmlns:p="http://schemas.openxmlformats.org/presentationml/2006/main">
+  <p:cSld>
+    <p:spTree>
+      <p:nvGrpSpPr>
+        <p:cNvPr id="1" name=""/>
+        <p:cNvGrpSpPr/>
+        <p:nvPr/>
+      </p:nvGrpSpPr>
+      <p:grpSpPr>
+        <a:xfrm>
+          <a:off x="0" y="0"/>
+          <a:ext cx="0" cy="0"/>
+          <a:chOff x="0" y="0"/>
+          <a:chExt cx="0" cy="0"/>
+        </a:xfrm>
+      </p:grpSpPr>
+      <p:sp>
+        <p:nvSpPr>
+          <p:cNvPr id="4" name="날짜 개체 틀 3">
+            <a:extLst>
+              <a:ext uri="{FF2B5EF4-FFF2-40B4-BE49-F238E27FC236}">
+                <a16:creationId xmlns:a16="http://schemas.microsoft.com/office/drawing/2014/main" id="{6EE9B434-8977-A422-69B8-4F63EBA503FB}"/>
+              </a:ext>
+            </a:extLst>
+          </p:cNvPr>
+          <p:cNvSpPr>
+            <a:spLocks noGrp="1"/>
+          </p:cNvSpPr>
+          <p:nvPr>
+            <p:ph type="dt" sz="half" idx="10"/>
+          </p:nvPr>
+        </p:nvSpPr>
+        <p:spPr/>
+        <p:txBody>
+          <a:bodyPr/>
+          <a:lstStyle/>
+          <a:p>
+            <a:fld id="{F5DECA0C-8384-4A80-8CAF-F40503FCCF4C}" type="datetime6">
+              <a:rPr lang="ko-KR" altLang="en-US" smtClean="0"/>
+              <a:t>2024년 8월</a:t>
+            </a:fld>
+            <a:endParaRPr lang="ko-KR" altLang="en-US"/>
+          </a:p>
+        </p:txBody>
+      </p:sp>
+      <p:sp>
+        <p:nvSpPr>
+          <p:cNvPr id="5" name="슬라이드 번호 개체 틀 4">
+            <a:extLst>
+              <a:ext uri="{FF2B5EF4-FFF2-40B4-BE49-F238E27FC236}">
+                <a16:creationId xmlns:a16="http://schemas.microsoft.com/office/drawing/2014/main" id="{75E3E9B0-C628-12AF-B688-62BAA3A8B414}"/>
+              </a:ext>
+            </a:extLst>
+          </p:cNvPr>
+          <p:cNvSpPr>
+            <a:spLocks noGrp="1"/>
+          </p:cNvSpPr>
+          <p:nvPr>
+            <p:ph type="sldNum" sz="quarter" idx="12"/>
+          </p:nvPr>
+        </p:nvSpPr>
+        <p:spPr/>
+        <p:txBody>
+          <a:bodyPr/>
+          <a:lstStyle/>
+          <a:p>
+            <a:fld id="{083A2CE0-18CD-4102-B738-4ACFF9E68BA4}" type="slidenum">
+              <a:rPr lang="ko-KR" altLang="en-US" smtClean="0"/>
+              <a:t>11</a:t>
+            </a:fld>
+            <a:endParaRPr lang="ko-KR" altLang="en-US"/>
+          </a:p>
+        </p:txBody>
+      </p:sp>
+      <p:sp>
+        <p:nvSpPr>
+          <p:cNvPr id="2" name="제목 1">
+            <a:extLst>
+              <a:ext uri="{FF2B5EF4-FFF2-40B4-BE49-F238E27FC236}">
+                <a16:creationId xmlns:a16="http://schemas.microsoft.com/office/drawing/2014/main" id="{6C705268-880D-AF4E-8A90-8B152EB81097}"/>
+              </a:ext>
+            </a:extLst>
+          </p:cNvPr>
+          <p:cNvSpPr>
+            <a:spLocks noGrp="1"/>
+          </p:cNvSpPr>
+          <p:nvPr>
+            <p:ph type="title"/>
+          </p:nvPr>
+        </p:nvSpPr>
+        <p:spPr/>
+        <p:txBody>
+          <a:bodyPr/>
+          <a:lstStyle/>
+          <a:p>
+            <a:r>
+              <a:rPr lang="ko-KR" altLang="en-US" dirty="0">
+                <a:solidFill>
+                  <a:schemeClr val="accent1"/>
+                </a:solidFill>
+              </a:rPr>
+              <a:t>실습</a:t>
+            </a:r>
+            <a:r>
+              <a:rPr lang="en-US" altLang="ko-KR" dirty="0">
+                <a:solidFill>
+                  <a:schemeClr val="accent1"/>
+                </a:solidFill>
+              </a:rPr>
+              <a:t>.</a:t>
+            </a:r>
+            <a:r>
+              <a:rPr lang="ko-KR" altLang="en-US" dirty="0">
+                <a:solidFill>
+                  <a:schemeClr val="accent1"/>
+                </a:solidFill>
+              </a:rPr>
+              <a:t> </a:t>
+            </a:r>
+            <a:r>
+              <a:rPr lang="ko-KR" altLang="en-US" dirty="0"/>
+              <a:t>종합 실습 </a:t>
+            </a:r>
+            <a:r>
+              <a:rPr lang="en-US" altLang="ko-KR" dirty="0"/>
+              <a:t>(props, state, event)</a:t>
+            </a:r>
+            <a:endParaRPr lang="ko-KR" altLang="en-US" dirty="0"/>
+          </a:p>
+        </p:txBody>
+      </p:sp>
+      <p:pic>
+        <p:nvPicPr>
+          <p:cNvPr id="3" name="20230927-0126-48.7395426">
+            <a:hlinkClick r:id="" action="ppaction://media"/>
+          </p:cNvPr>
+          <p:cNvPicPr>
+            <a:picLocks noChangeAspect="1"/>
+          </p:cNvPicPr>
+          <p:nvPr>
+            <a:videoFile r:link="rId2"/>
+            <p:extLst>
+              <p:ext uri="{DAA4B4D4-6D71-4841-9C94-3DE7FCFB9230}">
+                <p14:media xmlns:p14="http://schemas.microsoft.com/office/powerpoint/2010/main" r:embed="rId1"/>
+              </p:ext>
+            </p:extLst>
+          </p:nvPr>
+        </p:nvPicPr>
+        <p:blipFill>
+          <a:blip r:embed="rId5"/>
+          <a:stretch>
+            <a:fillRect/>
+          </a:stretch>
+        </p:blipFill>
+        <p:spPr>
+          <a:xfrm>
+            <a:off x="3514543" y="1816372"/>
+            <a:ext cx="4871811" cy="3264361"/>
+          </a:xfrm>
+          <a:prstGeom prst="rect">
+            <a:avLst/>
+          </a:prstGeom>
+        </p:spPr>
+      </p:pic>
+    </p:spTree>
+    <p:extLst>
+      <p:ext uri="{BB962C8B-B14F-4D97-AF65-F5344CB8AC3E}">
+        <p14:creationId xmlns:p14="http://schemas.microsoft.com/office/powerpoint/2010/main" val="3120877233"/>
+      </p:ext>
+    </p:extLst>
+  </p:cSld>
+  <p:clrMapOvr>
+    <a:masterClrMapping/>
+  </p:clrMapOvr>
+  <p:timing>
+    <p:tnLst>
+      <p:par>
+        <p:cTn id="1" dur="indefinite" restart="never" nodeType="tmRoot">
+          <p:childTnLst>
+            <p:seq concurrent="1" nextAc="seek">
+              <p:cTn id="2" restart="whenNotActive" fill="hold" evtFilter="cancelBubble" nodeType="interactiveSeq">
+                <p:stCondLst>
+                  <p:cond evt="onClick" delay="0">
+                    <p:tgtEl>
+                      <p:spTgt spid="3"/>
+                    </p:tgtEl>
+                  </p:cond>
+                </p:stCondLst>
+                <p:endSync evt="end" delay="0">
+                  <p:rtn val="all"/>
+                </p:endSync>
+                <p:childTnLst>
+                  <p:par>
+                    <p:cTn id="3" fill="hold">
+                      <p:stCondLst>
+                        <p:cond delay="0"/>
+                      </p:stCondLst>
+                      <p:childTnLst>
+                        <p:par>
+                          <p:cTn id="4" fill="hold">
+                            <p:stCondLst>
+                              <p:cond delay="0"/>
+                            </p:stCondLst>
+                            <p:childTnLst>
+                              <p:par>
+                                <p:cTn id="5" presetID="2" presetClass="mediacall" presetSubtype="0" fill="hold" nodeType="clickEffect">
+                                  <p:stCondLst>
+                                    <p:cond delay="0"/>
+                                  </p:stCondLst>
+                                  <p:childTnLst>
+                                    <p:cmd type="call" cmd="togglePause">
+                                      <p:cBhvr>
+                                        <p:cTn id="6" dur="1" fill="hold"/>
+                                        <p:tgtEl>
+                                          <p:spTgt spid="3"/>
+                                        </p:tgtEl>
+                                      </p:cBhvr>
+                                    </p:cmd>
+                                  </p:childTnLst>
+                                </p:cTn>
+                              </p:par>
+                            </p:childTnLst>
+                          </p:cTn>
+                        </p:par>
+                      </p:childTnLst>
+                    </p:cTn>
+                  </p:par>
+                </p:childTnLst>
+              </p:cTn>
+              <p:nextCondLst>
+                <p:cond evt="onClick" delay="0">
+                  <p:tgtEl>
+                    <p:spTgt spid="3"/>
+                  </p:tgtEl>
+                </p:cond>
+              </p:nextCondLst>
+            </p:seq>
+            <p:video>
+              <p:cMediaNode vol="80000">
+                <p:cTn id="7" fill="hold" display="0">
+                  <p:stCondLst>
+                    <p:cond delay="indefinite"/>
+                  </p:stCondLst>
+                </p:cTn>
+                <p:tgtEl>
+                  <p:spTgt spid="3"/>
+                </p:tgtEl>
+              </p:cMediaNode>
+            </p:video>
+          </p:childTnLst>
+        </p:cTn>
+      </p:par>
+    </p:tnLst>
+  </p:timing>
 </p:sld>
 </file>
 
@@ -6928,10 +6887,6 @@
               <a:rPr lang="ko-KR" altLang="en-US" dirty="0"/>
               <a:t>를 사용</a:t>
             </a:r>
-            <a:r>
-              <a:rPr lang="en-US" altLang="ko-KR" dirty="0"/>
-              <a:t/>
-            </a:r>
             <a:br>
               <a:rPr lang="en-US" altLang="ko-KR" dirty="0"/>
             </a:br>
@@ -6971,10 +6926,6 @@
             <a:r>
               <a:rPr lang="ko-KR" altLang="en-US" dirty="0"/>
               <a:t> 전달</a:t>
-            </a:r>
-            <a:r>
-              <a:rPr lang="en-US" altLang="ko-KR" dirty="0"/>
-              <a:t/>
             </a:r>
             <a:br>
               <a:rPr lang="en-US" altLang="ko-KR" dirty="0"/>
@@ -7383,12 +7334,8 @@
           </a:p>
           <a:p>
             <a:r>
-              <a:rPr lang="ko-KR" altLang="en-US" sz="2400" dirty="0" smtClean="0"/>
-              <a:t>모든 </a:t>
-            </a:r>
-            <a:r>
               <a:rPr lang="ko-KR" altLang="en-US" sz="2400" dirty="0"/>
-              <a:t>브라우저에서 이벤트를 동일하게 처리하기 위한 </a:t>
+              <a:t>모든 브라우저에서 이벤트를 동일하게 처리하기 위한 </a:t>
             </a:r>
             <a:r>
               <a:rPr lang="en-US" altLang="ko-KR" sz="2400" dirty="0"/>
@@ -8540,36 +8487,20 @@
           <a:p>
             <a:r>
               <a:rPr lang="ko-KR" altLang="en-US" dirty="0"/>
-              <a:t>함수에 인자가 </a:t>
-            </a:r>
-            <a:r>
-              <a:rPr lang="ko-KR" altLang="en-US" dirty="0" smtClean="0"/>
-              <a:t>없는 </a:t>
-            </a:r>
+              <a:t>함수에 인자가 없는 경우</a:t>
+            </a:r>
+            <a:endParaRPr lang="en-US" altLang="ko-KR" dirty="0"/>
+          </a:p>
+          <a:p>
+            <a:endParaRPr lang="en-US" altLang="ko-KR" dirty="0"/>
+          </a:p>
+          <a:p>
+            <a:endParaRPr lang="en-US" altLang="ko-KR" dirty="0"/>
+          </a:p>
+          <a:p>
             <a:r>
               <a:rPr lang="ko-KR" altLang="en-US" dirty="0"/>
-              <a:t>경우</a:t>
-            </a:r>
-            <a:endParaRPr lang="en-US" altLang="ko-KR" dirty="0"/>
-          </a:p>
-          <a:p>
-            <a:endParaRPr lang="en-US" altLang="ko-KR" dirty="0"/>
-          </a:p>
-          <a:p>
-            <a:endParaRPr lang="en-US" altLang="ko-KR" dirty="0"/>
-          </a:p>
-          <a:p>
-            <a:r>
-              <a:rPr lang="ko-KR" altLang="en-US" dirty="0"/>
-              <a:t>함수에 인자가 </a:t>
-            </a:r>
-            <a:r>
-              <a:rPr lang="ko-KR" altLang="en-US" dirty="0" smtClean="0"/>
-              <a:t>있는 </a:t>
-            </a:r>
-            <a:r>
-              <a:rPr lang="ko-KR" altLang="en-US" dirty="0"/>
-              <a:t>경우</a:t>
+              <a:t>함수에 인자가 있는 경우</a:t>
             </a:r>
           </a:p>
         </p:txBody>
